--- a/Calendario2026/presentaciones/18_Expresiones_regulares.pptx
+++ b/Calendario2026/presentaciones/18_Expresiones_regulares.pptx
@@ -5,7 +5,7 @@
     <p:sldMasterId id="2147483648" r:id="rId1"/>
   </p:sldMasterIdLst>
   <p:notesMasterIdLst>
-    <p:notesMasterId r:id="rId53"/>
+    <p:notesMasterId r:id="rId52"/>
   </p:notesMasterIdLst>
   <p:sldIdLst>
     <p:sldId id="293" r:id="rId2"/>
@@ -29,36 +29,35 @@
     <p:sldId id="675" r:id="rId20"/>
     <p:sldId id="676" r:id="rId21"/>
     <p:sldId id="699" r:id="rId22"/>
-    <p:sldId id="698" r:id="rId23"/>
-    <p:sldId id="697" r:id="rId24"/>
-    <p:sldId id="677" r:id="rId25"/>
-    <p:sldId id="678" r:id="rId26"/>
-    <p:sldId id="727" r:id="rId27"/>
-    <p:sldId id="702" r:id="rId28"/>
-    <p:sldId id="704" r:id="rId29"/>
-    <p:sldId id="705" r:id="rId30"/>
-    <p:sldId id="706" r:id="rId31"/>
-    <p:sldId id="707" r:id="rId32"/>
-    <p:sldId id="680" r:id="rId33"/>
-    <p:sldId id="681" r:id="rId34"/>
-    <p:sldId id="682" r:id="rId35"/>
-    <p:sldId id="708" r:id="rId36"/>
-    <p:sldId id="709" r:id="rId37"/>
-    <p:sldId id="710" r:id="rId38"/>
-    <p:sldId id="711" r:id="rId39"/>
-    <p:sldId id="712" r:id="rId40"/>
-    <p:sldId id="713" r:id="rId41"/>
-    <p:sldId id="688" r:id="rId42"/>
-    <p:sldId id="687" r:id="rId43"/>
-    <p:sldId id="674" r:id="rId44"/>
-    <p:sldId id="730" r:id="rId45"/>
-    <p:sldId id="689" r:id="rId46"/>
-    <p:sldId id="729" r:id="rId47"/>
-    <p:sldId id="731" r:id="rId48"/>
-    <p:sldId id="733" r:id="rId49"/>
-    <p:sldId id="728" r:id="rId50"/>
-    <p:sldId id="732" r:id="rId51"/>
-    <p:sldId id="282" r:id="rId52"/>
+    <p:sldId id="697" r:id="rId23"/>
+    <p:sldId id="677" r:id="rId24"/>
+    <p:sldId id="678" r:id="rId25"/>
+    <p:sldId id="727" r:id="rId26"/>
+    <p:sldId id="702" r:id="rId27"/>
+    <p:sldId id="704" r:id="rId28"/>
+    <p:sldId id="705" r:id="rId29"/>
+    <p:sldId id="706" r:id="rId30"/>
+    <p:sldId id="707" r:id="rId31"/>
+    <p:sldId id="680" r:id="rId32"/>
+    <p:sldId id="681" r:id="rId33"/>
+    <p:sldId id="682" r:id="rId34"/>
+    <p:sldId id="708" r:id="rId35"/>
+    <p:sldId id="709" r:id="rId36"/>
+    <p:sldId id="710" r:id="rId37"/>
+    <p:sldId id="711" r:id="rId38"/>
+    <p:sldId id="712" r:id="rId39"/>
+    <p:sldId id="713" r:id="rId40"/>
+    <p:sldId id="688" r:id="rId41"/>
+    <p:sldId id="687" r:id="rId42"/>
+    <p:sldId id="674" r:id="rId43"/>
+    <p:sldId id="730" r:id="rId44"/>
+    <p:sldId id="689" r:id="rId45"/>
+    <p:sldId id="729" r:id="rId46"/>
+    <p:sldId id="731" r:id="rId47"/>
+    <p:sldId id="733" r:id="rId48"/>
+    <p:sldId id="728" r:id="rId49"/>
+    <p:sldId id="732" r:id="rId50"/>
+    <p:sldId id="282" r:id="rId51"/>
   </p:sldIdLst>
   <p:sldSz cx="9144000" cy="6858000" type="screen4x3"/>
   <p:notesSz cx="7010400" cy="9296400"/>
@@ -179,7 +178,7 @@
 <file path=ppt/revisionInfo.xml><?xml version="1.0" encoding="utf-8"?>
 <p1510:revInfo xmlns:a="http://schemas.openxmlformats.org/drawingml/2006/main" xmlns:r="http://schemas.openxmlformats.org/officeDocument/2006/relationships" xmlns:p1510="http://schemas.microsoft.com/office/powerpoint/2015/10/main">
   <p1510:revLst>
-    <p1510:client id="{1943A9A4-A4D4-4B2F-A97C-D7347219F3EB}" v="8" dt="2025-09-04T00:21:59.135"/>
+    <p1510:client id="{094E4236-C942-4953-B32E-0149FEEC4E2E}" v="1" dt="2026-03-03T21:58:02.115"/>
   </p1510:revLst>
 </p1510:revInfo>
 </file>
@@ -189,472 +188,130 @@
   <pc:docChgLst>
     <pc:chgData name="Lizethe Pérez Fuertes" userId="4ae9ef87-2a7d-42f8-8dfa-0a501a9e2ff4" providerId="ADAL" clId="{FDDD45CB-1330-4033-A842-3D2746AFF7C7}"/>
     <pc:docChg chg="undo redo custSel addSld delSld modSld">
-      <pc:chgData name="Lizethe Pérez Fuertes" userId="4ae9ef87-2a7d-42f8-8dfa-0a501a9e2ff4" providerId="ADAL" clId="{FDDD45CB-1330-4033-A842-3D2746AFF7C7}" dt="2025-09-04T00:22:19.260" v="684" actId="1076"/>
+      <pc:chgData name="Lizethe Pérez Fuertes" userId="4ae9ef87-2a7d-42f8-8dfa-0a501a9e2ff4" providerId="ADAL" clId="{FDDD45CB-1330-4033-A842-3D2746AFF7C7}" dt="2026-03-03T21:58:48.704" v="751" actId="113"/>
       <pc:docMkLst>
         <pc:docMk/>
       </pc:docMkLst>
       <pc:sldChg chg="modSp mod">
-        <pc:chgData name="Lizethe Pérez Fuertes" userId="4ae9ef87-2a7d-42f8-8dfa-0a501a9e2ff4" providerId="ADAL" clId="{FDDD45CB-1330-4033-A842-3D2746AFF7C7}" dt="2025-09-03T01:11:23.814" v="0" actId="33524"/>
+        <pc:chgData name="Lizethe Pérez Fuertes" userId="4ae9ef87-2a7d-42f8-8dfa-0a501a9e2ff4" providerId="ADAL" clId="{FDDD45CB-1330-4033-A842-3D2746AFF7C7}" dt="2026-03-03T21:21:55.193" v="686" actId="20577"/>
         <pc:sldMkLst>
           <pc:docMk/>
-          <pc:sldMk cId="4056088228" sldId="619"/>
+          <pc:sldMk cId="3176738947" sldId="676"/>
         </pc:sldMkLst>
         <pc:spChg chg="mod">
-          <ac:chgData name="Lizethe Pérez Fuertes" userId="4ae9ef87-2a7d-42f8-8dfa-0a501a9e2ff4" providerId="ADAL" clId="{FDDD45CB-1330-4033-A842-3D2746AFF7C7}" dt="2025-09-03T01:11:23.814" v="0" actId="33524"/>
+          <ac:chgData name="Lizethe Pérez Fuertes" userId="4ae9ef87-2a7d-42f8-8dfa-0a501a9e2ff4" providerId="ADAL" clId="{FDDD45CB-1330-4033-A842-3D2746AFF7C7}" dt="2026-03-03T21:21:55.193" v="686" actId="20577"/>
           <ac:spMkLst>
             <pc:docMk/>
-            <pc:sldMk cId="4056088228" sldId="619"/>
-            <ac:spMk id="10" creationId="{28D7FAFF-9722-4D6A-9DE5-55FC738D0886}"/>
-          </ac:spMkLst>
-        </pc:spChg>
-      </pc:sldChg>
-      <pc:sldChg chg="addSp delSp modSp mod">
-        <pc:chgData name="Lizethe Pérez Fuertes" userId="4ae9ef87-2a7d-42f8-8dfa-0a501a9e2ff4" providerId="ADAL" clId="{FDDD45CB-1330-4033-A842-3D2746AFF7C7}" dt="2025-09-03T17:39:34.078" v="286" actId="1076"/>
-        <pc:sldMkLst>
-          <pc:docMk/>
-          <pc:sldMk cId="3850094616" sldId="674"/>
-        </pc:sldMkLst>
-        <pc:spChg chg="mod">
-          <ac:chgData name="Lizethe Pérez Fuertes" userId="4ae9ef87-2a7d-42f8-8dfa-0a501a9e2ff4" providerId="ADAL" clId="{FDDD45CB-1330-4033-A842-3D2746AFF7C7}" dt="2025-09-03T17:35:45.234" v="243" actId="6549"/>
-          <ac:spMkLst>
-            <pc:docMk/>
-            <pc:sldMk cId="3850094616" sldId="674"/>
-            <ac:spMk id="5" creationId="{FC189524-E564-48DD-B173-E7D162EDC50C}"/>
-          </ac:spMkLst>
-        </pc:spChg>
-        <pc:spChg chg="mod">
-          <ac:chgData name="Lizethe Pérez Fuertes" userId="4ae9ef87-2a7d-42f8-8dfa-0a501a9e2ff4" providerId="ADAL" clId="{FDDD45CB-1330-4033-A842-3D2746AFF7C7}" dt="2025-09-03T17:38:40.671" v="283" actId="6549"/>
-          <ac:spMkLst>
-            <pc:docMk/>
-            <pc:sldMk cId="3850094616" sldId="674"/>
-            <ac:spMk id="6" creationId="{7B04CF3A-CFE2-489B-A399-BF52B6C4C715}"/>
-          </ac:spMkLst>
-        </pc:spChg>
-        <pc:picChg chg="add del mod">
-          <ac:chgData name="Lizethe Pérez Fuertes" userId="4ae9ef87-2a7d-42f8-8dfa-0a501a9e2ff4" providerId="ADAL" clId="{FDDD45CB-1330-4033-A842-3D2746AFF7C7}" dt="2025-09-03T17:35:26.070" v="214" actId="478"/>
-          <ac:picMkLst>
-            <pc:docMk/>
-            <pc:sldMk cId="3850094616" sldId="674"/>
-            <ac:picMk id="3" creationId="{4C517BBD-0FC8-20AD-6402-EF993A26CC3B}"/>
-          </ac:picMkLst>
-        </pc:picChg>
-        <pc:picChg chg="del mod">
-          <ac:chgData name="Lizethe Pérez Fuertes" userId="4ae9ef87-2a7d-42f8-8dfa-0a501a9e2ff4" providerId="ADAL" clId="{FDDD45CB-1330-4033-A842-3D2746AFF7C7}" dt="2025-09-03T17:28:31.970" v="144" actId="478"/>
-          <ac:picMkLst>
-            <pc:docMk/>
-            <pc:sldMk cId="3850094616" sldId="674"/>
-            <ac:picMk id="4" creationId="{B38B6A45-54CF-401F-B4D1-EA9E2C35CADA}"/>
-          </ac:picMkLst>
-        </pc:picChg>
-        <pc:picChg chg="add del mod">
-          <ac:chgData name="Lizethe Pérez Fuertes" userId="4ae9ef87-2a7d-42f8-8dfa-0a501a9e2ff4" providerId="ADAL" clId="{FDDD45CB-1330-4033-A842-3D2746AFF7C7}" dt="2025-09-03T17:39:27.763" v="284" actId="478"/>
-          <ac:picMkLst>
-            <pc:docMk/>
-            <pc:sldMk cId="3850094616" sldId="674"/>
-            <ac:picMk id="9" creationId="{2513634C-F818-ECAD-C596-18E2EDA47C79}"/>
-          </ac:picMkLst>
-        </pc:picChg>
-        <pc:picChg chg="add mod">
-          <ac:chgData name="Lizethe Pérez Fuertes" userId="4ae9ef87-2a7d-42f8-8dfa-0a501a9e2ff4" providerId="ADAL" clId="{FDDD45CB-1330-4033-A842-3D2746AFF7C7}" dt="2025-09-03T17:39:34.078" v="286" actId="1076"/>
-          <ac:picMkLst>
-            <pc:docMk/>
-            <pc:sldMk cId="3850094616" sldId="674"/>
-            <ac:picMk id="11" creationId="{40FAFC4F-C677-08E6-65FA-6C0A7E64CA35}"/>
-          </ac:picMkLst>
-        </pc:picChg>
-      </pc:sldChg>
-      <pc:sldChg chg="addSp delSp modSp mod">
-        <pc:chgData name="Lizethe Pérez Fuertes" userId="4ae9ef87-2a7d-42f8-8dfa-0a501a9e2ff4" providerId="ADAL" clId="{FDDD45CB-1330-4033-A842-3D2746AFF7C7}" dt="2025-09-04T00:04:01.615" v="391" actId="20577"/>
-        <pc:sldMkLst>
-          <pc:docMk/>
-          <pc:sldMk cId="3833007669" sldId="682"/>
-        </pc:sldMkLst>
-        <pc:spChg chg="mod">
-          <ac:chgData name="Lizethe Pérez Fuertes" userId="4ae9ef87-2a7d-42f8-8dfa-0a501a9e2ff4" providerId="ADAL" clId="{FDDD45CB-1330-4033-A842-3D2746AFF7C7}" dt="2025-09-04T00:04:01.615" v="391" actId="20577"/>
-          <ac:spMkLst>
-            <pc:docMk/>
-            <pc:sldMk cId="3833007669" sldId="682"/>
-            <ac:spMk id="8" creationId="{483A51E2-20D8-491F-9488-1827DD8F8899}"/>
-          </ac:spMkLst>
-        </pc:spChg>
-        <pc:picChg chg="add mod">
-          <ac:chgData name="Lizethe Pérez Fuertes" userId="4ae9ef87-2a7d-42f8-8dfa-0a501a9e2ff4" providerId="ADAL" clId="{FDDD45CB-1330-4033-A842-3D2746AFF7C7}" dt="2025-09-04T00:02:52.177" v="382" actId="1076"/>
-          <ac:picMkLst>
-            <pc:docMk/>
-            <pc:sldMk cId="3833007669" sldId="682"/>
-            <ac:picMk id="3" creationId="{11195915-0514-0D81-0EAD-E41B395DFB1C}"/>
-          </ac:picMkLst>
-        </pc:picChg>
-        <pc:picChg chg="del">
-          <ac:chgData name="Lizethe Pérez Fuertes" userId="4ae9ef87-2a7d-42f8-8dfa-0a501a9e2ff4" providerId="ADAL" clId="{FDDD45CB-1330-4033-A842-3D2746AFF7C7}" dt="2025-09-04T00:02:44.371" v="380" actId="478"/>
-          <ac:picMkLst>
-            <pc:docMk/>
-            <pc:sldMk cId="3833007669" sldId="682"/>
-            <ac:picMk id="4" creationId="{3D302044-8FBD-4141-AF0D-9775E0EA48E8}"/>
-          </ac:picMkLst>
-        </pc:picChg>
-      </pc:sldChg>
-      <pc:sldChg chg="del">
-        <pc:chgData name="Lizethe Pérez Fuertes" userId="4ae9ef87-2a7d-42f8-8dfa-0a501a9e2ff4" providerId="ADAL" clId="{FDDD45CB-1330-4033-A842-3D2746AFF7C7}" dt="2025-09-04T00:03:31.128" v="383" actId="47"/>
-        <pc:sldMkLst>
-          <pc:docMk/>
-          <pc:sldMk cId="873268359" sldId="683"/>
-        </pc:sldMkLst>
-      </pc:sldChg>
-      <pc:sldChg chg="del">
-        <pc:chgData name="Lizethe Pérez Fuertes" userId="4ae9ef87-2a7d-42f8-8dfa-0a501a9e2ff4" providerId="ADAL" clId="{FDDD45CB-1330-4033-A842-3D2746AFF7C7}" dt="2025-09-03T17:13:05.248" v="1" actId="47"/>
-        <pc:sldMkLst>
-          <pc:docMk/>
-          <pc:sldMk cId="647178352" sldId="684"/>
-        </pc:sldMkLst>
-      </pc:sldChg>
-      <pc:sldChg chg="del">
-        <pc:chgData name="Lizethe Pérez Fuertes" userId="4ae9ef87-2a7d-42f8-8dfa-0a501a9e2ff4" providerId="ADAL" clId="{FDDD45CB-1330-4033-A842-3D2746AFF7C7}" dt="2025-09-03T17:30:51.353" v="187" actId="47"/>
-        <pc:sldMkLst>
-          <pc:docMk/>
-          <pc:sldMk cId="2105101594" sldId="685"/>
-        </pc:sldMkLst>
-      </pc:sldChg>
-      <pc:sldChg chg="addSp delSp modSp mod">
-        <pc:chgData name="Lizethe Pérez Fuertes" userId="4ae9ef87-2a7d-42f8-8dfa-0a501a9e2ff4" providerId="ADAL" clId="{FDDD45CB-1330-4033-A842-3D2746AFF7C7}" dt="2025-09-03T17:44:02.305" v="319" actId="6549"/>
-        <pc:sldMkLst>
-          <pc:docMk/>
-          <pc:sldMk cId="3789720049" sldId="689"/>
-        </pc:sldMkLst>
-        <pc:spChg chg="mod">
-          <ac:chgData name="Lizethe Pérez Fuertes" userId="4ae9ef87-2a7d-42f8-8dfa-0a501a9e2ff4" providerId="ADAL" clId="{FDDD45CB-1330-4033-A842-3D2746AFF7C7}" dt="2025-09-03T17:44:02.305" v="319" actId="6549"/>
-          <ac:spMkLst>
-            <pc:docMk/>
-            <pc:sldMk cId="3789720049" sldId="689"/>
-            <ac:spMk id="5" creationId="{CD51C6FC-C7B4-4F3A-BEE8-8127DCEAF665}"/>
-          </ac:spMkLst>
-        </pc:spChg>
-        <pc:spChg chg="mod">
-          <ac:chgData name="Lizethe Pérez Fuertes" userId="4ae9ef87-2a7d-42f8-8dfa-0a501a9e2ff4" providerId="ADAL" clId="{FDDD45CB-1330-4033-A842-3D2746AFF7C7}" dt="2025-09-03T17:43:33.380" v="312" actId="1076"/>
-          <ac:spMkLst>
-            <pc:docMk/>
-            <pc:sldMk cId="3789720049" sldId="689"/>
-            <ac:spMk id="13" creationId="{D8614476-5746-4910-AE97-837BDC1DE82C}"/>
-          </ac:spMkLst>
-        </pc:spChg>
-        <pc:picChg chg="add mod">
-          <ac:chgData name="Lizethe Pérez Fuertes" userId="4ae9ef87-2a7d-42f8-8dfa-0a501a9e2ff4" providerId="ADAL" clId="{FDDD45CB-1330-4033-A842-3D2746AFF7C7}" dt="2025-09-03T17:43:42.700" v="317" actId="1076"/>
-          <ac:picMkLst>
-            <pc:docMk/>
-            <pc:sldMk cId="3789720049" sldId="689"/>
-            <ac:picMk id="3" creationId="{CC56C17C-52EF-DEF6-AFA2-44D926EB428F}"/>
-          </ac:picMkLst>
-        </pc:picChg>
-        <pc:picChg chg="del">
-          <ac:chgData name="Lizethe Pérez Fuertes" userId="4ae9ef87-2a7d-42f8-8dfa-0a501a9e2ff4" providerId="ADAL" clId="{FDDD45CB-1330-4033-A842-3D2746AFF7C7}" dt="2025-09-03T17:41:13.446" v="289" actId="478"/>
-          <ac:picMkLst>
-            <pc:docMk/>
-            <pc:sldMk cId="3789720049" sldId="689"/>
-            <ac:picMk id="4" creationId="{4A0F5007-3343-4069-AEEE-C64F855CC1DB}"/>
-          </ac:picMkLst>
-        </pc:picChg>
-        <pc:picChg chg="del mod">
-          <ac:chgData name="Lizethe Pérez Fuertes" userId="4ae9ef87-2a7d-42f8-8dfa-0a501a9e2ff4" providerId="ADAL" clId="{FDDD45CB-1330-4033-A842-3D2746AFF7C7}" dt="2025-09-03T17:41:23.080" v="291" actId="478"/>
-          <ac:picMkLst>
-            <pc:docMk/>
-            <pc:sldMk cId="3789720049" sldId="689"/>
-            <ac:picMk id="8" creationId="{1C8D1C6E-EE42-B43B-9084-CF731AF947A1}"/>
-          </ac:picMkLst>
-        </pc:picChg>
-      </pc:sldChg>
-      <pc:sldChg chg="del">
-        <pc:chgData name="Lizethe Pérez Fuertes" userId="4ae9ef87-2a7d-42f8-8dfa-0a501a9e2ff4" providerId="ADAL" clId="{FDDD45CB-1330-4033-A842-3D2746AFF7C7}" dt="2025-09-03T17:53:11.664" v="341" actId="47"/>
-        <pc:sldMkLst>
-          <pc:docMk/>
-          <pc:sldMk cId="1923512369" sldId="691"/>
-        </pc:sldMkLst>
-      </pc:sldChg>
-      <pc:sldChg chg="modSp mod">
-        <pc:chgData name="Lizethe Pérez Fuertes" userId="4ae9ef87-2a7d-42f8-8dfa-0a501a9e2ff4" providerId="ADAL" clId="{FDDD45CB-1330-4033-A842-3D2746AFF7C7}" dt="2025-09-04T00:09:55.371" v="395" actId="20577"/>
-        <pc:sldMkLst>
-          <pc:docMk/>
-          <pc:sldMk cId="1474776067" sldId="698"/>
-        </pc:sldMkLst>
-        <pc:spChg chg="mod">
-          <ac:chgData name="Lizethe Pérez Fuertes" userId="4ae9ef87-2a7d-42f8-8dfa-0a501a9e2ff4" providerId="ADAL" clId="{FDDD45CB-1330-4033-A842-3D2746AFF7C7}" dt="2025-09-04T00:09:55.371" v="395" actId="20577"/>
-          <ac:spMkLst>
-            <pc:docMk/>
-            <pc:sldMk cId="1474776067" sldId="698"/>
+            <pc:sldMk cId="3176738947" sldId="676"/>
             <ac:spMk id="9" creationId="{E1C784F4-BDDC-4D50-B8E9-68B91761F76A}"/>
           </ac:spMkLst>
         </pc:spChg>
       </pc:sldChg>
       <pc:sldChg chg="modSp mod">
-        <pc:chgData name="Lizethe Pérez Fuertes" userId="4ae9ef87-2a7d-42f8-8dfa-0a501a9e2ff4" providerId="ADAL" clId="{FDDD45CB-1330-4033-A842-3D2746AFF7C7}" dt="2025-09-04T00:09:42.833" v="394" actId="20577"/>
+        <pc:chgData name="Lizethe Pérez Fuertes" userId="4ae9ef87-2a7d-42f8-8dfa-0a501a9e2ff4" providerId="ADAL" clId="{FDDD45CB-1330-4033-A842-3D2746AFF7C7}" dt="2026-03-03T21:29:13.991" v="725" actId="113"/>
+        <pc:sldMkLst>
+          <pc:docMk/>
+          <pc:sldMk cId="2265507875" sldId="677"/>
+        </pc:sldMkLst>
+        <pc:spChg chg="mod">
+          <ac:chgData name="Lizethe Pérez Fuertes" userId="4ae9ef87-2a7d-42f8-8dfa-0a501a9e2ff4" providerId="ADAL" clId="{FDDD45CB-1330-4033-A842-3D2746AFF7C7}" dt="2026-03-03T21:29:13.991" v="725" actId="113"/>
+          <ac:spMkLst>
+            <pc:docMk/>
+            <pc:sldMk cId="2265507875" sldId="677"/>
+            <ac:spMk id="6" creationId="{7B04CF3A-CFE2-489B-A399-BF52B6C4C715}"/>
+          </ac:spMkLst>
+        </pc:spChg>
+      </pc:sldChg>
+      <pc:sldChg chg="addSp delSp modSp mod">
+        <pc:chgData name="Lizethe Pérez Fuertes" userId="4ae9ef87-2a7d-42f8-8dfa-0a501a9e2ff4" providerId="ADAL" clId="{FDDD45CB-1330-4033-A842-3D2746AFF7C7}" dt="2026-03-03T21:26:09.472" v="722" actId="113"/>
+        <pc:sldMkLst>
+          <pc:docMk/>
+          <pc:sldMk cId="946192398" sldId="697"/>
+        </pc:sldMkLst>
+        <pc:spChg chg="mod">
+          <ac:chgData name="Lizethe Pérez Fuertes" userId="4ae9ef87-2a7d-42f8-8dfa-0a501a9e2ff4" providerId="ADAL" clId="{FDDD45CB-1330-4033-A842-3D2746AFF7C7}" dt="2026-03-03T21:26:09.472" v="722" actId="113"/>
+          <ac:spMkLst>
+            <pc:docMk/>
+            <pc:sldMk cId="946192398" sldId="697"/>
+            <ac:spMk id="9" creationId="{E1C784F4-BDDC-4D50-B8E9-68B91761F76A}"/>
+          </ac:spMkLst>
+        </pc:spChg>
+        <pc:picChg chg="del">
+          <ac:chgData name="Lizethe Pérez Fuertes" userId="4ae9ef87-2a7d-42f8-8dfa-0a501a9e2ff4" providerId="ADAL" clId="{FDDD45CB-1330-4033-A842-3D2746AFF7C7}" dt="2026-03-03T21:25:39.867" v="697" actId="478"/>
+          <ac:picMkLst>
+            <pc:docMk/>
+            <pc:sldMk cId="946192398" sldId="697"/>
+            <ac:picMk id="3" creationId="{E871119C-7F00-4F18-B5A8-B63D8C979EE9}"/>
+          </ac:picMkLst>
+        </pc:picChg>
+        <pc:picChg chg="add mod">
+          <ac:chgData name="Lizethe Pérez Fuertes" userId="4ae9ef87-2a7d-42f8-8dfa-0a501a9e2ff4" providerId="ADAL" clId="{FDDD45CB-1330-4033-A842-3D2746AFF7C7}" dt="2026-03-03T21:25:47.212" v="701" actId="1076"/>
+          <ac:picMkLst>
+            <pc:docMk/>
+            <pc:sldMk cId="946192398" sldId="697"/>
+            <ac:picMk id="4" creationId="{962A6C1B-37ED-6724-052E-CE5BEC606AC2}"/>
+          </ac:picMkLst>
+        </pc:picChg>
+      </pc:sldChg>
+      <pc:sldChg chg="del">
+        <pc:chgData name="Lizethe Pérez Fuertes" userId="4ae9ef87-2a7d-42f8-8dfa-0a501a9e2ff4" providerId="ADAL" clId="{FDDD45CB-1330-4033-A842-3D2746AFF7C7}" dt="2026-03-03T21:24:42.892" v="696" actId="47"/>
+        <pc:sldMkLst>
+          <pc:docMk/>
+          <pc:sldMk cId="1474776067" sldId="698"/>
+        </pc:sldMkLst>
+      </pc:sldChg>
+      <pc:sldChg chg="addSp delSp modSp mod">
+        <pc:chgData name="Lizethe Pérez Fuertes" userId="4ae9ef87-2a7d-42f8-8dfa-0a501a9e2ff4" providerId="ADAL" clId="{FDDD45CB-1330-4033-A842-3D2746AFF7C7}" dt="2026-03-03T21:24:09.547" v="695" actId="1076"/>
         <pc:sldMkLst>
           <pc:docMk/>
           <pc:sldMk cId="2849105023" sldId="699"/>
         </pc:sldMkLst>
-        <pc:spChg chg="mod">
-          <ac:chgData name="Lizethe Pérez Fuertes" userId="4ae9ef87-2a7d-42f8-8dfa-0a501a9e2ff4" providerId="ADAL" clId="{FDDD45CB-1330-4033-A842-3D2746AFF7C7}" dt="2025-09-04T00:09:42.833" v="394" actId="20577"/>
-          <ac:spMkLst>
+        <pc:picChg chg="add mod">
+          <ac:chgData name="Lizethe Pérez Fuertes" userId="4ae9ef87-2a7d-42f8-8dfa-0a501a9e2ff4" providerId="ADAL" clId="{FDDD45CB-1330-4033-A842-3D2746AFF7C7}" dt="2026-03-03T21:24:09.547" v="695" actId="1076"/>
+          <ac:picMkLst>
             <pc:docMk/>
             <pc:sldMk cId="2849105023" sldId="699"/>
-            <ac:spMk id="9" creationId="{E1C784F4-BDDC-4D50-B8E9-68B91761F76A}"/>
-          </ac:spMkLst>
-        </pc:spChg>
-      </pc:sldChg>
-      <pc:sldChg chg="addSp delSp modSp mod">
-        <pc:chgData name="Lizethe Pérez Fuertes" userId="4ae9ef87-2a7d-42f8-8dfa-0a501a9e2ff4" providerId="ADAL" clId="{FDDD45CB-1330-4033-A842-3D2746AFF7C7}" dt="2025-09-03T22:22:50.829" v="376" actId="478"/>
-        <pc:sldMkLst>
-          <pc:docMk/>
-          <pc:sldMk cId="2777994466" sldId="728"/>
-        </pc:sldMkLst>
-        <pc:spChg chg="add del mod">
-          <ac:chgData name="Lizethe Pérez Fuertes" userId="4ae9ef87-2a7d-42f8-8dfa-0a501a9e2ff4" providerId="ADAL" clId="{FDDD45CB-1330-4033-A842-3D2746AFF7C7}" dt="2025-09-03T22:22:50.829" v="376" actId="478"/>
-          <ac:spMkLst>
-            <pc:docMk/>
-            <pc:sldMk cId="2777994466" sldId="728"/>
-            <ac:spMk id="3" creationId="{8A01372C-C9B9-F812-2C71-D9E395D5AA27}"/>
-          </ac:spMkLst>
-        </pc:spChg>
-      </pc:sldChg>
-      <pc:sldChg chg="addSp delSp modSp mod">
-        <pc:chgData name="Lizethe Pérez Fuertes" userId="4ae9ef87-2a7d-42f8-8dfa-0a501a9e2ff4" providerId="ADAL" clId="{FDDD45CB-1330-4033-A842-3D2746AFF7C7}" dt="2025-09-03T17:51:38.836" v="332" actId="478"/>
-        <pc:sldMkLst>
-          <pc:docMk/>
-          <pc:sldMk cId="155978432" sldId="729"/>
-        </pc:sldMkLst>
-        <pc:spChg chg="mod">
-          <ac:chgData name="Lizethe Pérez Fuertes" userId="4ae9ef87-2a7d-42f8-8dfa-0a501a9e2ff4" providerId="ADAL" clId="{FDDD45CB-1330-4033-A842-3D2746AFF7C7}" dt="2025-09-03T17:44:54.179" v="322" actId="20577"/>
-          <ac:spMkLst>
-            <pc:docMk/>
-            <pc:sldMk cId="155978432" sldId="729"/>
-            <ac:spMk id="5" creationId="{FC189524-E564-48DD-B173-E7D162EDC50C}"/>
-          </ac:spMkLst>
-        </pc:spChg>
-        <pc:spChg chg="add del">
-          <ac:chgData name="Lizethe Pérez Fuertes" userId="4ae9ef87-2a7d-42f8-8dfa-0a501a9e2ff4" providerId="ADAL" clId="{FDDD45CB-1330-4033-A842-3D2746AFF7C7}" dt="2025-09-03T17:51:38.836" v="332" actId="478"/>
-          <ac:spMkLst>
-            <pc:docMk/>
-            <pc:sldMk cId="155978432" sldId="729"/>
-            <ac:spMk id="12" creationId="{45236C5C-4492-4167-82B4-CF01EC88B68A}"/>
-          </ac:spMkLst>
-        </pc:spChg>
-        <pc:picChg chg="add mod">
-          <ac:chgData name="Lizethe Pérez Fuertes" userId="4ae9ef87-2a7d-42f8-8dfa-0a501a9e2ff4" providerId="ADAL" clId="{FDDD45CB-1330-4033-A842-3D2746AFF7C7}" dt="2025-09-03T17:51:03.477" v="328" actId="1076"/>
+            <ac:picMk id="3" creationId="{514A6828-6F08-192B-9770-F2E3E2BA265F}"/>
+          </ac:picMkLst>
+        </pc:picChg>
+        <pc:picChg chg="add del">
+          <ac:chgData name="Lizethe Pérez Fuertes" userId="4ae9ef87-2a7d-42f8-8dfa-0a501a9e2ff4" providerId="ADAL" clId="{FDDD45CB-1330-4033-A842-3D2746AFF7C7}" dt="2026-03-03T21:23:58.405" v="689" actId="478"/>
           <ac:picMkLst>
             <pc:docMk/>
-            <pc:sldMk cId="155978432" sldId="729"/>
-            <ac:picMk id="3" creationId="{7FA94031-3EAA-2C65-1CCE-6F3D46DA7C7A}"/>
-          </ac:picMkLst>
-        </pc:picChg>
-        <pc:picChg chg="del">
-          <ac:chgData name="Lizethe Pérez Fuertes" userId="4ae9ef87-2a7d-42f8-8dfa-0a501a9e2ff4" providerId="ADAL" clId="{FDDD45CB-1330-4033-A842-3D2746AFF7C7}" dt="2025-09-03T17:50:57.300" v="324" actId="478"/>
-          <ac:picMkLst>
-            <pc:docMk/>
-            <pc:sldMk cId="155978432" sldId="729"/>
-            <ac:picMk id="8" creationId="{9E8BDEDE-78F6-48B6-B26B-4636CFFD6F1D}"/>
-          </ac:picMkLst>
-        </pc:picChg>
-        <pc:picChg chg="del">
-          <ac:chgData name="Lizethe Pérez Fuertes" userId="4ae9ef87-2a7d-42f8-8dfa-0a501a9e2ff4" providerId="ADAL" clId="{FDDD45CB-1330-4033-A842-3D2746AFF7C7}" dt="2025-09-03T17:50:55.268" v="323" actId="478"/>
-          <ac:picMkLst>
-            <pc:docMk/>
-            <pc:sldMk cId="155978432" sldId="729"/>
-            <ac:picMk id="10" creationId="{78918B87-AE47-43DF-A868-48DA504D01DA}"/>
+            <pc:sldMk cId="2849105023" sldId="699"/>
+            <ac:picMk id="8" creationId="{58F906D6-ACE3-4DD9-BB99-D80454EBFEEA}"/>
           </ac:picMkLst>
         </pc:picChg>
       </pc:sldChg>
-      <pc:sldChg chg="addSp delSp modSp mod">
-        <pc:chgData name="Lizethe Pérez Fuertes" userId="4ae9ef87-2a7d-42f8-8dfa-0a501a9e2ff4" providerId="ADAL" clId="{FDDD45CB-1330-4033-A842-3D2746AFF7C7}" dt="2025-09-03T17:44:23.820" v="320" actId="1076"/>
-        <pc:sldMkLst>
-          <pc:docMk/>
-          <pc:sldMk cId="589800836" sldId="730"/>
-        </pc:sldMkLst>
-        <pc:spChg chg="mod">
-          <ac:chgData name="Lizethe Pérez Fuertes" userId="4ae9ef87-2a7d-42f8-8dfa-0a501a9e2ff4" providerId="ADAL" clId="{FDDD45CB-1330-4033-A842-3D2746AFF7C7}" dt="2025-09-03T17:44:23.820" v="320" actId="1076"/>
-          <ac:spMkLst>
-            <pc:docMk/>
-            <pc:sldMk cId="589800836" sldId="730"/>
-            <ac:spMk id="5" creationId="{FC189524-E564-48DD-B173-E7D162EDC50C}"/>
-          </ac:spMkLst>
-        </pc:spChg>
-        <pc:spChg chg="mod">
-          <ac:chgData name="Lizethe Pérez Fuertes" userId="4ae9ef87-2a7d-42f8-8dfa-0a501a9e2ff4" providerId="ADAL" clId="{FDDD45CB-1330-4033-A842-3D2746AFF7C7}" dt="2025-09-03T17:34:15.567" v="213"/>
-          <ac:spMkLst>
-            <pc:docMk/>
-            <pc:sldMk cId="589800836" sldId="730"/>
-            <ac:spMk id="6" creationId="{7B04CF3A-CFE2-489B-A399-BF52B6C4C715}"/>
-          </ac:spMkLst>
-        </pc:spChg>
-        <pc:picChg chg="del">
-          <ac:chgData name="Lizethe Pérez Fuertes" userId="4ae9ef87-2a7d-42f8-8dfa-0a501a9e2ff4" providerId="ADAL" clId="{FDDD45CB-1330-4033-A842-3D2746AFF7C7}" dt="2025-09-03T17:22:59.475" v="2" actId="478"/>
-          <ac:picMkLst>
-            <pc:docMk/>
-            <pc:sldMk cId="589800836" sldId="730"/>
-            <ac:picMk id="3" creationId="{67B840A6-3E96-5996-0981-8414C3D4053A}"/>
-          </ac:picMkLst>
-        </pc:picChg>
-        <pc:picChg chg="del">
-          <ac:chgData name="Lizethe Pérez Fuertes" userId="4ae9ef87-2a7d-42f8-8dfa-0a501a9e2ff4" providerId="ADAL" clId="{FDDD45CB-1330-4033-A842-3D2746AFF7C7}" dt="2025-09-03T17:23:14.789" v="5" actId="478"/>
-          <ac:picMkLst>
-            <pc:docMk/>
-            <pc:sldMk cId="589800836" sldId="730"/>
-            <ac:picMk id="4" creationId="{9580680C-9CC9-4EA3-B20A-E32B47C0246B}"/>
-          </ac:picMkLst>
-        </pc:picChg>
-        <pc:picChg chg="add del mod">
-          <ac:chgData name="Lizethe Pérez Fuertes" userId="4ae9ef87-2a7d-42f8-8dfa-0a501a9e2ff4" providerId="ADAL" clId="{FDDD45CB-1330-4033-A842-3D2746AFF7C7}" dt="2025-09-03T17:33:54.872" v="189" actId="478"/>
-          <ac:picMkLst>
-            <pc:docMk/>
-            <pc:sldMk cId="589800836" sldId="730"/>
-            <ac:picMk id="7" creationId="{73E4D1ED-34DF-0D17-C963-BE9D6B542065}"/>
-          </ac:picMkLst>
-        </pc:picChg>
-        <pc:picChg chg="add mod">
-          <ac:chgData name="Lizethe Pérez Fuertes" userId="4ae9ef87-2a7d-42f8-8dfa-0a501a9e2ff4" providerId="ADAL" clId="{FDDD45CB-1330-4033-A842-3D2746AFF7C7}" dt="2025-09-03T17:39:51.773" v="288" actId="1076"/>
-          <ac:picMkLst>
-            <pc:docMk/>
-            <pc:sldMk cId="589800836" sldId="730"/>
-            <ac:picMk id="9" creationId="{CB066C06-55B5-2780-069C-E34F3460A7AD}"/>
-          </ac:picMkLst>
-        </pc:picChg>
-      </pc:sldChg>
-      <pc:sldChg chg="del">
-        <pc:chgData name="Lizethe Pérez Fuertes" userId="4ae9ef87-2a7d-42f8-8dfa-0a501a9e2ff4" providerId="ADAL" clId="{FDDD45CB-1330-4033-A842-3D2746AFF7C7}" dt="2025-09-03T17:31:07.685" v="188" actId="47"/>
-        <pc:sldMkLst>
-          <pc:docMk/>
-          <pc:sldMk cId="1078318760" sldId="731"/>
-        </pc:sldMkLst>
-      </pc:sldChg>
-      <pc:sldChg chg="addSp delSp modSp add mod">
-        <pc:chgData name="Lizethe Pérez Fuertes" userId="4ae9ef87-2a7d-42f8-8dfa-0a501a9e2ff4" providerId="ADAL" clId="{FDDD45CB-1330-4033-A842-3D2746AFF7C7}" dt="2025-09-03T17:52:42.306" v="340" actId="20577"/>
-        <pc:sldMkLst>
-          <pc:docMk/>
-          <pc:sldMk cId="3134704428" sldId="731"/>
-        </pc:sldMkLst>
-        <pc:spChg chg="mod">
-          <ac:chgData name="Lizethe Pérez Fuertes" userId="4ae9ef87-2a7d-42f8-8dfa-0a501a9e2ff4" providerId="ADAL" clId="{FDDD45CB-1330-4033-A842-3D2746AFF7C7}" dt="2025-09-03T17:52:42.306" v="340" actId="20577"/>
-          <ac:spMkLst>
-            <pc:docMk/>
-            <pc:sldMk cId="3134704428" sldId="731"/>
-            <ac:spMk id="12" creationId="{BEEF0D9B-9613-E1C5-F39D-B4AD7AD60D6A}"/>
-          </ac:spMkLst>
-        </pc:spChg>
-        <pc:picChg chg="del">
-          <ac:chgData name="Lizethe Pérez Fuertes" userId="4ae9ef87-2a7d-42f8-8dfa-0a501a9e2ff4" providerId="ADAL" clId="{FDDD45CB-1330-4033-A842-3D2746AFF7C7}" dt="2025-09-03T17:52:15.356" v="333" actId="478"/>
-          <ac:picMkLst>
-            <pc:docMk/>
-            <pc:sldMk cId="3134704428" sldId="731"/>
-            <ac:picMk id="3" creationId="{D152EE2B-302F-357C-EBF5-3EDA660A141F}"/>
-          </ac:picMkLst>
-        </pc:picChg>
-        <pc:picChg chg="add mod">
-          <ac:chgData name="Lizethe Pérez Fuertes" userId="4ae9ef87-2a7d-42f8-8dfa-0a501a9e2ff4" providerId="ADAL" clId="{FDDD45CB-1330-4033-A842-3D2746AFF7C7}" dt="2025-09-03T17:52:34.582" v="339" actId="14100"/>
-          <ac:picMkLst>
-            <pc:docMk/>
-            <pc:sldMk cId="3134704428" sldId="731"/>
-            <ac:picMk id="4" creationId="{A31A5C34-9DA4-2324-CA7E-0BFBAD89BD8B}"/>
-          </ac:picMkLst>
-        </pc:picChg>
-      </pc:sldChg>
-      <pc:sldChg chg="addSp delSp modSp add mod">
-        <pc:chgData name="Lizethe Pérez Fuertes" userId="4ae9ef87-2a7d-42f8-8dfa-0a501a9e2ff4" providerId="ADAL" clId="{FDDD45CB-1330-4033-A842-3D2746AFF7C7}" dt="2025-09-03T22:50:01.701" v="379" actId="1076"/>
+      <pc:sldChg chg="modSp mod">
+        <pc:chgData name="Lizethe Pérez Fuertes" userId="4ae9ef87-2a7d-42f8-8dfa-0a501a9e2ff4" providerId="ADAL" clId="{FDDD45CB-1330-4033-A842-3D2746AFF7C7}" dt="2026-03-03T21:58:48.704" v="751" actId="113"/>
         <pc:sldMkLst>
           <pc:docMk/>
           <pc:sldMk cId="1919744961" sldId="732"/>
         </pc:sldMkLst>
         <pc:spChg chg="mod">
-          <ac:chgData name="Lizethe Pérez Fuertes" userId="4ae9ef87-2a7d-42f8-8dfa-0a501a9e2ff4" providerId="ADAL" clId="{FDDD45CB-1330-4033-A842-3D2746AFF7C7}" dt="2025-09-03T22:49:59.460" v="378" actId="1076"/>
+          <ac:chgData name="Lizethe Pérez Fuertes" userId="4ae9ef87-2a7d-42f8-8dfa-0a501a9e2ff4" providerId="ADAL" clId="{FDDD45CB-1330-4033-A842-3D2746AFF7C7}" dt="2026-03-03T21:58:48.704" v="751" actId="113"/>
           <ac:spMkLst>
             <pc:docMk/>
             <pc:sldMk cId="1919744961" sldId="732"/>
             <ac:spMk id="3" creationId="{731A6801-6C8C-D007-4366-6A294226C510}"/>
           </ac:spMkLst>
         </pc:spChg>
-        <pc:spChg chg="del mod">
-          <ac:chgData name="Lizethe Pérez Fuertes" userId="4ae9ef87-2a7d-42f8-8dfa-0a501a9e2ff4" providerId="ADAL" clId="{FDDD45CB-1330-4033-A842-3D2746AFF7C7}" dt="2025-09-03T22:49:55.563" v="377" actId="478"/>
-          <ac:spMkLst>
-            <pc:docMk/>
-            <pc:sldMk cId="1919744961" sldId="732"/>
-            <ac:spMk id="7" creationId="{A27303CE-DCC1-3013-97FF-268A3292B1FB}"/>
-          </ac:spMkLst>
-        </pc:spChg>
-        <pc:spChg chg="del">
-          <ac:chgData name="Lizethe Pérez Fuertes" userId="4ae9ef87-2a7d-42f8-8dfa-0a501a9e2ff4" providerId="ADAL" clId="{FDDD45CB-1330-4033-A842-3D2746AFF7C7}" dt="2025-09-03T18:19:27.036" v="347" actId="478"/>
-          <ac:spMkLst>
-            <pc:docMk/>
-            <pc:sldMk cId="1919744961" sldId="732"/>
-            <ac:spMk id="10" creationId="{6F763D7A-9542-8C65-C1A3-A9C0E8F45228}"/>
-          </ac:spMkLst>
-        </pc:spChg>
-        <pc:picChg chg="del mod">
-          <ac:chgData name="Lizethe Pérez Fuertes" userId="4ae9ef87-2a7d-42f8-8dfa-0a501a9e2ff4" providerId="ADAL" clId="{FDDD45CB-1330-4033-A842-3D2746AFF7C7}" dt="2025-09-03T18:19:31.897" v="349" actId="478"/>
-          <ac:picMkLst>
-            <pc:docMk/>
-            <pc:sldMk cId="1919744961" sldId="732"/>
-            <ac:picMk id="4" creationId="{6F17F71A-7A5E-60EE-3C19-8867623FE112}"/>
-          </ac:picMkLst>
-        </pc:picChg>
-        <pc:picChg chg="add mod">
-          <ac:chgData name="Lizethe Pérez Fuertes" userId="4ae9ef87-2a7d-42f8-8dfa-0a501a9e2ff4" providerId="ADAL" clId="{FDDD45CB-1330-4033-A842-3D2746AFF7C7}" dt="2025-09-03T22:50:01.701" v="379" actId="1076"/>
-          <ac:picMkLst>
-            <pc:docMk/>
-            <pc:sldMk cId="1919744961" sldId="732"/>
-            <ac:picMk id="5" creationId="{A49844EA-464A-B92D-FFF7-A3303FD25631}"/>
-          </ac:picMkLst>
-        </pc:picChg>
       </pc:sldChg>
-      <pc:sldChg chg="addSp delSp modSp add mod">
-        <pc:chgData name="Lizethe Pérez Fuertes" userId="4ae9ef87-2a7d-42f8-8dfa-0a501a9e2ff4" providerId="ADAL" clId="{FDDD45CB-1330-4033-A842-3D2746AFF7C7}" dt="2025-09-04T00:22:19.260" v="684" actId="1076"/>
+      <pc:sldChg chg="modSp mod">
+        <pc:chgData name="Lizethe Pérez Fuertes" userId="4ae9ef87-2a7d-42f8-8dfa-0a501a9e2ff4" providerId="ADAL" clId="{FDDD45CB-1330-4033-A842-3D2746AFF7C7}" dt="2026-03-03T21:51:36.062" v="729" actId="20577"/>
         <pc:sldMkLst>
           <pc:docMk/>
           <pc:sldMk cId="1212743794" sldId="733"/>
         </pc:sldMkLst>
-        <pc:spChg chg="add mod">
-          <ac:chgData name="Lizethe Pérez Fuertes" userId="4ae9ef87-2a7d-42f8-8dfa-0a501a9e2ff4" providerId="ADAL" clId="{FDDD45CB-1330-4033-A842-3D2746AFF7C7}" dt="2025-09-04T00:20:51.906" v="672" actId="1076"/>
-          <ac:spMkLst>
-            <pc:docMk/>
-            <pc:sldMk cId="1212743794" sldId="733"/>
-            <ac:spMk id="2" creationId="{DD48AE74-7006-399F-BE61-A25F53E14F30}"/>
-          </ac:spMkLst>
-        </pc:spChg>
         <pc:spChg chg="mod">
-          <ac:chgData name="Lizethe Pérez Fuertes" userId="4ae9ef87-2a7d-42f8-8dfa-0a501a9e2ff4" providerId="ADAL" clId="{FDDD45CB-1330-4033-A842-3D2746AFF7C7}" dt="2025-09-04T00:20:48.878" v="671" actId="1076"/>
+          <ac:chgData name="Lizethe Pérez Fuertes" userId="4ae9ef87-2a7d-42f8-8dfa-0a501a9e2ff4" providerId="ADAL" clId="{FDDD45CB-1330-4033-A842-3D2746AFF7C7}" dt="2026-03-03T21:51:36.062" v="729" actId="20577"/>
           <ac:spMkLst>
             <pc:docMk/>
             <pc:sldMk cId="1212743794" sldId="733"/>
             <ac:spMk id="5" creationId="{C20582F6-D5EC-1CFC-EB01-59FE60FC7F5E}"/>
           </ac:spMkLst>
         </pc:spChg>
-        <pc:spChg chg="mod">
-          <ac:chgData name="Lizethe Pérez Fuertes" userId="4ae9ef87-2a7d-42f8-8dfa-0a501a9e2ff4" providerId="ADAL" clId="{FDDD45CB-1330-4033-A842-3D2746AFF7C7}" dt="2025-09-04T00:22:19.260" v="684" actId="1076"/>
-          <ac:spMkLst>
-            <pc:docMk/>
-            <pc:sldMk cId="1212743794" sldId="733"/>
-            <ac:spMk id="6" creationId="{8C20D50E-303B-CA1C-3EE2-88FBFC9832C1}"/>
-          </ac:spMkLst>
-        </pc:spChg>
-        <pc:spChg chg="del mod">
-          <ac:chgData name="Lizethe Pérez Fuertes" userId="4ae9ef87-2a7d-42f8-8dfa-0a501a9e2ff4" providerId="ADAL" clId="{FDDD45CB-1330-4033-A842-3D2746AFF7C7}" dt="2025-09-04T00:16:28.520" v="501" actId="478"/>
-          <ac:spMkLst>
-            <pc:docMk/>
-            <pc:sldMk cId="1212743794" sldId="733"/>
-            <ac:spMk id="8" creationId="{961C17CF-7D69-11D8-A63B-228A62974095}"/>
-          </ac:spMkLst>
-        </pc:spChg>
-        <pc:picChg chg="del mod">
-          <ac:chgData name="Lizethe Pérez Fuertes" userId="4ae9ef87-2a7d-42f8-8dfa-0a501a9e2ff4" providerId="ADAL" clId="{FDDD45CB-1330-4033-A842-3D2746AFF7C7}" dt="2025-09-04T00:16:31.372" v="502" actId="478"/>
-          <ac:picMkLst>
-            <pc:docMk/>
-            <pc:sldMk cId="1212743794" sldId="733"/>
-            <ac:picMk id="4" creationId="{37B84E14-22EB-A7C8-A10D-98A786068788}"/>
-          </ac:picMkLst>
-        </pc:picChg>
-        <pc:picChg chg="add mod">
-          <ac:chgData name="Lizethe Pérez Fuertes" userId="4ae9ef87-2a7d-42f8-8dfa-0a501a9e2ff4" providerId="ADAL" clId="{FDDD45CB-1330-4033-A842-3D2746AFF7C7}" dt="2025-09-04T00:21:03.752" v="676" actId="1076"/>
-          <ac:picMkLst>
-            <pc:docMk/>
-            <pc:sldMk cId="1212743794" sldId="733"/>
-            <ac:picMk id="7" creationId="{BE24F6E2-DF85-2D14-541E-16B8BF313982}"/>
-          </ac:picMkLst>
-        </pc:picChg>
       </pc:sldChg>
     </pc:docChg>
   </pc:docChgLst>
@@ -743,7 +400,7 @@
           <a:p>
             <a:fld id="{DDE721D5-655F-45D2-B717-3C4CD78C8568}" type="datetimeFigureOut">
               <a:rPr lang="es-MX" smtClean="0"/>
-              <a:t>03/09/2025</a:t>
+              <a:t>03/03/2026</a:t>
             </a:fld>
             <a:endParaRPr lang="es-MX" dirty="0"/>
           </a:p>
@@ -2177,7 +1834,7 @@
     </p:spTree>
     <p:extLst>
       <p:ext uri="{BB962C8B-B14F-4D97-AF65-F5344CB8AC3E}">
-        <p14:creationId xmlns:p14="http://schemas.microsoft.com/office/powerpoint/2010/main" val="861186439"/>
+        <p14:creationId xmlns:p14="http://schemas.microsoft.com/office/powerpoint/2010/main" val="1738750602"/>
       </p:ext>
     </p:extLst>
   </p:cSld>
@@ -2261,7 +1918,7 @@
     </p:spTree>
     <p:extLst>
       <p:ext uri="{BB962C8B-B14F-4D97-AF65-F5344CB8AC3E}">
-        <p14:creationId xmlns:p14="http://schemas.microsoft.com/office/powerpoint/2010/main" val="1738750602"/>
+        <p14:creationId xmlns:p14="http://schemas.microsoft.com/office/powerpoint/2010/main" val="277132024"/>
       </p:ext>
     </p:extLst>
   </p:cSld>
@@ -2345,7 +2002,7 @@
     </p:spTree>
     <p:extLst>
       <p:ext uri="{BB962C8B-B14F-4D97-AF65-F5344CB8AC3E}">
-        <p14:creationId xmlns:p14="http://schemas.microsoft.com/office/powerpoint/2010/main" val="277132024"/>
+        <p14:creationId xmlns:p14="http://schemas.microsoft.com/office/powerpoint/2010/main" val="150007629"/>
       </p:ext>
     </p:extLst>
   </p:cSld>
@@ -2429,7 +2086,7 @@
     </p:spTree>
     <p:extLst>
       <p:ext uri="{BB962C8B-B14F-4D97-AF65-F5344CB8AC3E}">
-        <p14:creationId xmlns:p14="http://schemas.microsoft.com/office/powerpoint/2010/main" val="150007629"/>
+        <p14:creationId xmlns:p14="http://schemas.microsoft.com/office/powerpoint/2010/main" val="708984174"/>
       </p:ext>
     </p:extLst>
   </p:cSld>
@@ -2513,7 +2170,7 @@
     </p:spTree>
     <p:extLst>
       <p:ext uri="{BB962C8B-B14F-4D97-AF65-F5344CB8AC3E}">
-        <p14:creationId xmlns:p14="http://schemas.microsoft.com/office/powerpoint/2010/main" val="708984174"/>
+        <p14:creationId xmlns:p14="http://schemas.microsoft.com/office/powerpoint/2010/main" val="3741894312"/>
       </p:ext>
     </p:extLst>
   </p:cSld>
@@ -2597,7 +2254,7 @@
     </p:spTree>
     <p:extLst>
       <p:ext uri="{BB962C8B-B14F-4D97-AF65-F5344CB8AC3E}">
-        <p14:creationId xmlns:p14="http://schemas.microsoft.com/office/powerpoint/2010/main" val="3741894312"/>
+        <p14:creationId xmlns:p14="http://schemas.microsoft.com/office/powerpoint/2010/main" val="4208948020"/>
       </p:ext>
     </p:extLst>
   </p:cSld>
@@ -2681,7 +2338,7 @@
     </p:spTree>
     <p:extLst>
       <p:ext uri="{BB962C8B-B14F-4D97-AF65-F5344CB8AC3E}">
-        <p14:creationId xmlns:p14="http://schemas.microsoft.com/office/powerpoint/2010/main" val="4208948020"/>
+        <p14:creationId xmlns:p14="http://schemas.microsoft.com/office/powerpoint/2010/main" val="777768884"/>
       </p:ext>
     </p:extLst>
   </p:cSld>
@@ -2765,7 +2422,7 @@
     </p:spTree>
     <p:extLst>
       <p:ext uri="{BB962C8B-B14F-4D97-AF65-F5344CB8AC3E}">
-        <p14:creationId xmlns:p14="http://schemas.microsoft.com/office/powerpoint/2010/main" val="777768884"/>
+        <p14:creationId xmlns:p14="http://schemas.microsoft.com/office/powerpoint/2010/main" val="3106264844"/>
       </p:ext>
     </p:extLst>
   </p:cSld>
@@ -2849,7 +2506,7 @@
     </p:spTree>
     <p:extLst>
       <p:ext uri="{BB962C8B-B14F-4D97-AF65-F5344CB8AC3E}">
-        <p14:creationId xmlns:p14="http://schemas.microsoft.com/office/powerpoint/2010/main" val="3106264844"/>
+        <p14:creationId xmlns:p14="http://schemas.microsoft.com/office/powerpoint/2010/main" val="3481393812"/>
       </p:ext>
     </p:extLst>
   </p:cSld>
@@ -3017,7 +2674,7 @@
     </p:spTree>
     <p:extLst>
       <p:ext uri="{BB962C8B-B14F-4D97-AF65-F5344CB8AC3E}">
-        <p14:creationId xmlns:p14="http://schemas.microsoft.com/office/powerpoint/2010/main" val="3481393812"/>
+        <p14:creationId xmlns:p14="http://schemas.microsoft.com/office/powerpoint/2010/main" val="1178916748"/>
       </p:ext>
     </p:extLst>
   </p:cSld>
@@ -3101,7 +2758,7 @@
     </p:spTree>
     <p:extLst>
       <p:ext uri="{BB962C8B-B14F-4D97-AF65-F5344CB8AC3E}">
-        <p14:creationId xmlns:p14="http://schemas.microsoft.com/office/powerpoint/2010/main" val="1178916748"/>
+        <p14:creationId xmlns:p14="http://schemas.microsoft.com/office/powerpoint/2010/main" val="1849596721"/>
       </p:ext>
     </p:extLst>
   </p:cSld>
@@ -3185,7 +2842,7 @@
     </p:spTree>
     <p:extLst>
       <p:ext uri="{BB962C8B-B14F-4D97-AF65-F5344CB8AC3E}">
-        <p14:creationId xmlns:p14="http://schemas.microsoft.com/office/powerpoint/2010/main" val="1849596721"/>
+        <p14:creationId xmlns:p14="http://schemas.microsoft.com/office/powerpoint/2010/main" val="3210668"/>
       </p:ext>
     </p:extLst>
   </p:cSld>
@@ -3269,7 +2926,7 @@
     </p:spTree>
     <p:extLst>
       <p:ext uri="{BB962C8B-B14F-4D97-AF65-F5344CB8AC3E}">
-        <p14:creationId xmlns:p14="http://schemas.microsoft.com/office/powerpoint/2010/main" val="3210668"/>
+        <p14:creationId xmlns:p14="http://schemas.microsoft.com/office/powerpoint/2010/main" val="559837277"/>
       </p:ext>
     </p:extLst>
   </p:cSld>
@@ -3353,7 +3010,7 @@
     </p:spTree>
     <p:extLst>
       <p:ext uri="{BB962C8B-B14F-4D97-AF65-F5344CB8AC3E}">
-        <p14:creationId xmlns:p14="http://schemas.microsoft.com/office/powerpoint/2010/main" val="559837277"/>
+        <p14:creationId xmlns:p14="http://schemas.microsoft.com/office/powerpoint/2010/main" val="2301885728"/>
       </p:ext>
     </p:extLst>
   </p:cSld>
@@ -3437,7 +3094,7 @@
     </p:spTree>
     <p:extLst>
       <p:ext uri="{BB962C8B-B14F-4D97-AF65-F5344CB8AC3E}">
-        <p14:creationId xmlns:p14="http://schemas.microsoft.com/office/powerpoint/2010/main" val="2301885728"/>
+        <p14:creationId xmlns:p14="http://schemas.microsoft.com/office/powerpoint/2010/main" val="3726423580"/>
       </p:ext>
     </p:extLst>
   </p:cSld>
@@ -3521,7 +3178,7 @@
     </p:spTree>
     <p:extLst>
       <p:ext uri="{BB962C8B-B14F-4D97-AF65-F5344CB8AC3E}">
-        <p14:creationId xmlns:p14="http://schemas.microsoft.com/office/powerpoint/2010/main" val="3726423580"/>
+        <p14:creationId xmlns:p14="http://schemas.microsoft.com/office/powerpoint/2010/main" val="1317899946"/>
       </p:ext>
     </p:extLst>
   </p:cSld>
@@ -3605,7 +3262,7 @@
     </p:spTree>
     <p:extLst>
       <p:ext uri="{BB962C8B-B14F-4D97-AF65-F5344CB8AC3E}">
-        <p14:creationId xmlns:p14="http://schemas.microsoft.com/office/powerpoint/2010/main" val="1317899946"/>
+        <p14:creationId xmlns:p14="http://schemas.microsoft.com/office/powerpoint/2010/main" val="2617218241"/>
       </p:ext>
     </p:extLst>
   </p:cSld>
@@ -3689,7 +3346,7 @@
     </p:spTree>
     <p:extLst>
       <p:ext uri="{BB962C8B-B14F-4D97-AF65-F5344CB8AC3E}">
-        <p14:creationId xmlns:p14="http://schemas.microsoft.com/office/powerpoint/2010/main" val="2617218241"/>
+        <p14:creationId xmlns:p14="http://schemas.microsoft.com/office/powerpoint/2010/main" val="772452526"/>
       </p:ext>
     </p:extLst>
   </p:cSld>
@@ -3773,7 +3430,7 @@
     </p:spTree>
     <p:extLst>
       <p:ext uri="{BB962C8B-B14F-4D97-AF65-F5344CB8AC3E}">
-        <p14:creationId xmlns:p14="http://schemas.microsoft.com/office/powerpoint/2010/main" val="772452526"/>
+        <p14:creationId xmlns:p14="http://schemas.microsoft.com/office/powerpoint/2010/main" val="3118897239"/>
       </p:ext>
     </p:extLst>
   </p:cSld>
@@ -3941,7 +3598,7 @@
     </p:spTree>
     <p:extLst>
       <p:ext uri="{BB962C8B-B14F-4D97-AF65-F5344CB8AC3E}">
-        <p14:creationId xmlns:p14="http://schemas.microsoft.com/office/powerpoint/2010/main" val="3118897239"/>
+        <p14:creationId xmlns:p14="http://schemas.microsoft.com/office/powerpoint/2010/main" val="1455058044"/>
       </p:ext>
     </p:extLst>
   </p:cSld>
@@ -4025,7 +3682,7 @@
     </p:spTree>
     <p:extLst>
       <p:ext uri="{BB962C8B-B14F-4D97-AF65-F5344CB8AC3E}">
-        <p14:creationId xmlns:p14="http://schemas.microsoft.com/office/powerpoint/2010/main" val="1455058044"/>
+        <p14:creationId xmlns:p14="http://schemas.microsoft.com/office/powerpoint/2010/main" val="1303278371"/>
       </p:ext>
     </p:extLst>
   </p:cSld>
@@ -4109,7 +3766,7 @@
     </p:spTree>
     <p:extLst>
       <p:ext uri="{BB962C8B-B14F-4D97-AF65-F5344CB8AC3E}">
-        <p14:creationId xmlns:p14="http://schemas.microsoft.com/office/powerpoint/2010/main" val="1303278371"/>
+        <p14:creationId xmlns:p14="http://schemas.microsoft.com/office/powerpoint/2010/main" val="356638316"/>
       </p:ext>
     </p:extLst>
   </p:cSld>
@@ -4193,7 +3850,7 @@
     </p:spTree>
     <p:extLst>
       <p:ext uri="{BB962C8B-B14F-4D97-AF65-F5344CB8AC3E}">
-        <p14:creationId xmlns:p14="http://schemas.microsoft.com/office/powerpoint/2010/main" val="356638316"/>
+        <p14:creationId xmlns:p14="http://schemas.microsoft.com/office/powerpoint/2010/main" val="4293576474"/>
       </p:ext>
     </p:extLst>
   </p:cSld>
@@ -4277,7 +3934,7 @@
     </p:spTree>
     <p:extLst>
       <p:ext uri="{BB962C8B-B14F-4D97-AF65-F5344CB8AC3E}">
-        <p14:creationId xmlns:p14="http://schemas.microsoft.com/office/powerpoint/2010/main" val="4293576474"/>
+        <p14:creationId xmlns:p14="http://schemas.microsoft.com/office/powerpoint/2010/main" val="2545028243"/>
       </p:ext>
     </p:extLst>
   </p:cSld>
@@ -4288,90 +3945,6 @@
 </file>
 
 <file path=ppt/notesSlides/notesSlide45.xml><?xml version="1.0" encoding="utf-8"?>
-<p:notes xmlns:a="http://schemas.openxmlformats.org/drawingml/2006/main" xmlns:r="http://schemas.openxmlformats.org/officeDocument/2006/relationships" xmlns:p="http://schemas.openxmlformats.org/presentationml/2006/main">
-  <p:cSld>
-    <p:spTree>
-      <p:nvGrpSpPr>
-        <p:cNvPr id="1" name=""/>
-        <p:cNvGrpSpPr/>
-        <p:nvPr/>
-      </p:nvGrpSpPr>
-      <p:grpSpPr>
-        <a:xfrm>
-          <a:off x="0" y="0"/>
-          <a:ext cx="0" cy="0"/>
-          <a:chOff x="0" y="0"/>
-          <a:chExt cx="0" cy="0"/>
-        </a:xfrm>
-      </p:grpSpPr>
-      <p:sp>
-        <p:nvSpPr>
-          <p:cNvPr id="2" name="Marcador de imagen de diapositiva 1"/>
-          <p:cNvSpPr>
-            <a:spLocks noGrp="1" noRot="1" noChangeAspect="1"/>
-          </p:cNvSpPr>
-          <p:nvPr>
-            <p:ph type="sldImg"/>
-          </p:nvPr>
-        </p:nvSpPr>
-        <p:spPr/>
-      </p:sp>
-      <p:sp>
-        <p:nvSpPr>
-          <p:cNvPr id="3" name="Marcador de notas 2"/>
-          <p:cNvSpPr>
-            <a:spLocks noGrp="1"/>
-          </p:cNvSpPr>
-          <p:nvPr>
-            <p:ph type="body" idx="1"/>
-          </p:nvPr>
-        </p:nvSpPr>
-        <p:spPr/>
-        <p:txBody>
-          <a:bodyPr/>
-          <a:lstStyle/>
-          <a:p>
-            <a:endParaRPr lang="es-MX" dirty="0"/>
-          </a:p>
-        </p:txBody>
-      </p:sp>
-      <p:sp>
-        <p:nvSpPr>
-          <p:cNvPr id="4" name="Marcador de número de diapositiva 3"/>
-          <p:cNvSpPr>
-            <a:spLocks noGrp="1"/>
-          </p:cNvSpPr>
-          <p:nvPr>
-            <p:ph type="sldNum" sz="quarter" idx="5"/>
-          </p:nvPr>
-        </p:nvSpPr>
-        <p:spPr/>
-        <p:txBody>
-          <a:bodyPr/>
-          <a:lstStyle/>
-          <a:p>
-            <a:fld id="{6BAB4312-99A1-4CE9-ACE7-4C62E9FD90EE}" type="slidenum">
-              <a:rPr lang="es-MX" smtClean="0"/>
-              <a:t>46</a:t>
-            </a:fld>
-            <a:endParaRPr lang="es-MX" dirty="0"/>
-          </a:p>
-        </p:txBody>
-      </p:sp>
-    </p:spTree>
-    <p:extLst>
-      <p:ext uri="{BB962C8B-B14F-4D97-AF65-F5344CB8AC3E}">
-        <p14:creationId xmlns:p14="http://schemas.microsoft.com/office/powerpoint/2010/main" val="2545028243"/>
-      </p:ext>
-    </p:extLst>
-  </p:cSld>
-  <p:clrMapOvr>
-    <a:masterClrMapping/>
-  </p:clrMapOvr>
-</p:notes>
-</file>
-
-<file path=ppt/notesSlides/notesSlide46.xml><?xml version="1.0" encoding="utf-8"?>
 <p:notes xmlns:a="http://schemas.openxmlformats.org/drawingml/2006/main" xmlns:r="http://schemas.openxmlformats.org/officeDocument/2006/relationships" xmlns:p="http://schemas.openxmlformats.org/presentationml/2006/main">
   <p:cSld>
     <p:spTree>
@@ -4460,7 +4033,7 @@
           <a:p>
             <a:fld id="{6BAB4312-99A1-4CE9-ACE7-4C62E9FD90EE}" type="slidenum">
               <a:rPr lang="es-MX" smtClean="0"/>
-              <a:t>47</a:t>
+              <a:t>46</a:t>
             </a:fld>
             <a:endParaRPr lang="es-MX" dirty="0"/>
           </a:p>
@@ -4479,7 +4052,7 @@
 </p:notes>
 </file>
 
-<file path=ppt/notesSlides/notesSlide47.xml><?xml version="1.0" encoding="utf-8"?>
+<file path=ppt/notesSlides/notesSlide46.xml><?xml version="1.0" encoding="utf-8"?>
 <p:notes xmlns:a="http://schemas.openxmlformats.org/drawingml/2006/main" xmlns:r="http://schemas.openxmlformats.org/officeDocument/2006/relationships" xmlns:p="http://schemas.openxmlformats.org/presentationml/2006/main">
   <p:cSld>
     <p:spTree>
@@ -4568,7 +4141,7 @@
           <a:p>
             <a:fld id="{6BAB4312-99A1-4CE9-ACE7-4C62E9FD90EE}" type="slidenum">
               <a:rPr lang="es-MX" smtClean="0"/>
-              <a:t>48</a:t>
+              <a:t>47</a:t>
             </a:fld>
             <a:endParaRPr lang="es-MX" dirty="0"/>
           </a:p>
@@ -4587,7 +4160,7 @@
 </p:notes>
 </file>
 
-<file path=ppt/notesSlides/notesSlide48.xml><?xml version="1.0" encoding="utf-8"?>
+<file path=ppt/notesSlides/notesSlide47.xml><?xml version="1.0" encoding="utf-8"?>
 <p:notes xmlns:a="http://schemas.openxmlformats.org/drawingml/2006/main" xmlns:r="http://schemas.openxmlformats.org/officeDocument/2006/relationships" xmlns:p="http://schemas.openxmlformats.org/presentationml/2006/main">
   <p:cSld>
     <p:spTree>
@@ -4652,7 +4225,7 @@
           <a:p>
             <a:fld id="{6BAB4312-99A1-4CE9-ACE7-4C62E9FD90EE}" type="slidenum">
               <a:rPr lang="es-MX" smtClean="0"/>
-              <a:t>49</a:t>
+              <a:t>48</a:t>
             </a:fld>
             <a:endParaRPr lang="es-MX" dirty="0"/>
           </a:p>
@@ -4671,7 +4244,7 @@
 </p:notes>
 </file>
 
-<file path=ppt/notesSlides/notesSlide49.xml><?xml version="1.0" encoding="utf-8"?>
+<file path=ppt/notesSlides/notesSlide48.xml><?xml version="1.0" encoding="utf-8"?>
 <p:notes xmlns:a="http://schemas.openxmlformats.org/drawingml/2006/main" xmlns:r="http://schemas.openxmlformats.org/officeDocument/2006/relationships" xmlns:p="http://schemas.openxmlformats.org/presentationml/2006/main">
   <p:cSld>
     <p:spTree>
@@ -4760,7 +4333,7 @@
           <a:p>
             <a:fld id="{6BAB4312-99A1-4CE9-ACE7-4C62E9FD90EE}" type="slidenum">
               <a:rPr lang="es-MX" smtClean="0"/>
-              <a:t>50</a:t>
+              <a:t>49</a:t>
             </a:fld>
             <a:endParaRPr lang="es-MX" dirty="0"/>
           </a:p>
@@ -5380,7 +4953,7 @@
           <a:p>
             <a:fld id="{B3F3E716-CACC-4490-AD07-F24B6A68DE47}" type="datetimeFigureOut">
               <a:rPr lang="es-MX" smtClean="0"/>
-              <a:t>03/09/2025</a:t>
+              <a:t>03/03/2026</a:t>
             </a:fld>
             <a:endParaRPr lang="es-MX" dirty="0"/>
           </a:p>
@@ -5550,7 +5123,7 @@
           <a:p>
             <a:fld id="{B3F3E716-CACC-4490-AD07-F24B6A68DE47}" type="datetimeFigureOut">
               <a:rPr lang="es-MX" smtClean="0"/>
-              <a:t>03/09/2025</a:t>
+              <a:t>03/03/2026</a:t>
             </a:fld>
             <a:endParaRPr lang="es-MX" dirty="0"/>
           </a:p>
@@ -5730,7 +5303,7 @@
           <a:p>
             <a:fld id="{B3F3E716-CACC-4490-AD07-F24B6A68DE47}" type="datetimeFigureOut">
               <a:rPr lang="es-MX" smtClean="0"/>
-              <a:t>03/09/2025</a:t>
+              <a:t>03/03/2026</a:t>
             </a:fld>
             <a:endParaRPr lang="es-MX" dirty="0"/>
           </a:p>
@@ -5883,7 +5456,7 @@
           <a:p>
             <a:fld id="{1D8BD707-D9CF-40AE-B4C6-C98DA3205C09}" type="datetimeFigureOut">
               <a:rPr lang="en-US" smtClean="0"/>
-              <a:t>9/3/2025</a:t>
+              <a:t>3/3/2026</a:t>
             </a:fld>
             <a:endParaRPr lang="en-US" dirty="0"/>
           </a:p>
@@ -6043,7 +5616,7 @@
           <a:p>
             <a:fld id="{B3F3E716-CACC-4490-AD07-F24B6A68DE47}" type="datetimeFigureOut">
               <a:rPr lang="es-MX" smtClean="0"/>
-              <a:t>03/09/2025</a:t>
+              <a:t>03/03/2026</a:t>
             </a:fld>
             <a:endParaRPr lang="es-MX" dirty="0"/>
           </a:p>
@@ -6289,7 +5862,7 @@
           <a:p>
             <a:fld id="{B3F3E716-CACC-4490-AD07-F24B6A68DE47}" type="datetimeFigureOut">
               <a:rPr lang="es-MX" smtClean="0"/>
-              <a:t>03/09/2025</a:t>
+              <a:t>03/03/2026</a:t>
             </a:fld>
             <a:endParaRPr lang="es-MX" dirty="0"/>
           </a:p>
@@ -6577,7 +6150,7 @@
           <a:p>
             <a:fld id="{B3F3E716-CACC-4490-AD07-F24B6A68DE47}" type="datetimeFigureOut">
               <a:rPr lang="es-MX" smtClean="0"/>
-              <a:t>03/09/2025</a:t>
+              <a:t>03/03/2026</a:t>
             </a:fld>
             <a:endParaRPr lang="es-MX" dirty="0"/>
           </a:p>
@@ -6999,7 +6572,7 @@
           <a:p>
             <a:fld id="{B3F3E716-CACC-4490-AD07-F24B6A68DE47}" type="datetimeFigureOut">
               <a:rPr lang="es-MX" smtClean="0"/>
-              <a:t>03/09/2025</a:t>
+              <a:t>03/03/2026</a:t>
             </a:fld>
             <a:endParaRPr lang="es-MX" dirty="0"/>
           </a:p>
@@ -7117,7 +6690,7 @@
           <a:p>
             <a:fld id="{B3F3E716-CACC-4490-AD07-F24B6A68DE47}" type="datetimeFigureOut">
               <a:rPr lang="es-MX" smtClean="0"/>
-              <a:t>03/09/2025</a:t>
+              <a:t>03/03/2026</a:t>
             </a:fld>
             <a:endParaRPr lang="es-MX" dirty="0"/>
           </a:p>
@@ -7212,7 +6785,7 @@
           <a:p>
             <a:fld id="{B3F3E716-CACC-4490-AD07-F24B6A68DE47}" type="datetimeFigureOut">
               <a:rPr lang="es-MX" smtClean="0"/>
-              <a:t>03/09/2025</a:t>
+              <a:t>03/03/2026</a:t>
             </a:fld>
             <a:endParaRPr lang="es-MX" dirty="0"/>
           </a:p>
@@ -7489,7 +7062,7 @@
           <a:p>
             <a:fld id="{B3F3E716-CACC-4490-AD07-F24B6A68DE47}" type="datetimeFigureOut">
               <a:rPr lang="es-MX" smtClean="0"/>
-              <a:t>03/09/2025</a:t>
+              <a:t>03/03/2026</a:t>
             </a:fld>
             <a:endParaRPr lang="es-MX" dirty="0"/>
           </a:p>
@@ -7742,7 +7315,7 @@
           <a:p>
             <a:fld id="{B3F3E716-CACC-4490-AD07-F24B6A68DE47}" type="datetimeFigureOut">
               <a:rPr lang="es-MX" smtClean="0"/>
-              <a:t>03/09/2025</a:t>
+              <a:t>03/03/2026</a:t>
             </a:fld>
             <a:endParaRPr lang="es-MX" dirty="0"/>
           </a:p>
@@ -7955,7 +7528,7 @@
           <a:p>
             <a:fld id="{B3F3E716-CACC-4490-AD07-F24B6A68DE47}" type="datetimeFigureOut">
               <a:rPr lang="es-MX" smtClean="0"/>
-              <a:t>03/09/2025</a:t>
+              <a:t>03/03/2026</a:t>
             </a:fld>
             <a:endParaRPr lang="es-MX" dirty="0"/>
           </a:p>
@@ -11583,10 +11156,10 @@
       </p:sp>
       <p:pic>
         <p:nvPicPr>
-          <p:cNvPr id="8" name="Imagen 7">
+          <p:cNvPr id="3" name="Imagen 2">
             <a:extLst>
               <a:ext uri="{FF2B5EF4-FFF2-40B4-BE49-F238E27FC236}">
-                <a16:creationId xmlns:a16="http://schemas.microsoft.com/office/drawing/2014/main" id="{58F906D6-ACE3-4DD9-BB99-D80454EBFEEA}"/>
+                <a16:creationId xmlns:a16="http://schemas.microsoft.com/office/drawing/2014/main" id="{514A6828-6F08-192B-9770-F2E3E2BA265F}"/>
               </a:ext>
             </a:extLst>
           </p:cNvPr>
@@ -11603,8 +11176,8 @@
         </p:blipFill>
         <p:spPr>
           <a:xfrm>
-            <a:off x="1047750" y="3212976"/>
-            <a:ext cx="7048500" cy="2847975"/>
+            <a:off x="945142" y="3179858"/>
+            <a:ext cx="7601947" cy="3133759"/>
           </a:xfrm>
           <a:prstGeom prst="rect">
             <a:avLst/>
@@ -11712,7 +11285,7 @@
         </p:nvSpPr>
         <p:spPr>
           <a:xfrm>
-            <a:off x="683568" y="1537713"/>
+            <a:off x="611560" y="1529708"/>
             <a:ext cx="7920880" cy="506292"/>
           </a:xfrm>
           <a:prstGeom prst="rect">
@@ -11754,19 +11327,53 @@
                   </a:schemeClr>
                 </a:solidFill>
               </a:rPr>
-              <a:t>que una línea termine con </a:t>
-            </a:r>
-            <a:r>
-              <a:rPr lang="es-ES" sz="2000" i="0" dirty="0">
+              <a:t>que una línea </a:t>
+            </a:r>
+            <a:r>
+              <a:rPr lang="es-ES" sz="2000" b="1" dirty="0">
                 <a:solidFill>
                   <a:schemeClr val="tx1">
                     <a:lumMod val="95000"/>
                     <a:lumOff val="5000"/>
                   </a:schemeClr>
                 </a:solidFill>
+              </a:rPr>
+              <a:t>empiece</a:t>
+            </a:r>
+            <a:r>
+              <a:rPr lang="es-ES" sz="2000" dirty="0">
+                <a:solidFill>
+                  <a:schemeClr val="tx1">
+                    <a:lumMod val="95000"/>
+                    <a:lumOff val="5000"/>
+                  </a:schemeClr>
+                </a:solidFill>
+              </a:rPr>
+              <a:t> con la </a:t>
+            </a:r>
+            <a:r>
+              <a:rPr lang="es-ES" sz="2000" i="0" dirty="0">
+                <a:solidFill>
+                  <a:schemeClr val="tx1">
+                    <a:lumMod val="95000"/>
+                    <a:lumOff val="5000"/>
+                  </a:schemeClr>
+                </a:solidFill>
                 <a:effectLst/>
               </a:rPr>
-              <a:t>“Mundo.”</a:t>
+              <a:t>palabra </a:t>
+            </a:r>
+            <a:r>
+              <a:rPr lang="es-ES" sz="2000" b="1" i="0" dirty="0">
+                <a:solidFill>
+                  <a:schemeClr val="tx1">
+                    <a:lumMod val="95000"/>
+                    <a:lumOff val="5000"/>
+                  </a:schemeClr>
+                </a:solidFill>
+                <a:effectLst/>
+              </a:rPr>
+              <a:t>“Mundo”</a:t>
             </a:r>
             <a:endParaRPr lang="es-ES" sz="2000" b="1" dirty="0">
               <a:solidFill>
@@ -11825,17 +11432,17 @@
                 <a:effectLst/>
                 <a:latin typeface="inherit"/>
               </a:rPr>
-              <a:t>( $ ) Fin de una cadena de caracteres</a:t>
+              <a:t>( ^ ) Inicio de una cadena de caracteres</a:t>
             </a:r>
           </a:p>
         </p:txBody>
       </p:sp>
       <p:pic>
         <p:nvPicPr>
-          <p:cNvPr id="3" name="Imagen 2">
+          <p:cNvPr id="4" name="Imagen 3">
             <a:extLst>
               <a:ext uri="{FF2B5EF4-FFF2-40B4-BE49-F238E27FC236}">
-                <a16:creationId xmlns:a16="http://schemas.microsoft.com/office/drawing/2014/main" id="{3B4B1865-F3E8-456D-9E52-0E91A931E820}"/>
+                <a16:creationId xmlns:a16="http://schemas.microsoft.com/office/drawing/2014/main" id="{962A6C1B-37ED-6724-052E-CE5BEC606AC2}"/>
               </a:ext>
             </a:extLst>
           </p:cNvPr>
@@ -11852,8 +11459,8 @@
         </p:blipFill>
         <p:spPr>
           <a:xfrm>
-            <a:off x="959259" y="2434662"/>
-            <a:ext cx="6800850" cy="3067050"/>
+            <a:off x="2699792" y="2285512"/>
+            <a:ext cx="3384376" cy="3979674"/>
           </a:xfrm>
           <a:prstGeom prst="rect">
             <a:avLst/>
@@ -11863,7 +11470,7 @@
     </p:spTree>
     <p:extLst>
       <p:ext uri="{BB962C8B-B14F-4D97-AF65-F5344CB8AC3E}">
-        <p14:creationId xmlns:p14="http://schemas.microsoft.com/office/powerpoint/2010/main" val="1474776067"/>
+        <p14:creationId xmlns:p14="http://schemas.microsoft.com/office/powerpoint/2010/main" val="946192398"/>
       </p:ext>
     </p:extLst>
   </p:cSld>
@@ -11916,7 +11523,7 @@
               <a:defRPr/>
             </a:pPr>
             <a:r>
-              <a:rPr lang="es-MX" b="1" dirty="0" err="1">
+              <a:rPr lang="es-MX" b="1" dirty="0">
                 <a:solidFill>
                   <a:schemeClr val="accent4">
                     <a:lumMod val="50000"/>
@@ -11929,30 +11536,17 @@
                 </a:effectLst>
                 <a:latin typeface="Dom Casual" charset="0"/>
               </a:rPr>
-              <a:t>Metacaracteres</a:t>
-            </a:r>
-            <a:endParaRPr lang="es-MX" b="1" dirty="0">
-              <a:solidFill>
-                <a:schemeClr val="accent4">
-                  <a:lumMod val="50000"/>
-                </a:schemeClr>
-              </a:solidFill>
-              <a:effectLst>
-                <a:outerShdw blurRad="38100" dist="38100" dir="2700000" algn="tl">
-                  <a:srgbClr val="C0C0C0"/>
-                </a:outerShdw>
-              </a:effectLst>
-              <a:latin typeface="Dom Casual" charset="0"/>
-            </a:endParaRPr>
-          </a:p>
-        </p:txBody>
-      </p:sp>
-      <p:sp>
-        <p:nvSpPr>
-          <p:cNvPr id="9" name="CuadroTexto 8">
+              <a:t>Expresión regular</a:t>
+            </a:r>
+          </a:p>
+        </p:txBody>
+      </p:sp>
+      <p:sp>
+        <p:nvSpPr>
+          <p:cNvPr id="5" name="CuadroTexto 4">
             <a:extLst>
               <a:ext uri="{FF2B5EF4-FFF2-40B4-BE49-F238E27FC236}">
-                <a16:creationId xmlns:a16="http://schemas.microsoft.com/office/drawing/2014/main" id="{E1C784F4-BDDC-4D50-B8E9-68B91761F76A}"/>
+                <a16:creationId xmlns:a16="http://schemas.microsoft.com/office/drawing/2014/main" id="{FC189524-E564-48DD-B173-E7D162EDC50C}"/>
               </a:ext>
             </a:extLst>
           </p:cNvPr>
@@ -11961,7 +11555,7 @@
         </p:nvSpPr>
         <p:spPr>
           <a:xfrm>
-            <a:off x="611560" y="1529708"/>
+            <a:off x="603942" y="1052736"/>
             <a:ext cx="7920880" cy="506292"/>
           </a:xfrm>
           <a:prstGeom prst="rect">
@@ -11975,15 +11569,13 @@
           </a:bodyPr>
           <a:lstStyle/>
           <a:p>
-            <a:pPr marL="342900" indent="-342900" algn="just">
+            <a:pPr algn="just">
               <a:lnSpc>
                 <a:spcPct val="150000"/>
               </a:lnSpc>
-              <a:buFont typeface="Arial" panose="020B0604020202020204" pitchFamily="34" charset="0"/>
-              <a:buChar char="•"/>
             </a:pPr>
             <a:r>
-              <a:rPr lang="es-ES" sz="2000" i="0" dirty="0">
+              <a:rPr lang="es-ES" sz="2000" b="1" i="0" dirty="0">
                 <a:solidFill>
                   <a:schemeClr val="tx1">
                     <a:lumMod val="95000"/>
@@ -11992,30 +11584,30 @@
                 </a:solidFill>
                 <a:effectLst/>
               </a:rPr>
-              <a:t>Si quiero </a:t>
-            </a:r>
-            <a:r>
-              <a:rPr lang="es-ES" sz="2000" dirty="0">
+              <a:t>Ejemplo: </a:t>
+            </a:r>
+            <a:r>
+              <a:rPr lang="es-ES" sz="2000" b="1" i="0" dirty="0">
+                <a:solidFill>
+                  <a:schemeClr val="accent6">
+                    <a:lumMod val="75000"/>
+                  </a:schemeClr>
+                </a:solidFill>
+                <a:effectLst/>
+              </a:rPr>
+              <a:t>Extraer todos los números telefónicos</a:t>
+            </a:r>
+            <a:r>
+              <a:rPr lang="es-ES" sz="2000" i="0" dirty="0">
                 <a:solidFill>
                   <a:schemeClr val="tx1">
                     <a:lumMod val="95000"/>
                     <a:lumOff val="5000"/>
                   </a:schemeClr>
                 </a:solidFill>
-              </a:rPr>
-              <a:t>que una línea empiece con la </a:t>
-            </a:r>
-            <a:r>
-              <a:rPr lang="es-ES" sz="2000" i="0" dirty="0">
-                <a:solidFill>
-                  <a:schemeClr val="tx1">
-                    <a:lumMod val="95000"/>
-                    <a:lumOff val="5000"/>
-                  </a:schemeClr>
-                </a:solidFill>
                 <a:effectLst/>
               </a:rPr>
-              <a:t>palabra “Hola”</a:t>
+              <a:t>.</a:t>
             </a:r>
             <a:endParaRPr lang="es-ES" sz="2000" b="1" dirty="0">
               <a:solidFill>
@@ -12030,10 +11622,10 @@
       </p:sp>
       <p:sp>
         <p:nvSpPr>
-          <p:cNvPr id="7" name="CuadroTexto 6">
+          <p:cNvPr id="6" name="CuadroTexto 5">
             <a:extLst>
               <a:ext uri="{FF2B5EF4-FFF2-40B4-BE49-F238E27FC236}">
-                <a16:creationId xmlns:a16="http://schemas.microsoft.com/office/drawing/2014/main" id="{0CD01309-A779-489D-9641-3C8825455B71}"/>
+                <a16:creationId xmlns:a16="http://schemas.microsoft.com/office/drawing/2014/main" id="{7B04CF3A-CFE2-489B-A399-BF52B6C4C715}"/>
               </a:ext>
             </a:extLst>
           </p:cNvPr>
@@ -12042,8 +11634,8 @@
         </p:nvSpPr>
         <p:spPr>
           <a:xfrm>
-            <a:off x="938682" y="962324"/>
-            <a:ext cx="7065349" cy="393698"/>
+            <a:off x="611560" y="1559028"/>
+            <a:ext cx="7920880" cy="1429622"/>
           </a:xfrm>
           <a:prstGeom prst="rect">
             <a:avLst/>
@@ -12056,26 +11648,79 @@
           </a:bodyPr>
           <a:lstStyle/>
           <a:p>
-            <a:pPr algn="ctr" fontAlgn="base">
+            <a:pPr algn="just">
               <a:lnSpc>
-                <a:spcPts val="2500"/>
+                <a:spcPct val="150000"/>
               </a:lnSpc>
-              <a:spcAft>
-                <a:spcPts val="600"/>
-              </a:spcAft>
             </a:pPr>
             <a:r>
-              <a:rPr lang="es-ES" b="1" i="0" dirty="0">
-                <a:solidFill>
-                  <a:schemeClr val="accent6">
-                    <a:lumMod val="75000"/>
+              <a:rPr lang="es-ES" sz="2000" i="0" dirty="0">
+                <a:solidFill>
+                  <a:schemeClr val="tx1">
+                    <a:lumMod val="95000"/>
+                    <a:lumOff val="5000"/>
                   </a:schemeClr>
                 </a:solidFill>
                 <a:effectLst/>
-                <a:latin typeface="inherit"/>
-              </a:rPr>
-              <a:t>( ^ ) Inicio de una cadena de caracteres</a:t>
-            </a:r>
+              </a:rPr>
+              <a:t>Primero tres dígitos juntos, luego espacio o guion, otros  tres dígitos, espacio o guion, luego dos y dos.  El</a:t>
+            </a:r>
+            <a:r>
+              <a:rPr lang="es-ES" sz="2000" b="1" i="0" dirty="0">
+                <a:solidFill>
+                  <a:schemeClr val="tx1">
+                    <a:lumMod val="95000"/>
+                    <a:lumOff val="5000"/>
+                  </a:schemeClr>
+                </a:solidFill>
+                <a:effectLst/>
+              </a:rPr>
+              <a:t> punto </a:t>
+            </a:r>
+            <a:r>
+              <a:rPr lang="es-ES" sz="2000" i="0" dirty="0">
+                <a:solidFill>
+                  <a:schemeClr val="tx1">
+                    <a:lumMod val="95000"/>
+                    <a:lumOff val="5000"/>
+                  </a:schemeClr>
+                </a:solidFill>
+                <a:effectLst/>
+              </a:rPr>
+              <a:t>involucra </a:t>
+            </a:r>
+            <a:r>
+              <a:rPr lang="es-ES" sz="2000" b="1" i="0" dirty="0">
+                <a:solidFill>
+                  <a:schemeClr val="tx1">
+                    <a:lumMod val="95000"/>
+                    <a:lumOff val="5000"/>
+                  </a:schemeClr>
+                </a:solidFill>
+                <a:effectLst/>
+              </a:rPr>
+              <a:t>cualquier carácter excepto salto de línea</a:t>
+            </a:r>
+            <a:r>
+              <a:rPr lang="es-ES" sz="2000" i="0" dirty="0">
+                <a:solidFill>
+                  <a:schemeClr val="tx1">
+                    <a:lumMod val="95000"/>
+                    <a:lumOff val="5000"/>
+                  </a:schemeClr>
+                </a:solidFill>
+                <a:effectLst/>
+              </a:rPr>
+              <a:t>. </a:t>
+            </a:r>
+            <a:endParaRPr lang="es-ES" sz="2000" b="1" dirty="0">
+              <a:solidFill>
+                <a:schemeClr val="tx1">
+                  <a:lumMod val="95000"/>
+                  <a:lumOff val="5000"/>
+                </a:schemeClr>
+              </a:solidFill>
+            </a:endParaRPr>
           </a:p>
         </p:txBody>
       </p:sp>
@@ -12084,7 +11729,7 @@
           <p:cNvPr id="3" name="Imagen 2">
             <a:extLst>
               <a:ext uri="{FF2B5EF4-FFF2-40B4-BE49-F238E27FC236}">
-                <a16:creationId xmlns:a16="http://schemas.microsoft.com/office/drawing/2014/main" id="{E871119C-7F00-4F18-B5A8-B63D8C979EE9}"/>
+                <a16:creationId xmlns:a16="http://schemas.microsoft.com/office/drawing/2014/main" id="{EA75F2CF-5420-415C-8BD4-AE82F3D5FC26}"/>
               </a:ext>
             </a:extLst>
           </p:cNvPr>
@@ -12101,8 +11746,8 @@
         </p:blipFill>
         <p:spPr>
           <a:xfrm>
-            <a:off x="866143" y="2314290"/>
-            <a:ext cx="7210425" cy="3676650"/>
+            <a:off x="2613982" y="3082970"/>
+            <a:ext cx="3714750" cy="3609975"/>
           </a:xfrm>
           <a:prstGeom prst="rect">
             <a:avLst/>
@@ -12112,7 +11757,7 @@
     </p:spTree>
     <p:extLst>
       <p:ext uri="{BB962C8B-B14F-4D97-AF65-F5344CB8AC3E}">
-        <p14:creationId xmlns:p14="http://schemas.microsoft.com/office/powerpoint/2010/main" val="946192398"/>
+        <p14:creationId xmlns:p14="http://schemas.microsoft.com/office/powerpoint/2010/main" val="2265507875"/>
       </p:ext>
     </p:extLst>
   </p:cSld>
@@ -12151,8 +11796,8 @@
         </p:nvSpPr>
         <p:spPr>
           <a:xfrm>
-            <a:off x="289721" y="4056"/>
-            <a:ext cx="8363272" cy="1143000"/>
+            <a:off x="107504" y="116632"/>
+            <a:ext cx="8579296" cy="1143000"/>
           </a:xfrm>
         </p:spPr>
         <p:txBody>
@@ -12178,17 +11823,17 @@
                 </a:effectLst>
                 <a:latin typeface="Dom Casual" charset="0"/>
               </a:rPr>
-              <a:t>Expresión regular</a:t>
-            </a:r>
-          </a:p>
-        </p:txBody>
-      </p:sp>
-      <p:sp>
-        <p:nvSpPr>
-          <p:cNvPr id="5" name="CuadroTexto 4">
+              <a:t>Cuantificadores</a:t>
+            </a:r>
+          </a:p>
+        </p:txBody>
+      </p:sp>
+      <p:sp>
+        <p:nvSpPr>
+          <p:cNvPr id="6" name="CuadroTexto 5">
             <a:extLst>
               <a:ext uri="{FF2B5EF4-FFF2-40B4-BE49-F238E27FC236}">
-                <a16:creationId xmlns:a16="http://schemas.microsoft.com/office/drawing/2014/main" id="{FC189524-E564-48DD-B173-E7D162EDC50C}"/>
+                <a16:creationId xmlns:a16="http://schemas.microsoft.com/office/drawing/2014/main" id="{BB4379E8-C33A-4609-A614-210A31DF0E31}"/>
               </a:ext>
             </a:extLst>
           </p:cNvPr>
@@ -12197,8 +11842,8 @@
         </p:nvSpPr>
         <p:spPr>
           <a:xfrm>
-            <a:off x="603942" y="1052736"/>
-            <a:ext cx="7920880" cy="506292"/>
+            <a:off x="1187624" y="1340768"/>
+            <a:ext cx="6984776" cy="3737946"/>
           </a:xfrm>
           <a:prstGeom prst="rect">
             <a:avLst/>
@@ -12217,78 +11862,10 @@
               </a:lnSpc>
             </a:pPr>
             <a:r>
-              <a:rPr lang="es-ES" sz="2000" b="1" i="0" dirty="0">
-                <a:solidFill>
-                  <a:schemeClr val="tx1">
-                    <a:lumMod val="95000"/>
-                    <a:lumOff val="5000"/>
-                  </a:schemeClr>
-                </a:solidFill>
-                <a:effectLst/>
-              </a:rPr>
-              <a:t>Ejemplo: </a:t>
-            </a:r>
-            <a:r>
-              <a:rPr lang="es-ES" sz="2000" b="1" i="0" dirty="0">
-                <a:solidFill>
-                  <a:schemeClr val="accent6">
-                    <a:lumMod val="75000"/>
-                  </a:schemeClr>
-                </a:solidFill>
-                <a:effectLst/>
-              </a:rPr>
-              <a:t>Extraer todos los números telefónicos</a:t>
-            </a:r>
-            <a:r>
-              <a:rPr lang="es-ES" sz="2000" i="0" dirty="0">
-                <a:solidFill>
-                  <a:schemeClr val="tx1">
-                    <a:lumMod val="95000"/>
-                    <a:lumOff val="5000"/>
-                  </a:schemeClr>
-                </a:solidFill>
-                <a:effectLst/>
-              </a:rPr>
-              <a:t>.</a:t>
-            </a:r>
-            <a:endParaRPr lang="es-ES" sz="2000" b="1" dirty="0">
-              <a:solidFill>
-                <a:schemeClr val="tx1">
-                  <a:lumMod val="95000"/>
-                  <a:lumOff val="5000"/>
-                </a:schemeClr>
-              </a:solidFill>
-            </a:endParaRPr>
-          </a:p>
-        </p:txBody>
-      </p:sp>
-      <p:sp>
-        <p:nvSpPr>
-          <p:cNvPr id="6" name="CuadroTexto 5">
-            <a:extLst>
-              <a:ext uri="{FF2B5EF4-FFF2-40B4-BE49-F238E27FC236}">
-                <a16:creationId xmlns:a16="http://schemas.microsoft.com/office/drawing/2014/main" id="{7B04CF3A-CFE2-489B-A399-BF52B6C4C715}"/>
-              </a:ext>
-            </a:extLst>
-          </p:cNvPr>
-          <p:cNvSpPr txBox="1"/>
-          <p:nvPr/>
-        </p:nvSpPr>
-        <p:spPr>
-          <a:xfrm>
-            <a:off x="611560" y="1559028"/>
-            <a:ext cx="7920880" cy="1429622"/>
-          </a:xfrm>
-          <a:prstGeom prst="rect">
-            <a:avLst/>
-          </a:prstGeom>
-          <a:noFill/>
-        </p:spPr>
-        <p:txBody>
-          <a:bodyPr wrap="square">
-            <a:spAutoFit/>
-          </a:bodyPr>
-          <a:lstStyle/>
+              <a:rPr lang="es-MX" sz="2000" dirty="0"/>
+              <a:t>Estos símbolos representan cuantas veces se repiten los caracteres</a:t>
+            </a:r>
+          </a:p>
           <a:p>
             <a:pPr algn="just">
               <a:lnSpc>
@@ -12296,62 +11873,72 @@
               </a:lnSpc>
             </a:pPr>
             <a:r>
-              <a:rPr lang="es-ES" sz="2000" i="0" dirty="0">
-                <a:solidFill>
-                  <a:schemeClr val="tx1">
-                    <a:lumMod val="95000"/>
-                    <a:lumOff val="5000"/>
-                  </a:schemeClr>
-                </a:solidFill>
-                <a:effectLst/>
-              </a:rPr>
-              <a:t>Primero tres dígitos juntos, luego espacio o guion, otros  tres dígitos, espacio o guion, luego dos y dos.  El punto involucra cualquier carácter excepto salto de línea. </a:t>
-            </a:r>
-            <a:endParaRPr lang="es-ES" sz="2000" b="1" dirty="0">
-              <a:solidFill>
-                <a:schemeClr val="tx1">
-                  <a:lumMod val="95000"/>
-                  <a:lumOff val="5000"/>
-                </a:schemeClr>
-              </a:solidFill>
-            </a:endParaRPr>
-          </a:p>
-        </p:txBody>
-      </p:sp>
-      <p:pic>
-        <p:nvPicPr>
-          <p:cNvPr id="3" name="Imagen 2">
-            <a:extLst>
-              <a:ext uri="{FF2B5EF4-FFF2-40B4-BE49-F238E27FC236}">
-                <a16:creationId xmlns:a16="http://schemas.microsoft.com/office/drawing/2014/main" id="{EA75F2CF-5420-415C-8BD4-AE82F3D5FC26}"/>
-              </a:ext>
-            </a:extLst>
-          </p:cNvPr>
-          <p:cNvPicPr>
-            <a:picLocks noChangeAspect="1"/>
-          </p:cNvPicPr>
-          <p:nvPr/>
-        </p:nvPicPr>
-        <p:blipFill>
-          <a:blip r:embed="rId3"/>
-          <a:stretch>
-            <a:fillRect/>
-          </a:stretch>
-        </p:blipFill>
-        <p:spPr>
-          <a:xfrm>
-            <a:off x="2613982" y="3082970"/>
-            <a:ext cx="3714750" cy="3609975"/>
-          </a:xfrm>
-          <a:prstGeom prst="rect">
-            <a:avLst/>
-          </a:prstGeom>
-        </p:spPr>
-      </p:pic>
+              <a:rPr lang="es-MX" sz="2000" b="1" dirty="0"/>
+              <a:t>*       	0 o más</a:t>
+            </a:r>
+          </a:p>
+          <a:p>
+            <a:pPr algn="just">
+              <a:lnSpc>
+                <a:spcPct val="150000"/>
+              </a:lnSpc>
+            </a:pPr>
+            <a:r>
+              <a:rPr lang="es-MX" sz="2000" b="1" dirty="0"/>
+              <a:t>+       	1 o más</a:t>
+            </a:r>
+          </a:p>
+          <a:p>
+            <a:pPr algn="just">
+              <a:lnSpc>
+                <a:spcPct val="150000"/>
+              </a:lnSpc>
+            </a:pPr>
+            <a:r>
+              <a:rPr lang="es-MX" sz="2000" b="1" dirty="0"/>
+              <a:t>?       	0 o 1</a:t>
+            </a:r>
+          </a:p>
+          <a:p>
+            <a:pPr algn="just">
+              <a:lnSpc>
+                <a:spcPct val="150000"/>
+              </a:lnSpc>
+            </a:pPr>
+            <a:r>
+              <a:rPr lang="es-MX" sz="2000" b="1" dirty="0"/>
+              <a:t>{3}    	Numero exacto</a:t>
+            </a:r>
+          </a:p>
+          <a:p>
+            <a:pPr algn="just">
+              <a:lnSpc>
+                <a:spcPct val="150000"/>
+              </a:lnSpc>
+            </a:pPr>
+            <a:r>
+              <a:rPr lang="es-MX" sz="2000" b="1" dirty="0"/>
+              <a:t>{n,}   	Numero n+</a:t>
+            </a:r>
+          </a:p>
+          <a:p>
+            <a:pPr algn="just">
+              <a:lnSpc>
+                <a:spcPct val="150000"/>
+              </a:lnSpc>
+            </a:pPr>
+            <a:r>
+              <a:rPr lang="es-MX" sz="2000" b="1" dirty="0"/>
+              <a:t>{3,4}	Rango de números (Mínimo, Máximo)</a:t>
+            </a:r>
+            <a:endParaRPr lang="es-MX" sz="2000" dirty="0"/>
+          </a:p>
+        </p:txBody>
+      </p:sp>
     </p:spTree>
     <p:extLst>
       <p:ext uri="{BB962C8B-B14F-4D97-AF65-F5344CB8AC3E}">
-        <p14:creationId xmlns:p14="http://schemas.microsoft.com/office/powerpoint/2010/main" val="2265507875"/>
+        <p14:creationId xmlns:p14="http://schemas.microsoft.com/office/powerpoint/2010/main" val="1348202839"/>
       </p:ext>
     </p:extLst>
   </p:cSld>
@@ -12436,8 +12023,8 @@
         </p:nvSpPr>
         <p:spPr>
           <a:xfrm>
-            <a:off x="1187624" y="1340768"/>
-            <a:ext cx="6984776" cy="3737946"/>
+            <a:off x="1034670" y="1795522"/>
+            <a:ext cx="6984776" cy="506292"/>
           </a:xfrm>
           <a:prstGeom prst="rect">
             <a:avLst/>
@@ -12457,82 +12044,96 @@
             </a:pPr>
             <a:r>
               <a:rPr lang="es-MX" sz="2000" dirty="0"/>
-              <a:t>Estos símbolos representan cuantas veces se repiten los caracteres</a:t>
-            </a:r>
-          </a:p>
-          <a:p>
-            <a:pPr algn="just">
+              <a:t>La admiración se repita 0 o más veces</a:t>
+            </a:r>
+          </a:p>
+        </p:txBody>
+      </p:sp>
+      <p:sp>
+        <p:nvSpPr>
+          <p:cNvPr id="4" name="CuadroTexto 3">
+            <a:extLst>
+              <a:ext uri="{FF2B5EF4-FFF2-40B4-BE49-F238E27FC236}">
+                <a16:creationId xmlns:a16="http://schemas.microsoft.com/office/drawing/2014/main" id="{94C4D9E8-05C2-4AFD-88C6-5A82FF00A2FB}"/>
+              </a:ext>
+            </a:extLst>
+          </p:cNvPr>
+          <p:cNvSpPr txBox="1"/>
+          <p:nvPr/>
+        </p:nvSpPr>
+        <p:spPr>
+          <a:xfrm>
+            <a:off x="683568" y="1016132"/>
+            <a:ext cx="7017694" cy="393698"/>
+          </a:xfrm>
+          <a:prstGeom prst="rect">
+            <a:avLst/>
+          </a:prstGeom>
+          <a:noFill/>
+        </p:spPr>
+        <p:txBody>
+          <a:bodyPr wrap="square">
+            <a:spAutoFit/>
+          </a:bodyPr>
+          <a:lstStyle/>
+          <a:p>
+            <a:pPr algn="ctr" fontAlgn="base">
               <a:lnSpc>
-                <a:spcPct val="150000"/>
+                <a:spcPts val="2500"/>
               </a:lnSpc>
+              <a:spcAft>
+                <a:spcPts val="600"/>
+              </a:spcAft>
             </a:pPr>
             <a:r>
-              <a:rPr lang="es-MX" sz="2000" b="1" dirty="0"/>
-              <a:t>*       	0 o más</a:t>
-            </a:r>
-          </a:p>
-          <a:p>
-            <a:pPr algn="just">
-              <a:lnSpc>
-                <a:spcPct val="150000"/>
-              </a:lnSpc>
-            </a:pPr>
-            <a:r>
-              <a:rPr lang="es-MX" sz="2000" b="1" dirty="0"/>
-              <a:t>+       	1 o más</a:t>
-            </a:r>
-          </a:p>
-          <a:p>
-            <a:pPr algn="just">
-              <a:lnSpc>
-                <a:spcPct val="150000"/>
-              </a:lnSpc>
-            </a:pPr>
-            <a:r>
-              <a:rPr lang="es-MX" sz="2000" b="1" dirty="0"/>
-              <a:t>?       	0 o 1</a:t>
-            </a:r>
-          </a:p>
-          <a:p>
-            <a:pPr algn="just">
-              <a:lnSpc>
-                <a:spcPct val="150000"/>
-              </a:lnSpc>
-            </a:pPr>
-            <a:r>
-              <a:rPr lang="es-MX" sz="2000" b="1" dirty="0"/>
-              <a:t>{3}    	Numero exacto</a:t>
-            </a:r>
-          </a:p>
-          <a:p>
-            <a:pPr algn="just">
-              <a:lnSpc>
-                <a:spcPct val="150000"/>
-              </a:lnSpc>
-            </a:pPr>
-            <a:r>
-              <a:rPr lang="es-MX" sz="2000" b="1" dirty="0"/>
-              <a:t>{n,}   	Numero n+</a:t>
-            </a:r>
-          </a:p>
-          <a:p>
-            <a:pPr algn="just">
-              <a:lnSpc>
-                <a:spcPct val="150000"/>
-              </a:lnSpc>
-            </a:pPr>
-            <a:r>
-              <a:rPr lang="es-MX" sz="2000" b="1" dirty="0"/>
-              <a:t>{3,4}	Rango de números (Mínimo, Máximo)</a:t>
-            </a:r>
-            <a:endParaRPr lang="es-MX" sz="2000" dirty="0"/>
-          </a:p>
-        </p:txBody>
-      </p:sp>
+              <a:rPr lang="es-ES" b="1" i="0" dirty="0">
+                <a:solidFill>
+                  <a:schemeClr val="accent6">
+                    <a:lumMod val="75000"/>
+                  </a:schemeClr>
+                </a:solidFill>
+                <a:effectLst/>
+                <a:latin typeface="inherit"/>
+              </a:rPr>
+              <a:t>( * ) Cero o más veces</a:t>
+            </a:r>
+          </a:p>
+        </p:txBody>
+      </p:sp>
+      <p:pic>
+        <p:nvPicPr>
+          <p:cNvPr id="3" name="Imagen 2">
+            <a:extLst>
+              <a:ext uri="{FF2B5EF4-FFF2-40B4-BE49-F238E27FC236}">
+                <a16:creationId xmlns:a16="http://schemas.microsoft.com/office/drawing/2014/main" id="{460CC9FD-A783-46ED-B58D-2503D9F875E0}"/>
+              </a:ext>
+            </a:extLst>
+          </p:cNvPr>
+          <p:cNvPicPr>
+            <a:picLocks noChangeAspect="1"/>
+          </p:cNvPicPr>
+          <p:nvPr/>
+        </p:nvPicPr>
+        <p:blipFill>
+          <a:blip r:embed="rId3"/>
+          <a:stretch>
+            <a:fillRect/>
+          </a:stretch>
+        </p:blipFill>
+        <p:spPr>
+          <a:xfrm>
+            <a:off x="998045" y="2680429"/>
+            <a:ext cx="7058025" cy="2809875"/>
+          </a:xfrm>
+          <a:prstGeom prst="rect">
+            <a:avLst/>
+          </a:prstGeom>
+        </p:spPr>
+      </p:pic>
     </p:spTree>
     <p:extLst>
       <p:ext uri="{BB962C8B-B14F-4D97-AF65-F5344CB8AC3E}">
-        <p14:creationId xmlns:p14="http://schemas.microsoft.com/office/powerpoint/2010/main" val="1348202839"/>
+        <p14:creationId xmlns:p14="http://schemas.microsoft.com/office/powerpoint/2010/main" val="3733358554"/>
       </p:ext>
     </p:extLst>
   </p:cSld>
@@ -12617,7 +12218,7 @@
         </p:nvSpPr>
         <p:spPr>
           <a:xfrm>
-            <a:off x="1034670" y="1795522"/>
+            <a:off x="1187624" y="1560027"/>
             <a:ext cx="6984776" cy="506292"/>
           </a:xfrm>
           <a:prstGeom prst="rect">
@@ -12638,7 +12239,7 @@
             </a:pPr>
             <a:r>
               <a:rPr lang="es-MX" sz="2000" dirty="0"/>
-              <a:t>La admiración se repita 0 o más veces</a:t>
+              <a:t>La admiración se repita 1 o más veces</a:t>
             </a:r>
           </a:p>
         </p:txBody>
@@ -12657,7 +12258,7 @@
         </p:nvSpPr>
         <p:spPr>
           <a:xfrm>
-            <a:off x="683568" y="1016132"/>
+            <a:off x="938683" y="962324"/>
             <a:ext cx="7017694" cy="393698"/>
           </a:xfrm>
           <a:prstGeom prst="rect">
@@ -12689,17 +12290,17 @@
                 <a:effectLst/>
                 <a:latin typeface="inherit"/>
               </a:rPr>
-              <a:t>( * ) Cero o más veces</a:t>
+              <a:t>( + ) Una o más veces</a:t>
             </a:r>
           </a:p>
         </p:txBody>
       </p:sp>
       <p:pic>
         <p:nvPicPr>
-          <p:cNvPr id="3" name="Imagen 2">
+          <p:cNvPr id="10" name="Imagen 9">
             <a:extLst>
               <a:ext uri="{FF2B5EF4-FFF2-40B4-BE49-F238E27FC236}">
-                <a16:creationId xmlns:a16="http://schemas.microsoft.com/office/drawing/2014/main" id="{460CC9FD-A783-46ED-B58D-2503D9F875E0}"/>
+                <a16:creationId xmlns:a16="http://schemas.microsoft.com/office/drawing/2014/main" id="{C4B0524A-DD8A-4B87-9B8F-4EC23FD8851E}"/>
               </a:ext>
             </a:extLst>
           </p:cNvPr>
@@ -12716,8 +12317,8 @@
         </p:blipFill>
         <p:spPr>
           <a:xfrm>
-            <a:off x="998045" y="2680429"/>
-            <a:ext cx="7058025" cy="2809875"/>
+            <a:off x="1191506" y="2366714"/>
+            <a:ext cx="7010400" cy="2752725"/>
           </a:xfrm>
           <a:prstGeom prst="rect">
             <a:avLst/>
@@ -12727,7 +12328,7 @@
     </p:spTree>
     <p:extLst>
       <p:ext uri="{BB962C8B-B14F-4D97-AF65-F5344CB8AC3E}">
-        <p14:creationId xmlns:p14="http://schemas.microsoft.com/office/powerpoint/2010/main" val="3733358554"/>
+        <p14:creationId xmlns:p14="http://schemas.microsoft.com/office/powerpoint/2010/main" val="1035435158"/>
       </p:ext>
     </p:extLst>
   </p:cSld>
@@ -12833,7 +12434,7 @@
             </a:pPr>
             <a:r>
               <a:rPr lang="es-MX" sz="2000" dirty="0"/>
-              <a:t>La admiración se repita 1 o más veces</a:t>
+              <a:t>La admiración se repita 0 o 1 vez</a:t>
             </a:r>
           </a:p>
         </p:txBody>
@@ -12884,17 +12485,40 @@
                 <a:effectLst/>
                 <a:latin typeface="inherit"/>
               </a:rPr>
-              <a:t>( + ) Una o más veces</a:t>
+              <a:t>( ? ) </a:t>
+            </a:r>
+            <a:r>
+              <a:rPr lang="es-ES" b="1" dirty="0">
+                <a:solidFill>
+                  <a:schemeClr val="accent6">
+                    <a:lumMod val="75000"/>
+                  </a:schemeClr>
+                </a:solidFill>
+                <a:latin typeface="inherit"/>
+              </a:rPr>
+              <a:t>0 o 1</a:t>
+            </a:r>
+            <a:r>
+              <a:rPr lang="es-ES" b="1" i="0" dirty="0">
+                <a:solidFill>
+                  <a:schemeClr val="accent6">
+                    <a:lumMod val="75000"/>
+                  </a:schemeClr>
+                </a:solidFill>
+                <a:effectLst/>
+                <a:latin typeface="inherit"/>
+              </a:rPr>
+              <a:t> vez</a:t>
             </a:r>
           </a:p>
         </p:txBody>
       </p:sp>
       <p:pic>
         <p:nvPicPr>
-          <p:cNvPr id="10" name="Imagen 9">
+          <p:cNvPr id="3" name="Imagen 2">
             <a:extLst>
               <a:ext uri="{FF2B5EF4-FFF2-40B4-BE49-F238E27FC236}">
-                <a16:creationId xmlns:a16="http://schemas.microsoft.com/office/drawing/2014/main" id="{C4B0524A-DD8A-4B87-9B8F-4EC23FD8851E}"/>
+                <a16:creationId xmlns:a16="http://schemas.microsoft.com/office/drawing/2014/main" id="{AC8C3B9E-C7D4-436E-99E4-D5845B9C95F6}"/>
               </a:ext>
             </a:extLst>
           </p:cNvPr>
@@ -12911,8 +12535,8 @@
         </p:blipFill>
         <p:spPr>
           <a:xfrm>
-            <a:off x="1191506" y="2366714"/>
-            <a:ext cx="7010400" cy="2752725"/>
+            <a:off x="1187624" y="2385496"/>
+            <a:ext cx="7000875" cy="2647950"/>
           </a:xfrm>
           <a:prstGeom prst="rect">
             <a:avLst/>
@@ -12922,7 +12546,7 @@
     </p:spTree>
     <p:extLst>
       <p:ext uri="{BB962C8B-B14F-4D97-AF65-F5344CB8AC3E}">
-        <p14:creationId xmlns:p14="http://schemas.microsoft.com/office/powerpoint/2010/main" val="1035435158"/>
+        <p14:creationId xmlns:p14="http://schemas.microsoft.com/office/powerpoint/2010/main" val="2706831651"/>
       </p:ext>
     </p:extLst>
   </p:cSld>
@@ -13008,7 +12632,7 @@
         <p:spPr>
           <a:xfrm>
             <a:off x="1187624" y="1560027"/>
-            <a:ext cx="6984776" cy="506292"/>
+            <a:ext cx="6984776" cy="967957"/>
           </a:xfrm>
           <a:prstGeom prst="rect">
             <a:avLst/>
@@ -13028,7 +12652,23 @@
             </a:pPr>
             <a:r>
               <a:rPr lang="es-MX" sz="2000" dirty="0"/>
-              <a:t>La admiración se repita 0 o 1 vez</a:t>
+              <a:t>Busca la cantidad exacta de elementos. Va a identificar a la palabra </a:t>
+            </a:r>
+            <a:r>
+              <a:rPr lang="es-MX" sz="2000" b="1" dirty="0"/>
+              <a:t>Python</a:t>
+            </a:r>
+            <a:r>
+              <a:rPr lang="es-MX" sz="2000" dirty="0"/>
+              <a:t> </a:t>
+            </a:r>
+            <a:r>
+              <a:rPr lang="es-MX" sz="2000" b="1" dirty="0"/>
+              <a:t>mas dos signos de admiración</a:t>
+            </a:r>
+            <a:r>
+              <a:rPr lang="es-MX" sz="2000" dirty="0"/>
+              <a:t>.</a:t>
             </a:r>
           </a:p>
         </p:txBody>
@@ -13079,40 +12719,17 @@
                 <a:effectLst/>
                 <a:latin typeface="inherit"/>
               </a:rPr>
-              <a:t>( ? ) </a:t>
-            </a:r>
-            <a:r>
-              <a:rPr lang="es-ES" b="1" dirty="0">
-                <a:solidFill>
-                  <a:schemeClr val="accent6">
-                    <a:lumMod val="75000"/>
-                  </a:schemeClr>
-                </a:solidFill>
-                <a:latin typeface="inherit"/>
-              </a:rPr>
-              <a:t>0 o 1</a:t>
-            </a:r>
-            <a:r>
-              <a:rPr lang="es-ES" b="1" i="0" dirty="0">
-                <a:solidFill>
-                  <a:schemeClr val="accent6">
-                    <a:lumMod val="75000"/>
-                  </a:schemeClr>
-                </a:solidFill>
-                <a:effectLst/>
-                <a:latin typeface="inherit"/>
-              </a:rPr>
-              <a:t> vez</a:t>
+              <a:t>{n} Número n exacto</a:t>
             </a:r>
           </a:p>
         </p:txBody>
       </p:sp>
       <p:pic>
         <p:nvPicPr>
-          <p:cNvPr id="3" name="Imagen 2">
+          <p:cNvPr id="5" name="Imagen 4">
             <a:extLst>
               <a:ext uri="{FF2B5EF4-FFF2-40B4-BE49-F238E27FC236}">
-                <a16:creationId xmlns:a16="http://schemas.microsoft.com/office/drawing/2014/main" id="{AC8C3B9E-C7D4-436E-99E4-D5845B9C95F6}"/>
+                <a16:creationId xmlns:a16="http://schemas.microsoft.com/office/drawing/2014/main" id="{E328AF7B-C851-4BDF-91DF-93BD84A73307}"/>
               </a:ext>
             </a:extLst>
           </p:cNvPr>
@@ -13129,8 +12746,8 @@
         </p:blipFill>
         <p:spPr>
           <a:xfrm>
-            <a:off x="1187624" y="2385496"/>
-            <a:ext cx="7000875" cy="2647950"/>
+            <a:off x="1187624" y="2852720"/>
+            <a:ext cx="6981825" cy="2933700"/>
           </a:xfrm>
           <a:prstGeom prst="rect">
             <a:avLst/>
@@ -13140,7 +12757,7 @@
     </p:spTree>
     <p:extLst>
       <p:ext uri="{BB962C8B-B14F-4D97-AF65-F5344CB8AC3E}">
-        <p14:creationId xmlns:p14="http://schemas.microsoft.com/office/powerpoint/2010/main" val="2706831651"/>
+        <p14:creationId xmlns:p14="http://schemas.microsoft.com/office/powerpoint/2010/main" val="1961321991"/>
       </p:ext>
     </p:extLst>
   </p:cSld>
@@ -13226,7 +12843,7 @@
         <p:spPr>
           <a:xfrm>
             <a:off x="1187624" y="1560027"/>
-            <a:ext cx="6984776" cy="967957"/>
+            <a:ext cx="6984776" cy="506292"/>
           </a:xfrm>
           <a:prstGeom prst="rect">
             <a:avLst/>
@@ -13246,23 +12863,15 @@
             </a:pPr>
             <a:r>
               <a:rPr lang="es-MX" sz="2000" dirty="0"/>
-              <a:t>Busca la cantidad exacta de elementos. Va a identificar a la palabra </a:t>
-            </a:r>
-            <a:r>
-              <a:rPr lang="es-MX" sz="2000" b="1" dirty="0"/>
-              <a:t>Python</a:t>
+              <a:t>Busca n o más elementos del </a:t>
+            </a:r>
+            <a:r>
+              <a:rPr lang="es-MX" sz="2000" dirty="0" err="1"/>
+              <a:t>caracter</a:t>
             </a:r>
             <a:r>
               <a:rPr lang="es-MX" sz="2000" dirty="0"/>
-              <a:t> </a:t>
-            </a:r>
-            <a:r>
-              <a:rPr lang="es-MX" sz="2000" b="1" dirty="0"/>
-              <a:t>mas dos signos de admiración</a:t>
-            </a:r>
-            <a:r>
-              <a:rPr lang="es-MX" sz="2000" dirty="0"/>
-              <a:t>.</a:t>
+              <a:t>. </a:t>
             </a:r>
           </a:p>
         </p:txBody>
@@ -13313,17 +12922,17 @@
                 <a:effectLst/>
                 <a:latin typeface="inherit"/>
               </a:rPr>
-              <a:t>{n} Número n exacto</a:t>
+              <a:t>{n, } Número n o más elementos</a:t>
             </a:r>
           </a:p>
         </p:txBody>
       </p:sp>
       <p:pic>
         <p:nvPicPr>
-          <p:cNvPr id="5" name="Imagen 4">
+          <p:cNvPr id="3" name="Imagen 2">
             <a:extLst>
               <a:ext uri="{FF2B5EF4-FFF2-40B4-BE49-F238E27FC236}">
-                <a16:creationId xmlns:a16="http://schemas.microsoft.com/office/drawing/2014/main" id="{E328AF7B-C851-4BDF-91DF-93BD84A73307}"/>
+                <a16:creationId xmlns:a16="http://schemas.microsoft.com/office/drawing/2014/main" id="{DE3BE028-E4CF-4D2B-A83C-55486CB476BF}"/>
               </a:ext>
             </a:extLst>
           </p:cNvPr>
@@ -13340,8 +12949,8 @@
         </p:blipFill>
         <p:spPr>
           <a:xfrm>
-            <a:off x="1187624" y="2852720"/>
-            <a:ext cx="6981825" cy="2933700"/>
+            <a:off x="1246549" y="2420888"/>
+            <a:ext cx="6708652" cy="2657623"/>
           </a:xfrm>
           <a:prstGeom prst="rect">
             <a:avLst/>
@@ -13351,7 +12960,7 @@
     </p:spTree>
     <p:extLst>
       <p:ext uri="{BB962C8B-B14F-4D97-AF65-F5344CB8AC3E}">
-        <p14:creationId xmlns:p14="http://schemas.microsoft.com/office/powerpoint/2010/main" val="1961321991"/>
+        <p14:creationId xmlns:p14="http://schemas.microsoft.com/office/powerpoint/2010/main" val="3772811969"/>
       </p:ext>
     </p:extLst>
   </p:cSld>
@@ -13753,15 +13362,7 @@
             </a:pPr>
             <a:r>
               <a:rPr lang="es-MX" sz="2000" dirty="0"/>
-              <a:t>Busca n o más elementos del </a:t>
-            </a:r>
-            <a:r>
-              <a:rPr lang="es-MX" sz="2000" dirty="0" err="1"/>
-              <a:t>caracter</a:t>
-            </a:r>
-            <a:r>
-              <a:rPr lang="es-MX" sz="2000" dirty="0"/>
-              <a:t>. </a:t>
+              <a:t>Siempre va a ir por la mayor cantidad</a:t>
             </a:r>
           </a:p>
         </p:txBody>
@@ -13812,17 +13413,61 @@
                 <a:effectLst/>
                 <a:latin typeface="inherit"/>
               </a:rPr>
-              <a:t>{n, } Número n o más elementos</a:t>
-            </a:r>
+              <a:t>{min, </a:t>
+            </a:r>
+            <a:r>
+              <a:rPr lang="es-ES" b="1" i="0" dirty="0" err="1">
+                <a:solidFill>
+                  <a:schemeClr val="accent6">
+                    <a:lumMod val="75000"/>
+                  </a:schemeClr>
+                </a:solidFill>
+                <a:effectLst/>
+                <a:latin typeface="inherit"/>
+              </a:rPr>
+              <a:t>max</a:t>
+            </a:r>
+            <a:r>
+              <a:rPr lang="es-ES" b="1" i="0" dirty="0">
+                <a:solidFill>
+                  <a:schemeClr val="accent6">
+                    <a:lumMod val="75000"/>
+                  </a:schemeClr>
+                </a:solidFill>
+                <a:effectLst/>
+                <a:latin typeface="inherit"/>
+              </a:rPr>
+              <a:t> } </a:t>
+            </a:r>
+            <a:r>
+              <a:rPr lang="es-ES" b="1" dirty="0">
+                <a:solidFill>
+                  <a:schemeClr val="accent6">
+                    <a:lumMod val="75000"/>
+                  </a:schemeClr>
+                </a:solidFill>
+                <a:latin typeface="inherit"/>
+              </a:rPr>
+              <a:t>Rango de números mínimo y máximo</a:t>
+            </a:r>
+            <a:endParaRPr lang="es-ES" b="1" i="0" dirty="0">
+              <a:solidFill>
+                <a:schemeClr val="accent6">
+                  <a:lumMod val="75000"/>
+                </a:schemeClr>
+              </a:solidFill>
+              <a:effectLst/>
+              <a:latin typeface="inherit"/>
+            </a:endParaRPr>
           </a:p>
         </p:txBody>
       </p:sp>
       <p:pic>
         <p:nvPicPr>
-          <p:cNvPr id="3" name="Imagen 2">
+          <p:cNvPr id="5" name="Imagen 4">
             <a:extLst>
               <a:ext uri="{FF2B5EF4-FFF2-40B4-BE49-F238E27FC236}">
-                <a16:creationId xmlns:a16="http://schemas.microsoft.com/office/drawing/2014/main" id="{DE3BE028-E4CF-4D2B-A83C-55486CB476BF}"/>
+                <a16:creationId xmlns:a16="http://schemas.microsoft.com/office/drawing/2014/main" id="{5297F19D-6B8D-4F0F-AAB5-5924AAA35525}"/>
               </a:ext>
             </a:extLst>
           </p:cNvPr>
@@ -13839,8 +13484,8 @@
         </p:blipFill>
         <p:spPr>
           <a:xfrm>
-            <a:off x="1246549" y="2420888"/>
-            <a:ext cx="6708652" cy="2657623"/>
+            <a:off x="1187624" y="2492896"/>
+            <a:ext cx="6962775" cy="2714625"/>
           </a:xfrm>
           <a:prstGeom prst="rect">
             <a:avLst/>
@@ -13850,7 +13495,7 @@
     </p:spTree>
     <p:extLst>
       <p:ext uri="{BB962C8B-B14F-4D97-AF65-F5344CB8AC3E}">
-        <p14:creationId xmlns:p14="http://schemas.microsoft.com/office/powerpoint/2010/main" val="3772811969"/>
+        <p14:creationId xmlns:p14="http://schemas.microsoft.com/office/powerpoint/2010/main" val="3835321299"/>
       </p:ext>
     </p:extLst>
   </p:cSld>
@@ -13889,8 +13534,8 @@
         </p:nvSpPr>
         <p:spPr>
           <a:xfrm>
-            <a:off x="107504" y="116632"/>
-            <a:ext cx="8579296" cy="1143000"/>
+            <a:off x="289721" y="4056"/>
+            <a:ext cx="8363272" cy="1143000"/>
           </a:xfrm>
         </p:spPr>
         <p:txBody>
@@ -13916,17 +13561,17 @@
                 </a:effectLst>
                 <a:latin typeface="Dom Casual" charset="0"/>
               </a:rPr>
-              <a:t>Cuantificadores</a:t>
-            </a:r>
-          </a:p>
-        </p:txBody>
-      </p:sp>
-      <p:sp>
-        <p:nvSpPr>
-          <p:cNvPr id="6" name="CuadroTexto 5">
+              <a:t>Expresión regular</a:t>
+            </a:r>
+          </a:p>
+        </p:txBody>
+      </p:sp>
+      <p:sp>
+        <p:nvSpPr>
+          <p:cNvPr id="5" name="CuadroTexto 4">
             <a:extLst>
               <a:ext uri="{FF2B5EF4-FFF2-40B4-BE49-F238E27FC236}">
-                <a16:creationId xmlns:a16="http://schemas.microsoft.com/office/drawing/2014/main" id="{BB4379E8-C33A-4609-A614-210A31DF0E31}"/>
+                <a16:creationId xmlns:a16="http://schemas.microsoft.com/office/drawing/2014/main" id="{FC189524-E564-48DD-B173-E7D162EDC50C}"/>
               </a:ext>
             </a:extLst>
           </p:cNvPr>
@@ -13935,8 +13580,8 @@
         </p:nvSpPr>
         <p:spPr>
           <a:xfrm>
-            <a:off x="1187624" y="1560027"/>
-            <a:ext cx="6984776" cy="506292"/>
+            <a:off x="642661" y="1075500"/>
+            <a:ext cx="7920880" cy="506292"/>
           </a:xfrm>
           <a:prstGeom prst="rect">
             <a:avLst/>
@@ -13955,18 +13600,36 @@
               </a:lnSpc>
             </a:pPr>
             <a:r>
-              <a:rPr lang="es-MX" sz="2000" dirty="0"/>
-              <a:t>Siempre va a ir por la mayor cantidad</a:t>
-            </a:r>
-          </a:p>
-        </p:txBody>
-      </p:sp>
-      <p:sp>
-        <p:nvSpPr>
-          <p:cNvPr id="4" name="CuadroTexto 3">
+              <a:rPr lang="es-ES" sz="2000" b="1" i="0" dirty="0">
+                <a:solidFill>
+                  <a:schemeClr val="tx1">
+                    <a:lumMod val="95000"/>
+                    <a:lumOff val="5000"/>
+                  </a:schemeClr>
+                </a:solidFill>
+                <a:effectLst/>
+              </a:rPr>
+              <a:t>Ejemplo:</a:t>
+            </a:r>
+            <a:r>
+              <a:rPr lang="es-ES" sz="2000" b="1" dirty="0">
+                <a:solidFill>
+                  <a:schemeClr val="accent6">
+                    <a:lumMod val="75000"/>
+                  </a:schemeClr>
+                </a:solidFill>
+              </a:rPr>
+              <a:t> Extraer los nombres del directorio con dos textos</a:t>
+            </a:r>
+          </a:p>
+        </p:txBody>
+      </p:sp>
+      <p:sp>
+        <p:nvSpPr>
+          <p:cNvPr id="6" name="CuadroTexto 5">
             <a:extLst>
               <a:ext uri="{FF2B5EF4-FFF2-40B4-BE49-F238E27FC236}">
-                <a16:creationId xmlns:a16="http://schemas.microsoft.com/office/drawing/2014/main" id="{94C4D9E8-05C2-4AFD-88C6-5A82FF00A2FB}"/>
+                <a16:creationId xmlns:a16="http://schemas.microsoft.com/office/drawing/2014/main" id="{7B04CF3A-CFE2-489B-A399-BF52B6C4C715}"/>
               </a:ext>
             </a:extLst>
           </p:cNvPr>
@@ -13975,8 +13638,8 @@
         </p:nvSpPr>
         <p:spPr>
           <a:xfrm>
-            <a:off x="938683" y="962324"/>
-            <a:ext cx="7017694" cy="393698"/>
+            <a:off x="677336" y="1712756"/>
+            <a:ext cx="3600400" cy="2352952"/>
           </a:xfrm>
           <a:prstGeom prst="rect">
             <a:avLst/>
@@ -13989,79 +13652,185 @@
           </a:bodyPr>
           <a:lstStyle/>
           <a:p>
-            <a:pPr algn="ctr" fontAlgn="base">
+            <a:pPr algn="just">
               <a:lnSpc>
-                <a:spcPts val="2500"/>
+                <a:spcPct val="150000"/>
               </a:lnSpc>
-              <a:spcAft>
-                <a:spcPts val="600"/>
-              </a:spcAft>
             </a:pPr>
             <a:r>
-              <a:rPr lang="es-ES" b="1" i="0" dirty="0">
+              <a:rPr lang="es-ES" sz="2000" b="1" i="0" dirty="0">
                 <a:solidFill>
                   <a:schemeClr val="accent6">
                     <a:lumMod val="75000"/>
                   </a:schemeClr>
                 </a:solidFill>
                 <a:effectLst/>
-                <a:latin typeface="inherit"/>
-              </a:rPr>
-              <a:t>{min, </a:t>
-            </a:r>
-            <a:r>
-              <a:rPr lang="es-ES" b="1" i="0" dirty="0" err="1">
+              </a:rPr>
+              <a:t>\w </a:t>
+            </a:r>
+            <a:r>
+              <a:rPr lang="es-ES" sz="2000" i="0" dirty="0" err="1">
+                <a:solidFill>
+                  <a:schemeClr val="tx1">
+                    <a:lumMod val="95000"/>
+                    <a:lumOff val="5000"/>
+                  </a:schemeClr>
+                </a:solidFill>
+                <a:effectLst/>
+              </a:rPr>
+              <a:t>Caracte</a:t>
+            </a:r>
+            <a:r>
+              <a:rPr lang="es-ES" sz="2000" dirty="0" err="1">
+                <a:solidFill>
+                  <a:schemeClr val="tx1">
+                    <a:lumMod val="95000"/>
+                    <a:lumOff val="5000"/>
+                  </a:schemeClr>
+                </a:solidFill>
+              </a:rPr>
+              <a:t>r</a:t>
+            </a:r>
+            <a:r>
+              <a:rPr lang="es-ES" sz="2000" dirty="0">
+                <a:solidFill>
+                  <a:schemeClr val="tx1">
+                    <a:lumMod val="95000"/>
+                    <a:lumOff val="5000"/>
+                  </a:schemeClr>
+                </a:solidFill>
+              </a:rPr>
+              <a:t>, digito o guion bajo.</a:t>
+            </a:r>
+          </a:p>
+          <a:p>
+            <a:pPr algn="just">
+              <a:lnSpc>
+                <a:spcPct val="150000"/>
+              </a:lnSpc>
+            </a:pPr>
+            <a:r>
+              <a:rPr lang="es-ES" sz="2000" b="1" dirty="0">
                 <a:solidFill>
                   <a:schemeClr val="accent6">
                     <a:lumMod val="75000"/>
                   </a:schemeClr>
                 </a:solidFill>
-                <a:effectLst/>
-                <a:latin typeface="inherit"/>
-              </a:rPr>
-              <a:t>max</a:t>
-            </a:r>
-            <a:r>
-              <a:rPr lang="es-ES" b="1" i="0" dirty="0">
+              </a:rPr>
+              <a:t>+ </a:t>
+            </a:r>
+            <a:r>
+              <a:rPr lang="es-ES" sz="2000" dirty="0">
+                <a:solidFill>
+                  <a:schemeClr val="tx1">
+                    <a:lumMod val="95000"/>
+                    <a:lumOff val="5000"/>
+                  </a:schemeClr>
+                </a:solidFill>
+              </a:rPr>
+              <a:t>Uno o más caracteres</a:t>
+            </a:r>
+          </a:p>
+          <a:p>
+            <a:pPr algn="just">
+              <a:lnSpc>
+                <a:spcPct val="150000"/>
+              </a:lnSpc>
+            </a:pPr>
+            <a:r>
+              <a:rPr lang="es-ES" sz="2000" b="1" dirty="0">
                 <a:solidFill>
                   <a:schemeClr val="accent6">
                     <a:lumMod val="75000"/>
                   </a:schemeClr>
                 </a:solidFill>
-                <a:effectLst/>
-                <a:latin typeface="inherit"/>
-              </a:rPr>
-              <a:t> } </a:t>
-            </a:r>
-            <a:r>
-              <a:rPr lang="es-ES" b="1" dirty="0">
+              </a:rPr>
+              <a:t>\s </a:t>
+            </a:r>
+            <a:r>
+              <a:rPr lang="es-ES" sz="2000" dirty="0">
+                <a:solidFill>
+                  <a:schemeClr val="tx1">
+                    <a:lumMod val="95000"/>
+                    <a:lumOff val="5000"/>
+                  </a:schemeClr>
+                </a:solidFill>
+              </a:rPr>
+              <a:t>Espacio</a:t>
+            </a:r>
+          </a:p>
+          <a:p>
+            <a:pPr algn="just">
+              <a:lnSpc>
+                <a:spcPct val="150000"/>
+              </a:lnSpc>
+            </a:pPr>
+            <a:r>
+              <a:rPr lang="es-ES" sz="2000" b="1" dirty="0">
                 <a:solidFill>
                   <a:schemeClr val="accent6">
                     <a:lumMod val="75000"/>
                   </a:schemeClr>
                 </a:solidFill>
-                <a:latin typeface="inherit"/>
-              </a:rPr>
-              <a:t>Rango de números mínimo y máximo</a:t>
-            </a:r>
-            <a:endParaRPr lang="es-ES" b="1" i="0" dirty="0">
+              </a:rPr>
+              <a:t>^ </a:t>
+            </a:r>
+            <a:r>
+              <a:rPr lang="es-ES" sz="2000" dirty="0">
+                <a:solidFill>
+                  <a:schemeClr val="tx1">
+                    <a:lumMod val="95000"/>
+                    <a:lumOff val="5000"/>
+                  </a:schemeClr>
+                </a:solidFill>
+              </a:rPr>
+              <a:t>Al inicio de la línea</a:t>
+            </a:r>
+          </a:p>
+          <a:p>
+            <a:pPr algn="just">
+              <a:lnSpc>
+                <a:spcPct val="150000"/>
+              </a:lnSpc>
+            </a:pPr>
+            <a:r>
+              <a:rPr lang="es-ES" sz="2000" b="1" dirty="0">
+                <a:solidFill>
+                  <a:schemeClr val="accent6">
+                    <a:lumMod val="75000"/>
+                  </a:schemeClr>
+                </a:solidFill>
+              </a:rPr>
+              <a:t>$ </a:t>
+            </a:r>
+            <a:r>
+              <a:rPr lang="es-ES" sz="2000" dirty="0">
+                <a:solidFill>
+                  <a:schemeClr val="tx1">
+                    <a:lumMod val="95000"/>
+                    <a:lumOff val="5000"/>
+                  </a:schemeClr>
+                </a:solidFill>
+              </a:rPr>
+              <a:t>Al final de la línea</a:t>
+            </a:r>
+            <a:endParaRPr lang="es-ES" sz="2000" b="1" dirty="0">
               <a:solidFill>
-                <a:schemeClr val="accent6">
-                  <a:lumMod val="75000"/>
+                <a:schemeClr val="tx1">
+                  <a:lumMod val="95000"/>
+                  <a:lumOff val="5000"/>
                 </a:schemeClr>
               </a:solidFill>
-              <a:effectLst/>
-              <a:latin typeface="inherit"/>
             </a:endParaRPr>
           </a:p>
         </p:txBody>
       </p:sp>
       <p:pic>
         <p:nvPicPr>
-          <p:cNvPr id="5" name="Imagen 4">
+          <p:cNvPr id="4" name="Imagen 3">
             <a:extLst>
               <a:ext uri="{FF2B5EF4-FFF2-40B4-BE49-F238E27FC236}">
-                <a16:creationId xmlns:a16="http://schemas.microsoft.com/office/drawing/2014/main" id="{5297F19D-6B8D-4F0F-AAB5-5924AAA35525}"/>
+                <a16:creationId xmlns:a16="http://schemas.microsoft.com/office/drawing/2014/main" id="{2244D66E-F87F-4BA3-AC5F-4FB04A58DA55}"/>
               </a:ext>
             </a:extLst>
           </p:cNvPr>
@@ -14078,18 +13847,97 @@
         </p:blipFill>
         <p:spPr>
           <a:xfrm>
-            <a:off x="1187624" y="2492896"/>
-            <a:ext cx="6962775" cy="2714625"/>
+            <a:off x="4603101" y="2208333"/>
+            <a:ext cx="3505200" cy="3714750"/>
           </a:xfrm>
           <a:prstGeom prst="rect">
             <a:avLst/>
           </a:prstGeom>
         </p:spPr>
       </p:pic>
+      <p:sp>
+        <p:nvSpPr>
+          <p:cNvPr id="8" name="CuadroTexto 7">
+            <a:extLst>
+              <a:ext uri="{FF2B5EF4-FFF2-40B4-BE49-F238E27FC236}">
+                <a16:creationId xmlns:a16="http://schemas.microsoft.com/office/drawing/2014/main" id="{483A51E2-20D8-491F-9488-1827DD8F8899}"/>
+              </a:ext>
+            </a:extLst>
+          </p:cNvPr>
+          <p:cNvSpPr txBox="1"/>
+          <p:nvPr/>
+        </p:nvSpPr>
+        <p:spPr>
+          <a:xfrm>
+            <a:off x="607885" y="4323952"/>
+            <a:ext cx="3505200" cy="1938992"/>
+          </a:xfrm>
+          <a:prstGeom prst="rect">
+            <a:avLst/>
+          </a:prstGeom>
+          <a:noFill/>
+        </p:spPr>
+        <p:txBody>
+          <a:bodyPr wrap="square">
+            <a:spAutoFit/>
+          </a:bodyPr>
+          <a:lstStyle/>
+          <a:p>
+            <a:pPr algn="just">
+              <a:lnSpc>
+                <a:spcPts val="2400"/>
+              </a:lnSpc>
+            </a:pPr>
+            <a:r>
+              <a:rPr lang="es-ES" sz="2000" i="0" dirty="0">
+                <a:solidFill>
+                  <a:schemeClr val="tx1">
+                    <a:lumMod val="95000"/>
+                    <a:lumOff val="5000"/>
+                  </a:schemeClr>
+                </a:solidFill>
+                <a:effectLst/>
+              </a:rPr>
+              <a:t>Al inicio de la cadena de texto, encuentres caracteres de palabra</a:t>
+            </a:r>
+            <a:r>
+              <a:rPr lang="es-ES" sz="2000" dirty="0">
+                <a:solidFill>
+                  <a:schemeClr val="tx1">
+                    <a:lumMod val="95000"/>
+                    <a:lumOff val="5000"/>
+                  </a:schemeClr>
+                </a:solidFill>
+              </a:rPr>
+              <a:t>, uno o más, un espacio, caracteres de palabra, uno o más al final de la cadena de texto</a:t>
+            </a:r>
+            <a:r>
+              <a:rPr lang="es-ES" sz="2000" i="0" dirty="0">
+                <a:solidFill>
+                  <a:schemeClr val="tx1">
+                    <a:lumMod val="95000"/>
+                    <a:lumOff val="5000"/>
+                  </a:schemeClr>
+                </a:solidFill>
+                <a:effectLst/>
+              </a:rPr>
+              <a:t>.</a:t>
+            </a:r>
+            <a:endParaRPr lang="es-ES" sz="2000" b="1" dirty="0">
+              <a:solidFill>
+                <a:schemeClr val="tx1">
+                  <a:lumMod val="95000"/>
+                  <a:lumOff val="5000"/>
+                </a:schemeClr>
+              </a:solidFill>
+            </a:endParaRPr>
+          </a:p>
+        </p:txBody>
+      </p:sp>
     </p:spTree>
     <p:extLst>
       <p:ext uri="{BB962C8B-B14F-4D97-AF65-F5344CB8AC3E}">
-        <p14:creationId xmlns:p14="http://schemas.microsoft.com/office/powerpoint/2010/main" val="3835321299"/>
+        <p14:creationId xmlns:p14="http://schemas.microsoft.com/office/powerpoint/2010/main" val="2299871094"/>
       </p:ext>
     </p:extLst>
   </p:cSld>
@@ -14174,7 +14022,7 @@
         </p:nvSpPr>
         <p:spPr>
           <a:xfrm>
-            <a:off x="642661" y="1075500"/>
+            <a:off x="640723" y="1052736"/>
             <a:ext cx="7920880" cy="506292"/>
           </a:xfrm>
           <a:prstGeom prst="rect">
@@ -14203,18 +14051,26 @@
                 </a:solidFill>
                 <a:effectLst/>
               </a:rPr>
-              <a:t>Ejemplo:</a:t>
-            </a:r>
-            <a:r>
-              <a:rPr lang="es-ES" sz="2000" b="1" dirty="0">
+              <a:t>Ejemplo 2: </a:t>
+            </a:r>
+            <a:r>
+              <a:rPr lang="es-ES" sz="2000" b="1" i="0" dirty="0">
                 <a:solidFill>
                   <a:schemeClr val="accent6">
                     <a:lumMod val="75000"/>
                   </a:schemeClr>
                 </a:solidFill>
-              </a:rPr>
-              <a:t> Extraer los nombres del directorio con dos textos</a:t>
-            </a:r>
+                <a:effectLst/>
+              </a:rPr>
+              <a:t>Extraer los nombres del directorio con dos textos y espacio.</a:t>
+            </a:r>
+            <a:endParaRPr lang="es-ES" sz="2000" b="1" dirty="0">
+              <a:solidFill>
+                <a:schemeClr val="accent6">
+                  <a:lumMod val="75000"/>
+                </a:schemeClr>
+              </a:solidFill>
+            </a:endParaRPr>
           </a:p>
         </p:txBody>
       </p:sp>
@@ -14232,8 +14088,8 @@
         </p:nvSpPr>
         <p:spPr>
           <a:xfrm>
-            <a:off x="677336" y="1712756"/>
-            <a:ext cx="3600400" cy="2352952"/>
+            <a:off x="611560" y="1559028"/>
+            <a:ext cx="4320480" cy="2814617"/>
           </a:xfrm>
           <a:prstGeom prst="rect">
             <a:avLst/>
@@ -14294,7 +14150,7 @@
                   </a:schemeClr>
                 </a:solidFill>
               </a:rPr>
-              <a:t>, digito o guion bajo.</a:t>
+              <a:t> o guion bajo.</a:t>
             </a:r>
           </a:p>
           <a:p>
@@ -14350,7 +14206,7 @@
                   </a:schemeClr>
                 </a:solidFill>
               </a:rPr>
-              <a:t>Espacio</a:t>
+              <a:t>Espacio, tabulador o salto de línea</a:t>
             </a:r>
           </a:p>
           <a:p>
@@ -14407,6 +14263,105 @@
                 </a:solidFill>
               </a:rPr>
               <a:t>Al final de la línea</a:t>
+            </a:r>
+          </a:p>
+          <a:p>
+            <a:pPr algn="just">
+              <a:lnSpc>
+                <a:spcPct val="150000"/>
+              </a:lnSpc>
+            </a:pPr>
+            <a:r>
+              <a:rPr lang="es-ES" sz="2000" b="1" dirty="0">
+                <a:solidFill>
+                  <a:schemeClr val="accent6">
+                    <a:lumMod val="75000"/>
+                  </a:schemeClr>
+                </a:solidFill>
+              </a:rPr>
+              <a:t>? </a:t>
+            </a:r>
+            <a:r>
+              <a:rPr lang="es-ES" sz="2000" dirty="0">
+                <a:solidFill>
+                  <a:schemeClr val="tx1">
+                    <a:lumMod val="95000"/>
+                    <a:lumOff val="5000"/>
+                  </a:schemeClr>
+                </a:solidFill>
+              </a:rPr>
+              <a:t>O o más</a:t>
+            </a:r>
+          </a:p>
+        </p:txBody>
+      </p:sp>
+      <p:sp>
+        <p:nvSpPr>
+          <p:cNvPr id="8" name="CuadroTexto 7">
+            <a:extLst>
+              <a:ext uri="{FF2B5EF4-FFF2-40B4-BE49-F238E27FC236}">
+                <a16:creationId xmlns:a16="http://schemas.microsoft.com/office/drawing/2014/main" id="{483A51E2-20D8-491F-9488-1827DD8F8899}"/>
+              </a:ext>
+            </a:extLst>
+          </p:cNvPr>
+          <p:cNvSpPr txBox="1"/>
+          <p:nvPr/>
+        </p:nvSpPr>
+        <p:spPr>
+          <a:xfrm>
+            <a:off x="607884" y="4436547"/>
+            <a:ext cx="3964115" cy="1938992"/>
+          </a:xfrm>
+          <a:prstGeom prst="rect">
+            <a:avLst/>
+          </a:prstGeom>
+          <a:noFill/>
+        </p:spPr>
+        <p:txBody>
+          <a:bodyPr wrap="square">
+            <a:spAutoFit/>
+          </a:bodyPr>
+          <a:lstStyle/>
+          <a:p>
+            <a:pPr algn="just">
+              <a:lnSpc>
+                <a:spcPts val="2400"/>
+              </a:lnSpc>
+            </a:pPr>
+            <a:r>
+              <a:rPr lang="es-ES" sz="2000" i="0" dirty="0">
+                <a:solidFill>
+                  <a:schemeClr val="tx1">
+                    <a:lumMod val="95000"/>
+                    <a:lumOff val="5000"/>
+                  </a:schemeClr>
+                </a:solidFill>
+                <a:effectLst/>
+              </a:rPr>
+              <a:t>Al inicio de la cadena de texto, encuentres caracteres de palabra</a:t>
+            </a:r>
+            <a:r>
+              <a:rPr lang="es-ES" sz="2000" dirty="0">
+                <a:solidFill>
+                  <a:schemeClr val="tx1">
+                    <a:lumMod val="95000"/>
+                    <a:lumOff val="5000"/>
+                  </a:schemeClr>
+                </a:solidFill>
+              </a:rPr>
+              <a:t>, uno o más, un espacio, caracteres de palabra, uno o más, un espacio cero o más veces al final de la cadena de texto</a:t>
+            </a:r>
+            <a:r>
+              <a:rPr lang="es-ES" sz="2000" i="0" dirty="0">
+                <a:solidFill>
+                  <a:schemeClr val="tx1">
+                    <a:lumMod val="95000"/>
+                    <a:lumOff val="5000"/>
+                  </a:schemeClr>
+                </a:solidFill>
+                <a:effectLst/>
+              </a:rPr>
+              <a:t>.</a:t>
             </a:r>
             <a:endParaRPr lang="es-ES" sz="2000" b="1" dirty="0">
               <a:solidFill>
@@ -14421,10 +14376,10 @@
       </p:sp>
       <p:pic>
         <p:nvPicPr>
-          <p:cNvPr id="4" name="Imagen 3">
+          <p:cNvPr id="3" name="Imagen 2">
             <a:extLst>
               <a:ext uri="{FF2B5EF4-FFF2-40B4-BE49-F238E27FC236}">
-                <a16:creationId xmlns:a16="http://schemas.microsoft.com/office/drawing/2014/main" id="{2244D66E-F87F-4BA3-AC5F-4FB04A58DA55}"/>
+                <a16:creationId xmlns:a16="http://schemas.microsoft.com/office/drawing/2014/main" id="{144FF082-604B-410E-A8FD-03CEBE4E2AB8}"/>
               </a:ext>
             </a:extLst>
           </p:cNvPr>
@@ -14441,97 +14396,18 @@
         </p:blipFill>
         <p:spPr>
           <a:xfrm>
-            <a:off x="4603101" y="2208333"/>
-            <a:ext cx="3505200" cy="3714750"/>
+            <a:off x="5170703" y="2650609"/>
+            <a:ext cx="3390900" cy="3571875"/>
           </a:xfrm>
           <a:prstGeom prst="rect">
             <a:avLst/>
           </a:prstGeom>
         </p:spPr>
       </p:pic>
-      <p:sp>
-        <p:nvSpPr>
-          <p:cNvPr id="8" name="CuadroTexto 7">
-            <a:extLst>
-              <a:ext uri="{FF2B5EF4-FFF2-40B4-BE49-F238E27FC236}">
-                <a16:creationId xmlns:a16="http://schemas.microsoft.com/office/drawing/2014/main" id="{483A51E2-20D8-491F-9488-1827DD8F8899}"/>
-              </a:ext>
-            </a:extLst>
-          </p:cNvPr>
-          <p:cNvSpPr txBox="1"/>
-          <p:nvPr/>
-        </p:nvSpPr>
-        <p:spPr>
-          <a:xfrm>
-            <a:off x="607885" y="4323952"/>
-            <a:ext cx="3505200" cy="1938992"/>
-          </a:xfrm>
-          <a:prstGeom prst="rect">
-            <a:avLst/>
-          </a:prstGeom>
-          <a:noFill/>
-        </p:spPr>
-        <p:txBody>
-          <a:bodyPr wrap="square">
-            <a:spAutoFit/>
-          </a:bodyPr>
-          <a:lstStyle/>
-          <a:p>
-            <a:pPr algn="just">
-              <a:lnSpc>
-                <a:spcPts val="2400"/>
-              </a:lnSpc>
-            </a:pPr>
-            <a:r>
-              <a:rPr lang="es-ES" sz="2000" i="0" dirty="0">
-                <a:solidFill>
-                  <a:schemeClr val="tx1">
-                    <a:lumMod val="95000"/>
-                    <a:lumOff val="5000"/>
-                  </a:schemeClr>
-                </a:solidFill>
-                <a:effectLst/>
-              </a:rPr>
-              <a:t>Al inicio de la cadena de texto, encuentres caracteres de palabra</a:t>
-            </a:r>
-            <a:r>
-              <a:rPr lang="es-ES" sz="2000" dirty="0">
-                <a:solidFill>
-                  <a:schemeClr val="tx1">
-                    <a:lumMod val="95000"/>
-                    <a:lumOff val="5000"/>
-                  </a:schemeClr>
-                </a:solidFill>
-              </a:rPr>
-              <a:t>, uno o más, un espacio, caracteres de palabra, uno o más al final de la cadena de texto</a:t>
-            </a:r>
-            <a:r>
-              <a:rPr lang="es-ES" sz="2000" i="0" dirty="0">
-                <a:solidFill>
-                  <a:schemeClr val="tx1">
-                    <a:lumMod val="95000"/>
-                    <a:lumOff val="5000"/>
-                  </a:schemeClr>
-                </a:solidFill>
-                <a:effectLst/>
-              </a:rPr>
-              <a:t>.</a:t>
-            </a:r>
-            <a:endParaRPr lang="es-ES" sz="2000" b="1" dirty="0">
-              <a:solidFill>
-                <a:schemeClr val="tx1">
-                  <a:lumMod val="95000"/>
-                  <a:lumOff val="5000"/>
-                </a:schemeClr>
-              </a:solidFill>
-            </a:endParaRPr>
-          </a:p>
-        </p:txBody>
-      </p:sp>
     </p:spTree>
     <p:extLst>
       <p:ext uri="{BB962C8B-B14F-4D97-AF65-F5344CB8AC3E}">
-        <p14:creationId xmlns:p14="http://schemas.microsoft.com/office/powerpoint/2010/main" val="2299871094"/>
+        <p14:creationId xmlns:p14="http://schemas.microsoft.com/office/powerpoint/2010/main" val="818947523"/>
       </p:ext>
     </p:extLst>
   </p:cSld>
@@ -14645,7 +14521,7 @@
                 </a:solidFill>
                 <a:effectLst/>
               </a:rPr>
-              <a:t>Ejemplo 2: </a:t>
+              <a:t>Ejemplo 3: </a:t>
             </a:r>
             <a:r>
               <a:rPr lang="es-ES" sz="2000" b="1" i="0" dirty="0">
@@ -14656,7 +14532,7 @@
                 </a:solidFill>
                 <a:effectLst/>
               </a:rPr>
-              <a:t>Extraer los nombres del directorio con dos textos y espacio.</a:t>
+              <a:t>Extraer los nombres del directorio con dos textos o uno.</a:t>
             </a:r>
             <a:endParaRPr lang="es-ES" sz="2000" b="1" dirty="0">
               <a:solidFill>
@@ -14683,7 +14559,7 @@
         <p:spPr>
           <a:xfrm>
             <a:off x="611560" y="1559028"/>
-            <a:ext cx="4320480" cy="2814617"/>
+            <a:ext cx="3501525" cy="2814617"/>
           </a:xfrm>
           <a:prstGeom prst="rect">
             <a:avLst/>
@@ -14800,7 +14676,7 @@
                   </a:schemeClr>
                 </a:solidFill>
               </a:rPr>
-              <a:t>Espacio, tabulador o salto de línea</a:t>
+              <a:t>Espacio</a:t>
             </a:r>
           </a:p>
           <a:p>
@@ -14904,7 +14780,7 @@
         <p:spPr>
           <a:xfrm>
             <a:off x="607884" y="4436547"/>
-            <a:ext cx="3964115" cy="1938992"/>
+            <a:ext cx="4396164" cy="2246769"/>
           </a:xfrm>
           <a:prstGeom prst="rect">
             <a:avLst/>
@@ -14943,7 +14819,7 @@
                   </a:schemeClr>
                 </a:solidFill>
               </a:rPr>
-              <a:t>, uno o más, un espacio, caracteres de palabra, uno o más, un espacio cero o más veces al final de la cadena de texto</a:t>
+              <a:t>, uno o más, un espacio, caracteres de palabra, uno o más, un espacio cero o más al final de la cadena de texto</a:t>
             </a:r>
             <a:r>
               <a:rPr lang="es-ES" sz="2000" i="0" dirty="0">
@@ -14957,6 +14833,13 @@
               </a:rPr>
               <a:t>.</a:t>
             </a:r>
+          </a:p>
+          <a:p>
+            <a:pPr algn="just">
+              <a:lnSpc>
+                <a:spcPts val="2400"/>
+              </a:lnSpc>
+            </a:pPr>
             <a:endParaRPr lang="es-ES" sz="2000" b="1" dirty="0">
               <a:solidFill>
                 <a:schemeClr val="tx1">
@@ -14966,6 +14849,45 @@
               </a:solidFill>
             </a:endParaRPr>
           </a:p>
+          <a:p>
+            <a:pPr algn="just">
+              <a:lnSpc>
+                <a:spcPts val="2400"/>
+              </a:lnSpc>
+            </a:pPr>
+            <a:r>
+              <a:rPr lang="es-ES" sz="2000" b="1" dirty="0">
+                <a:solidFill>
+                  <a:schemeClr val="tx1">
+                    <a:lumMod val="95000"/>
+                    <a:lumOff val="5000"/>
+                  </a:schemeClr>
+                </a:solidFill>
+              </a:rPr>
+              <a:t>\s</a:t>
+            </a:r>
+            <a:r>
+              <a:rPr lang="es-ES" sz="2000" b="1" dirty="0">
+                <a:solidFill>
+                  <a:schemeClr val="accent6">
+                    <a:lumMod val="75000"/>
+                  </a:schemeClr>
+                </a:solidFill>
+              </a:rPr>
+              <a:t>?</a:t>
+            </a:r>
+            <a:r>
+              <a:rPr lang="es-ES" sz="2000" b="1" dirty="0">
+                <a:solidFill>
+                  <a:schemeClr val="tx1">
+                    <a:lumMod val="95000"/>
+                    <a:lumOff val="5000"/>
+                  </a:schemeClr>
+                </a:solidFill>
+              </a:rPr>
+              <a:t> Opcional espacio</a:t>
+            </a:r>
+          </a:p>
         </p:txBody>
       </p:sp>
       <p:pic>
@@ -14973,7 +14895,7 @@
           <p:cNvPr id="3" name="Imagen 2">
             <a:extLst>
               <a:ext uri="{FF2B5EF4-FFF2-40B4-BE49-F238E27FC236}">
-                <a16:creationId xmlns:a16="http://schemas.microsoft.com/office/drawing/2014/main" id="{144FF082-604B-410E-A8FD-03CEBE4E2AB8}"/>
+                <a16:creationId xmlns:a16="http://schemas.microsoft.com/office/drawing/2014/main" id="{11195915-0514-0D81-0EAD-E41B395DFB1C}"/>
               </a:ext>
             </a:extLst>
           </p:cNvPr>
@@ -14990,8 +14912,8 @@
         </p:blipFill>
         <p:spPr>
           <a:xfrm>
-            <a:off x="5170703" y="2650609"/>
-            <a:ext cx="3390900" cy="3571875"/>
+            <a:off x="5148064" y="1700808"/>
+            <a:ext cx="3667637" cy="4658375"/>
           </a:xfrm>
           <a:prstGeom prst="rect">
             <a:avLst/>
@@ -15001,7 +14923,7 @@
     </p:spTree>
     <p:extLst>
       <p:ext uri="{BB962C8B-B14F-4D97-AF65-F5344CB8AC3E}">
-        <p14:creationId xmlns:p14="http://schemas.microsoft.com/office/powerpoint/2010/main" val="818947523"/>
+        <p14:creationId xmlns:p14="http://schemas.microsoft.com/office/powerpoint/2010/main" val="3833007669"/>
       </p:ext>
     </p:extLst>
   </p:cSld>
@@ -15040,7 +14962,7 @@
         </p:nvSpPr>
         <p:spPr>
           <a:xfrm>
-            <a:off x="289721" y="4056"/>
+            <a:off x="390364" y="260648"/>
             <a:ext cx="8363272" cy="1143000"/>
           </a:xfrm>
         </p:spPr>
@@ -15067,7 +14989,7 @@
                 </a:effectLst>
                 <a:latin typeface="Dom Casual" charset="0"/>
               </a:rPr>
-              <a:t>Expresión regular</a:t>
+              <a:t>Grupos</a:t>
             </a:r>
           </a:p>
         </p:txBody>
@@ -15077,7 +14999,7 @@
           <p:cNvPr id="5" name="CuadroTexto 4">
             <a:extLst>
               <a:ext uri="{FF2B5EF4-FFF2-40B4-BE49-F238E27FC236}">
-                <a16:creationId xmlns:a16="http://schemas.microsoft.com/office/drawing/2014/main" id="{FC189524-E564-48DD-B173-E7D162EDC50C}"/>
+                <a16:creationId xmlns:a16="http://schemas.microsoft.com/office/drawing/2014/main" id="{F5D927B0-3579-4E54-99D7-681F443BC962}"/>
               </a:ext>
             </a:extLst>
           </p:cNvPr>
@@ -15086,8 +15008,8 @@
         </p:nvSpPr>
         <p:spPr>
           <a:xfrm>
-            <a:off x="640723" y="1052736"/>
-            <a:ext cx="7920880" cy="506292"/>
+            <a:off x="1187624" y="2046744"/>
+            <a:ext cx="7056784" cy="2352952"/>
           </a:xfrm>
           <a:prstGeom prst="rect">
             <a:avLst/>
@@ -15100,424 +15022,79 @@
           </a:bodyPr>
           <a:lstStyle/>
           <a:p>
-            <a:pPr algn="just">
+            <a:pPr>
               <a:lnSpc>
                 <a:spcPct val="150000"/>
               </a:lnSpc>
             </a:pPr>
             <a:r>
-              <a:rPr lang="es-ES" sz="2000" b="1" i="0" dirty="0">
-                <a:solidFill>
-                  <a:schemeClr val="tx1">
-                    <a:lumMod val="95000"/>
-                    <a:lumOff val="5000"/>
-                  </a:schemeClr>
-                </a:solidFill>
-                <a:effectLst/>
-              </a:rPr>
-              <a:t>Ejemplo 3: </a:t>
-            </a:r>
-            <a:r>
-              <a:rPr lang="es-ES" sz="2000" b="1" i="0" dirty="0">
-                <a:solidFill>
-                  <a:schemeClr val="accent6">
-                    <a:lumMod val="75000"/>
-                  </a:schemeClr>
-                </a:solidFill>
-                <a:effectLst/>
-              </a:rPr>
-              <a:t>Extraer los nombres del directorio con dos textos o uno.</a:t>
-            </a:r>
-            <a:endParaRPr lang="es-ES" sz="2000" b="1" dirty="0">
-              <a:solidFill>
-                <a:schemeClr val="accent6">
-                  <a:lumMod val="75000"/>
-                </a:schemeClr>
-              </a:solidFill>
-            </a:endParaRPr>
-          </a:p>
-        </p:txBody>
-      </p:sp>
-      <p:sp>
-        <p:nvSpPr>
-          <p:cNvPr id="6" name="CuadroTexto 5">
-            <a:extLst>
-              <a:ext uri="{FF2B5EF4-FFF2-40B4-BE49-F238E27FC236}">
-                <a16:creationId xmlns:a16="http://schemas.microsoft.com/office/drawing/2014/main" id="{7B04CF3A-CFE2-489B-A399-BF52B6C4C715}"/>
-              </a:ext>
-            </a:extLst>
-          </p:cNvPr>
-          <p:cNvSpPr txBox="1"/>
-          <p:nvPr/>
-        </p:nvSpPr>
-        <p:spPr>
-          <a:xfrm>
-            <a:off x="611560" y="1559028"/>
-            <a:ext cx="3501525" cy="2814617"/>
-          </a:xfrm>
-          <a:prstGeom prst="rect">
-            <a:avLst/>
-          </a:prstGeom>
-          <a:noFill/>
-        </p:spPr>
-        <p:txBody>
-          <a:bodyPr wrap="square">
-            <a:spAutoFit/>
-          </a:bodyPr>
-          <a:lstStyle/>
-          <a:p>
-            <a:pPr algn="just">
+              <a:rPr lang="es-MX" sz="2000" b="1" dirty="0"/>
+              <a:t>[]</a:t>
+            </a:r>
+            <a:r>
+              <a:rPr lang="es-MX" sz="2000" dirty="0"/>
+              <a:t>	Encuentra caracteres en corchetes</a:t>
+            </a:r>
+          </a:p>
+          <a:p>
+            <a:pPr>
               <a:lnSpc>
                 <a:spcPct val="150000"/>
               </a:lnSpc>
             </a:pPr>
             <a:r>
-              <a:rPr lang="es-ES" sz="2000" b="1" i="0" dirty="0">
-                <a:solidFill>
-                  <a:schemeClr val="accent6">
-                    <a:lumMod val="75000"/>
-                  </a:schemeClr>
-                </a:solidFill>
-                <a:effectLst/>
-              </a:rPr>
-              <a:t>\w </a:t>
-            </a:r>
-            <a:r>
-              <a:rPr lang="es-ES" sz="2000" i="0" dirty="0" err="1">
-                <a:solidFill>
-                  <a:schemeClr val="tx1">
-                    <a:lumMod val="95000"/>
-                    <a:lumOff val="5000"/>
-                  </a:schemeClr>
-                </a:solidFill>
-                <a:effectLst/>
-              </a:rPr>
-              <a:t>Caracte</a:t>
-            </a:r>
-            <a:r>
-              <a:rPr lang="es-ES" sz="2000" dirty="0" err="1">
-                <a:solidFill>
-                  <a:schemeClr val="tx1">
-                    <a:lumMod val="95000"/>
-                    <a:lumOff val="5000"/>
-                  </a:schemeClr>
-                </a:solidFill>
-              </a:rPr>
-              <a:t>r</a:t>
-            </a:r>
-            <a:r>
-              <a:rPr lang="es-ES" sz="2000" dirty="0">
-                <a:solidFill>
-                  <a:schemeClr val="tx1">
-                    <a:lumMod val="95000"/>
-                    <a:lumOff val="5000"/>
-                  </a:schemeClr>
-                </a:solidFill>
-              </a:rPr>
-              <a:t> o guion bajo.</a:t>
-            </a:r>
-          </a:p>
-          <a:p>
-            <a:pPr algn="just">
+              <a:rPr lang="es-MX" sz="2000" b="1" dirty="0"/>
+              <a:t>[^ ]</a:t>
+            </a:r>
+            <a:r>
+              <a:rPr lang="es-MX" sz="2000" dirty="0"/>
+              <a:t>	Encuentra caracteres que no están dentro de corchetes</a:t>
+            </a:r>
+          </a:p>
+          <a:p>
+            <a:pPr>
               <a:lnSpc>
                 <a:spcPct val="150000"/>
               </a:lnSpc>
             </a:pPr>
             <a:r>
-              <a:rPr lang="es-ES" sz="2000" b="1" dirty="0">
-                <a:solidFill>
-                  <a:schemeClr val="accent6">
-                    <a:lumMod val="75000"/>
-                  </a:schemeClr>
-                </a:solidFill>
-              </a:rPr>
-              <a:t>+ </a:t>
-            </a:r>
-            <a:r>
-              <a:rPr lang="es-ES" sz="2000" dirty="0">
-                <a:solidFill>
-                  <a:schemeClr val="tx1">
-                    <a:lumMod val="95000"/>
-                    <a:lumOff val="5000"/>
-                  </a:schemeClr>
-                </a:solidFill>
-              </a:rPr>
-              <a:t>Uno o más caracteres</a:t>
-            </a:r>
-          </a:p>
-          <a:p>
-            <a:pPr algn="just">
+              <a:rPr lang="es-MX" sz="2000" b="1" dirty="0"/>
+              <a:t>|</a:t>
+            </a:r>
+            <a:r>
+              <a:rPr lang="es-MX" sz="2000" dirty="0"/>
+              <a:t>	Condicional O</a:t>
+            </a:r>
+          </a:p>
+          <a:p>
+            <a:pPr>
               <a:lnSpc>
                 <a:spcPct val="150000"/>
               </a:lnSpc>
             </a:pPr>
             <a:r>
-              <a:rPr lang="es-ES" sz="2000" b="1" dirty="0">
-                <a:solidFill>
-                  <a:schemeClr val="accent6">
-                    <a:lumMod val="75000"/>
-                  </a:schemeClr>
-                </a:solidFill>
-              </a:rPr>
-              <a:t>\s </a:t>
-            </a:r>
-            <a:r>
-              <a:rPr lang="es-ES" sz="2000" dirty="0">
-                <a:solidFill>
-                  <a:schemeClr val="tx1">
-                    <a:lumMod val="95000"/>
-                    <a:lumOff val="5000"/>
-                  </a:schemeClr>
-                </a:solidFill>
-              </a:rPr>
-              <a:t>Espacio</a:t>
-            </a:r>
-          </a:p>
-          <a:p>
-            <a:pPr algn="just">
+              <a:rPr lang="es-MX" sz="2000" b="1" dirty="0"/>
+              <a:t>()	</a:t>
+            </a:r>
+            <a:r>
+              <a:rPr lang="es-MX" sz="2000" dirty="0"/>
+              <a:t>Grupos</a:t>
+            </a:r>
+          </a:p>
+          <a:p>
+            <a:pPr>
               <a:lnSpc>
                 <a:spcPct val="150000"/>
               </a:lnSpc>
             </a:pPr>
-            <a:r>
-              <a:rPr lang="es-ES" sz="2000" b="1" dirty="0">
-                <a:solidFill>
-                  <a:schemeClr val="accent6">
-                    <a:lumMod val="75000"/>
-                  </a:schemeClr>
-                </a:solidFill>
-              </a:rPr>
-              <a:t>^ </a:t>
-            </a:r>
-            <a:r>
-              <a:rPr lang="es-ES" sz="2000" dirty="0">
-                <a:solidFill>
-                  <a:schemeClr val="tx1">
-                    <a:lumMod val="95000"/>
-                    <a:lumOff val="5000"/>
-                  </a:schemeClr>
-                </a:solidFill>
-              </a:rPr>
-              <a:t>Al inicio de la línea</a:t>
-            </a:r>
-          </a:p>
-          <a:p>
-            <a:pPr algn="just">
-              <a:lnSpc>
-                <a:spcPct val="150000"/>
-              </a:lnSpc>
-            </a:pPr>
-            <a:r>
-              <a:rPr lang="es-ES" sz="2000" b="1" dirty="0">
-                <a:solidFill>
-                  <a:schemeClr val="accent6">
-                    <a:lumMod val="75000"/>
-                  </a:schemeClr>
-                </a:solidFill>
-              </a:rPr>
-              <a:t>$ </a:t>
-            </a:r>
-            <a:r>
-              <a:rPr lang="es-ES" sz="2000" dirty="0">
-                <a:solidFill>
-                  <a:schemeClr val="tx1">
-                    <a:lumMod val="95000"/>
-                    <a:lumOff val="5000"/>
-                  </a:schemeClr>
-                </a:solidFill>
-              </a:rPr>
-              <a:t>Al final de la línea</a:t>
-            </a:r>
-          </a:p>
-          <a:p>
-            <a:pPr algn="just">
-              <a:lnSpc>
-                <a:spcPct val="150000"/>
-              </a:lnSpc>
-            </a:pPr>
-            <a:r>
-              <a:rPr lang="es-ES" sz="2000" b="1" dirty="0">
-                <a:solidFill>
-                  <a:schemeClr val="accent6">
-                    <a:lumMod val="75000"/>
-                  </a:schemeClr>
-                </a:solidFill>
-              </a:rPr>
-              <a:t>? </a:t>
-            </a:r>
-            <a:r>
-              <a:rPr lang="es-ES" sz="2000" dirty="0">
-                <a:solidFill>
-                  <a:schemeClr val="tx1">
-                    <a:lumMod val="95000"/>
-                    <a:lumOff val="5000"/>
-                  </a:schemeClr>
-                </a:solidFill>
-              </a:rPr>
-              <a:t>O o más</a:t>
-            </a:r>
-          </a:p>
-        </p:txBody>
-      </p:sp>
-      <p:sp>
-        <p:nvSpPr>
-          <p:cNvPr id="8" name="CuadroTexto 7">
-            <a:extLst>
-              <a:ext uri="{FF2B5EF4-FFF2-40B4-BE49-F238E27FC236}">
-                <a16:creationId xmlns:a16="http://schemas.microsoft.com/office/drawing/2014/main" id="{483A51E2-20D8-491F-9488-1827DD8F8899}"/>
-              </a:ext>
-            </a:extLst>
-          </p:cNvPr>
-          <p:cNvSpPr txBox="1"/>
-          <p:nvPr/>
-        </p:nvSpPr>
-        <p:spPr>
-          <a:xfrm>
-            <a:off x="607884" y="4436547"/>
-            <a:ext cx="4396164" cy="2246769"/>
-          </a:xfrm>
-          <a:prstGeom prst="rect">
-            <a:avLst/>
-          </a:prstGeom>
-          <a:noFill/>
-        </p:spPr>
-        <p:txBody>
-          <a:bodyPr wrap="square">
-            <a:spAutoFit/>
-          </a:bodyPr>
-          <a:lstStyle/>
-          <a:p>
-            <a:pPr algn="just">
-              <a:lnSpc>
-                <a:spcPts val="2400"/>
-              </a:lnSpc>
-            </a:pPr>
-            <a:r>
-              <a:rPr lang="es-ES" sz="2000" i="0" dirty="0">
-                <a:solidFill>
-                  <a:schemeClr val="tx1">
-                    <a:lumMod val="95000"/>
-                    <a:lumOff val="5000"/>
-                  </a:schemeClr>
-                </a:solidFill>
-                <a:effectLst/>
-              </a:rPr>
-              <a:t>Al inicio de la cadena de texto, encuentres caracteres de palabra</a:t>
-            </a:r>
-            <a:r>
-              <a:rPr lang="es-ES" sz="2000" dirty="0">
-                <a:solidFill>
-                  <a:schemeClr val="tx1">
-                    <a:lumMod val="95000"/>
-                    <a:lumOff val="5000"/>
-                  </a:schemeClr>
-                </a:solidFill>
-              </a:rPr>
-              <a:t>, uno o más, un espacio, caracteres de palabra, uno o más, un espacio cero o más al final de la cadena de texto</a:t>
-            </a:r>
-            <a:r>
-              <a:rPr lang="es-ES" sz="2000" i="0" dirty="0">
-                <a:solidFill>
-                  <a:schemeClr val="tx1">
-                    <a:lumMod val="95000"/>
-                    <a:lumOff val="5000"/>
-                  </a:schemeClr>
-                </a:solidFill>
-                <a:effectLst/>
-              </a:rPr>
-              <a:t>.</a:t>
-            </a:r>
-          </a:p>
-          <a:p>
-            <a:pPr algn="just">
-              <a:lnSpc>
-                <a:spcPts val="2400"/>
-              </a:lnSpc>
-            </a:pPr>
-            <a:endParaRPr lang="es-ES" sz="2000" b="1" dirty="0">
-              <a:solidFill>
-                <a:schemeClr val="tx1">
-                  <a:lumMod val="95000"/>
-                  <a:lumOff val="5000"/>
-                </a:schemeClr>
-              </a:solidFill>
-            </a:endParaRPr>
-          </a:p>
-          <a:p>
-            <a:pPr algn="just">
-              <a:lnSpc>
-                <a:spcPts val="2400"/>
-              </a:lnSpc>
-            </a:pPr>
-            <a:r>
-              <a:rPr lang="es-ES" sz="2000" b="1" dirty="0">
-                <a:solidFill>
-                  <a:schemeClr val="tx1">
-                    <a:lumMod val="95000"/>
-                    <a:lumOff val="5000"/>
-                  </a:schemeClr>
-                </a:solidFill>
-              </a:rPr>
-              <a:t>\s</a:t>
-            </a:r>
-            <a:r>
-              <a:rPr lang="es-ES" sz="2000" b="1" dirty="0">
-                <a:solidFill>
-                  <a:schemeClr val="accent6">
-                    <a:lumMod val="75000"/>
-                  </a:schemeClr>
-                </a:solidFill>
-              </a:rPr>
-              <a:t>?</a:t>
-            </a:r>
-            <a:r>
-              <a:rPr lang="es-ES" sz="2000" b="1" dirty="0">
-                <a:solidFill>
-                  <a:schemeClr val="tx1">
-                    <a:lumMod val="95000"/>
-                    <a:lumOff val="5000"/>
-                  </a:schemeClr>
-                </a:solidFill>
-              </a:rPr>
-              <a:t> Opcional espacio</a:t>
-            </a:r>
-          </a:p>
-        </p:txBody>
-      </p:sp>
-      <p:pic>
-        <p:nvPicPr>
-          <p:cNvPr id="3" name="Imagen 2">
-            <a:extLst>
-              <a:ext uri="{FF2B5EF4-FFF2-40B4-BE49-F238E27FC236}">
-                <a16:creationId xmlns:a16="http://schemas.microsoft.com/office/drawing/2014/main" id="{11195915-0514-0D81-0EAD-E41B395DFB1C}"/>
-              </a:ext>
-            </a:extLst>
-          </p:cNvPr>
-          <p:cNvPicPr>
-            <a:picLocks noChangeAspect="1"/>
-          </p:cNvPicPr>
-          <p:nvPr/>
-        </p:nvPicPr>
-        <p:blipFill>
-          <a:blip r:embed="rId3"/>
-          <a:stretch>
-            <a:fillRect/>
-          </a:stretch>
-        </p:blipFill>
-        <p:spPr>
-          <a:xfrm>
-            <a:off x="5148064" y="1700808"/>
-            <a:ext cx="3667637" cy="4658375"/>
-          </a:xfrm>
-          <a:prstGeom prst="rect">
-            <a:avLst/>
-          </a:prstGeom>
-        </p:spPr>
-      </p:pic>
+            <a:endParaRPr lang="es-MX" sz="2000" dirty="0"/>
+          </a:p>
+        </p:txBody>
+      </p:sp>
     </p:spTree>
     <p:extLst>
       <p:ext uri="{BB962C8B-B14F-4D97-AF65-F5344CB8AC3E}">
-        <p14:creationId xmlns:p14="http://schemas.microsoft.com/office/powerpoint/2010/main" val="3833007669"/>
+        <p14:creationId xmlns:p14="http://schemas.microsoft.com/office/powerpoint/2010/main" val="4213194641"/>
       </p:ext>
     </p:extLst>
   </p:cSld>
@@ -15602,8 +15179,8 @@
         </p:nvSpPr>
         <p:spPr>
           <a:xfrm>
-            <a:off x="1187624" y="2046744"/>
-            <a:ext cx="7056784" cy="2352952"/>
+            <a:off x="713980" y="1648459"/>
+            <a:ext cx="7890467" cy="967957"/>
           </a:xfrm>
           <a:prstGeom prst="rect">
             <a:avLst/>
@@ -15623,72 +15200,100 @@
             </a:pPr>
             <a:r>
               <a:rPr lang="es-MX" sz="2000" b="1" dirty="0"/>
-              <a:t>[]</a:t>
+              <a:t>Ejemplo: </a:t>
             </a:r>
             <a:r>
               <a:rPr lang="es-MX" sz="2000" dirty="0"/>
-              <a:t>	Encuentra caracteres en corchetes</a:t>
-            </a:r>
-          </a:p>
-          <a:p>
-            <a:pPr>
+              <a:t>Identificar los números telefónicos que comiencen con 1 o 2 después de la lada 442.</a:t>
+            </a:r>
+          </a:p>
+        </p:txBody>
+      </p:sp>
+      <p:sp>
+        <p:nvSpPr>
+          <p:cNvPr id="4" name="CuadroTexto 3">
+            <a:extLst>
+              <a:ext uri="{FF2B5EF4-FFF2-40B4-BE49-F238E27FC236}">
+                <a16:creationId xmlns:a16="http://schemas.microsoft.com/office/drawing/2014/main" id="{B8F537AB-6E7D-42EE-B6D8-7CF10886F935}"/>
+              </a:ext>
+            </a:extLst>
+          </p:cNvPr>
+          <p:cNvSpPr txBox="1"/>
+          <p:nvPr/>
+        </p:nvSpPr>
+        <p:spPr>
+          <a:xfrm>
+            <a:off x="1063153" y="1134649"/>
+            <a:ext cx="7017694" cy="393698"/>
+          </a:xfrm>
+          <a:prstGeom prst="rect">
+            <a:avLst/>
+          </a:prstGeom>
+          <a:noFill/>
+        </p:spPr>
+        <p:txBody>
+          <a:bodyPr wrap="square">
+            <a:spAutoFit/>
+          </a:bodyPr>
+          <a:lstStyle/>
+          <a:p>
+            <a:pPr algn="ctr" fontAlgn="base">
               <a:lnSpc>
-                <a:spcPct val="150000"/>
+                <a:spcPts val="2500"/>
               </a:lnSpc>
+              <a:spcAft>
+                <a:spcPts val="600"/>
+              </a:spcAft>
             </a:pPr>
             <a:r>
-              <a:rPr lang="es-MX" sz="2000" b="1" dirty="0"/>
-              <a:t>[^ ]</a:t>
-            </a:r>
-            <a:r>
-              <a:rPr lang="es-MX" sz="2000" dirty="0"/>
-              <a:t>	Encuentra caracteres que no están dentro de corchetes</a:t>
-            </a:r>
-          </a:p>
-          <a:p>
-            <a:pPr>
-              <a:lnSpc>
-                <a:spcPct val="150000"/>
-              </a:lnSpc>
-            </a:pPr>
-            <a:r>
-              <a:rPr lang="es-MX" sz="2000" b="1" dirty="0"/>
-              <a:t>|</a:t>
-            </a:r>
-            <a:r>
-              <a:rPr lang="es-MX" sz="2000" dirty="0"/>
-              <a:t>	Condicional O</a:t>
-            </a:r>
-          </a:p>
-          <a:p>
-            <a:pPr>
-              <a:lnSpc>
-                <a:spcPct val="150000"/>
-              </a:lnSpc>
-            </a:pPr>
-            <a:r>
-              <a:rPr lang="es-MX" sz="2000" b="1" dirty="0"/>
-              <a:t>()	</a:t>
-            </a:r>
-            <a:r>
-              <a:rPr lang="es-MX" sz="2000" dirty="0"/>
-              <a:t>Grupos</a:t>
-            </a:r>
-          </a:p>
-          <a:p>
-            <a:pPr>
-              <a:lnSpc>
-                <a:spcPct val="150000"/>
-              </a:lnSpc>
-            </a:pPr>
-            <a:endParaRPr lang="es-MX" sz="2000" dirty="0"/>
-          </a:p>
-        </p:txBody>
-      </p:sp>
+              <a:rPr lang="es-ES" b="1" i="0" dirty="0">
+                <a:solidFill>
+                  <a:schemeClr val="accent6">
+                    <a:lumMod val="75000"/>
+                  </a:schemeClr>
+                </a:solidFill>
+                <a:effectLst/>
+                <a:latin typeface="inherit"/>
+              </a:rPr>
+              <a:t>() Grupos  </a:t>
+            </a:r>
+          </a:p>
+        </p:txBody>
+      </p:sp>
+      <p:pic>
+        <p:nvPicPr>
+          <p:cNvPr id="7" name="Imagen 6">
+            <a:extLst>
+              <a:ext uri="{FF2B5EF4-FFF2-40B4-BE49-F238E27FC236}">
+                <a16:creationId xmlns:a16="http://schemas.microsoft.com/office/drawing/2014/main" id="{BF36162E-AB01-4082-9DCC-64CA926DEA3F}"/>
+              </a:ext>
+            </a:extLst>
+          </p:cNvPr>
+          <p:cNvPicPr>
+            <a:picLocks noChangeAspect="1"/>
+          </p:cNvPicPr>
+          <p:nvPr/>
+        </p:nvPicPr>
+        <p:blipFill>
+          <a:blip r:embed="rId3"/>
+          <a:stretch>
+            <a:fillRect/>
+          </a:stretch>
+        </p:blipFill>
+        <p:spPr>
+          <a:xfrm>
+            <a:off x="1143000" y="2861227"/>
+            <a:ext cx="6858000" cy="2990850"/>
+          </a:xfrm>
+          <a:prstGeom prst="rect">
+            <a:avLst/>
+          </a:prstGeom>
+        </p:spPr>
+      </p:pic>
     </p:spTree>
     <p:extLst>
       <p:ext uri="{BB962C8B-B14F-4D97-AF65-F5344CB8AC3E}">
-        <p14:creationId xmlns:p14="http://schemas.microsoft.com/office/powerpoint/2010/main" val="4213194641"/>
+        <p14:creationId xmlns:p14="http://schemas.microsoft.com/office/powerpoint/2010/main" val="2219602021"/>
       </p:ext>
     </p:extLst>
   </p:cSld>
@@ -15727,7 +15332,7 @@
         </p:nvSpPr>
         <p:spPr>
           <a:xfrm>
-            <a:off x="390364" y="260648"/>
+            <a:off x="390364" y="114351"/>
             <a:ext cx="8363272" cy="1143000"/>
           </a:xfrm>
         </p:spPr>
@@ -15794,11 +15399,11 @@
             </a:pPr>
             <a:r>
               <a:rPr lang="es-MX" sz="2000" b="1" dirty="0"/>
-              <a:t>Ejemplo: </a:t>
+              <a:t>Ejemplo:</a:t>
             </a:r>
             <a:r>
               <a:rPr lang="es-MX" sz="2000" dirty="0"/>
-              <a:t>Identificar los números telefónicos que comiencen con 1 o 2 después de la lada 442.</a:t>
+              <a:t> Identificar los números telefónicos que comiencen con 1 o 3 después de la lada 442.</a:t>
             </a:r>
           </a:p>
         </p:txBody>
@@ -15849,17 +15454,17 @@
                 <a:effectLst/>
                 <a:latin typeface="inherit"/>
               </a:rPr>
-              <a:t>() Grupos  </a:t>
+              <a:t>[] Encuentra caracteres en corchetes</a:t>
             </a:r>
           </a:p>
         </p:txBody>
       </p:sp>
       <p:pic>
         <p:nvPicPr>
-          <p:cNvPr id="7" name="Imagen 6">
+          <p:cNvPr id="3" name="Imagen 2">
             <a:extLst>
               <a:ext uri="{FF2B5EF4-FFF2-40B4-BE49-F238E27FC236}">
-                <a16:creationId xmlns:a16="http://schemas.microsoft.com/office/drawing/2014/main" id="{BF36162E-AB01-4082-9DCC-64CA926DEA3F}"/>
+                <a16:creationId xmlns:a16="http://schemas.microsoft.com/office/drawing/2014/main" id="{562FCA3F-B241-48B1-887C-80AB7500A0F6}"/>
               </a:ext>
             </a:extLst>
           </p:cNvPr>
@@ -15876,8 +15481,8 @@
         </p:blipFill>
         <p:spPr>
           <a:xfrm>
-            <a:off x="1143000" y="2861227"/>
-            <a:ext cx="6858000" cy="2990850"/>
+            <a:off x="1143000" y="2996952"/>
+            <a:ext cx="6858000" cy="3048000"/>
           </a:xfrm>
           <a:prstGeom prst="rect">
             <a:avLst/>
@@ -15887,7 +15492,7 @@
     </p:spTree>
     <p:extLst>
       <p:ext uri="{BB962C8B-B14F-4D97-AF65-F5344CB8AC3E}">
-        <p14:creationId xmlns:p14="http://schemas.microsoft.com/office/powerpoint/2010/main" val="2219602021"/>
+        <p14:creationId xmlns:p14="http://schemas.microsoft.com/office/powerpoint/2010/main" val="1483557897"/>
       </p:ext>
     </p:extLst>
   </p:cSld>
@@ -15926,7 +15531,7 @@
         </p:nvSpPr>
         <p:spPr>
           <a:xfrm>
-            <a:off x="390364" y="114351"/>
+            <a:off x="390364" y="260648"/>
             <a:ext cx="8363272" cy="1143000"/>
           </a:xfrm>
         </p:spPr>
@@ -15972,8 +15577,8 @@
         </p:nvSpPr>
         <p:spPr>
           <a:xfrm>
-            <a:off x="713980" y="1648459"/>
-            <a:ext cx="7890467" cy="967957"/>
+            <a:off x="971600" y="1775513"/>
+            <a:ext cx="7890467" cy="506292"/>
           </a:xfrm>
           <a:prstGeom prst="rect">
             <a:avLst/>
@@ -15997,7 +15602,7 @@
             </a:r>
             <a:r>
               <a:rPr lang="es-MX" sz="2000" dirty="0"/>
-              <a:t> Identificar los números telefónicos que comiencen con 1 o 3 después de la lada 442.</a:t>
+              <a:t> Identificar las letras y dígitos.</a:t>
             </a:r>
           </a:p>
         </p:txBody>
@@ -16055,10 +15660,10 @@
       </p:sp>
       <p:pic>
         <p:nvPicPr>
-          <p:cNvPr id="3" name="Imagen 2">
+          <p:cNvPr id="6" name="Imagen 5">
             <a:extLst>
               <a:ext uri="{FF2B5EF4-FFF2-40B4-BE49-F238E27FC236}">
-                <a16:creationId xmlns:a16="http://schemas.microsoft.com/office/drawing/2014/main" id="{562FCA3F-B241-48B1-887C-80AB7500A0F6}"/>
+                <a16:creationId xmlns:a16="http://schemas.microsoft.com/office/drawing/2014/main" id="{153C4AD9-FDC2-4B87-A643-2E5D785B084E}"/>
               </a:ext>
             </a:extLst>
           </p:cNvPr>
@@ -16075,8 +15680,8 @@
         </p:blipFill>
         <p:spPr>
           <a:xfrm>
-            <a:off x="1143000" y="2996952"/>
-            <a:ext cx="6858000" cy="3048000"/>
+            <a:off x="1063153" y="2612553"/>
+            <a:ext cx="6877050" cy="3095625"/>
           </a:xfrm>
           <a:prstGeom prst="rect">
             <a:avLst/>
@@ -16086,7 +15691,7 @@
     </p:spTree>
     <p:extLst>
       <p:ext uri="{BB962C8B-B14F-4D97-AF65-F5344CB8AC3E}">
-        <p14:creationId xmlns:p14="http://schemas.microsoft.com/office/powerpoint/2010/main" val="1483557897"/>
+        <p14:creationId xmlns:p14="http://schemas.microsoft.com/office/powerpoint/2010/main" val="4097825035"/>
       </p:ext>
     </p:extLst>
   </p:cSld>
@@ -16192,11 +15797,11 @@
             </a:pPr>
             <a:r>
               <a:rPr lang="es-MX" sz="2000" b="1" dirty="0"/>
-              <a:t>Ejemplo:</a:t>
+              <a:t>Ejemplo: </a:t>
             </a:r>
             <a:r>
               <a:rPr lang="es-MX" sz="2000" dirty="0"/>
-              <a:t> Identificar las letras y dígitos.</a:t>
+              <a:t>Identificar todos los caracteres que no son letras minúsculas.</a:t>
             </a:r>
           </a:p>
         </p:txBody>
@@ -16247,17 +15852,17 @@
                 <a:effectLst/>
                 <a:latin typeface="inherit"/>
               </a:rPr>
-              <a:t>[] Encuentra caracteres en corchetes</a:t>
+              <a:t>[^] Encuentra caracteres no están dentro de corchetes</a:t>
             </a:r>
           </a:p>
         </p:txBody>
       </p:sp>
       <p:pic>
         <p:nvPicPr>
-          <p:cNvPr id="6" name="Imagen 5">
+          <p:cNvPr id="3" name="Imagen 2">
             <a:extLst>
               <a:ext uri="{FF2B5EF4-FFF2-40B4-BE49-F238E27FC236}">
-                <a16:creationId xmlns:a16="http://schemas.microsoft.com/office/drawing/2014/main" id="{153C4AD9-FDC2-4B87-A643-2E5D785B084E}"/>
+                <a16:creationId xmlns:a16="http://schemas.microsoft.com/office/drawing/2014/main" id="{5FCCE2F5-84A8-4D1F-BC8C-225CA58F9C21}"/>
               </a:ext>
             </a:extLst>
           </p:cNvPr>
@@ -16274,8 +15879,8 @@
         </p:blipFill>
         <p:spPr>
           <a:xfrm>
-            <a:off x="1063153" y="2612553"/>
-            <a:ext cx="6877050" cy="3095625"/>
+            <a:off x="1331640" y="2653670"/>
+            <a:ext cx="6915150" cy="2971800"/>
           </a:xfrm>
           <a:prstGeom prst="rect">
             <a:avLst/>
@@ -16285,7 +15890,7 @@
     </p:spTree>
     <p:extLst>
       <p:ext uri="{BB962C8B-B14F-4D97-AF65-F5344CB8AC3E}">
-        <p14:creationId xmlns:p14="http://schemas.microsoft.com/office/powerpoint/2010/main" val="4097825035"/>
+        <p14:creationId xmlns:p14="http://schemas.microsoft.com/office/powerpoint/2010/main" val="3835573933"/>
       </p:ext>
     </p:extLst>
   </p:cSld>
@@ -16370,7 +15975,7 @@
         </p:nvSpPr>
         <p:spPr>
           <a:xfrm>
-            <a:off x="971600" y="1775513"/>
+            <a:off x="1296806" y="1837862"/>
             <a:ext cx="7890467" cy="506292"/>
           </a:xfrm>
           <a:prstGeom prst="rect">
@@ -16395,7 +16000,7 @@
             </a:r>
             <a:r>
               <a:rPr lang="es-MX" sz="2000" dirty="0"/>
-              <a:t>Identificar todos los caracteres que no son letras minúsculas.</a:t>
+              <a:t>Identificar todos los caracteres que no son dígitos.</a:t>
             </a:r>
           </a:p>
         </p:txBody>
@@ -16446,17 +16051,17 @@
                 <a:effectLst/>
                 <a:latin typeface="inherit"/>
               </a:rPr>
-              <a:t>[^] Encuentra caracteres no están dentro de corchetes</a:t>
+              <a:t>[^] Encuentra caracteres que no están dentro de corchetes</a:t>
             </a:r>
           </a:p>
         </p:txBody>
       </p:sp>
       <p:pic>
         <p:nvPicPr>
-          <p:cNvPr id="3" name="Imagen 2">
+          <p:cNvPr id="6" name="Imagen 5">
             <a:extLst>
               <a:ext uri="{FF2B5EF4-FFF2-40B4-BE49-F238E27FC236}">
-                <a16:creationId xmlns:a16="http://schemas.microsoft.com/office/drawing/2014/main" id="{5FCCE2F5-84A8-4D1F-BC8C-225CA58F9C21}"/>
+                <a16:creationId xmlns:a16="http://schemas.microsoft.com/office/drawing/2014/main" id="{6A06D8D1-0041-4A5B-AB89-20F25531A6A4}"/>
               </a:ext>
             </a:extLst>
           </p:cNvPr>
@@ -16473,8 +16078,8 @@
         </p:blipFill>
         <p:spPr>
           <a:xfrm>
-            <a:off x="1331640" y="2653670"/>
-            <a:ext cx="6915150" cy="2971800"/>
+            <a:off x="1403648" y="2653669"/>
+            <a:ext cx="6791325" cy="2981325"/>
           </a:xfrm>
           <a:prstGeom prst="rect">
             <a:avLst/>
@@ -16484,7 +16089,7 @@
     </p:spTree>
     <p:extLst>
       <p:ext uri="{BB962C8B-B14F-4D97-AF65-F5344CB8AC3E}">
-        <p14:creationId xmlns:p14="http://schemas.microsoft.com/office/powerpoint/2010/main" val="3835573933"/>
+        <p14:creationId xmlns:p14="http://schemas.microsoft.com/office/powerpoint/2010/main" val="3374492358"/>
       </p:ext>
     </p:extLst>
   </p:cSld>
@@ -16739,7 +16344,7 @@
         </p:nvSpPr>
         <p:spPr>
           <a:xfrm>
-            <a:off x="390364" y="260648"/>
+            <a:off x="390364" y="116632"/>
             <a:ext cx="8363272" cy="1143000"/>
           </a:xfrm>
         </p:spPr>
@@ -16773,10 +16378,10 @@
       </p:sp>
       <p:sp>
         <p:nvSpPr>
-          <p:cNvPr id="5" name="CuadroTexto 4">
+          <p:cNvPr id="7" name="CuadroTexto 6">
             <a:extLst>
               <a:ext uri="{FF2B5EF4-FFF2-40B4-BE49-F238E27FC236}">
-                <a16:creationId xmlns:a16="http://schemas.microsoft.com/office/drawing/2014/main" id="{F5D927B0-3579-4E54-99D7-681F443BC962}"/>
+                <a16:creationId xmlns:a16="http://schemas.microsoft.com/office/drawing/2014/main" id="{4E1DD8D9-5B93-44E0-8677-C81B21CCD7A2}"/>
               </a:ext>
             </a:extLst>
           </p:cNvPr>
@@ -16785,8 +16390,8 @@
         </p:nvSpPr>
         <p:spPr>
           <a:xfrm>
-            <a:off x="1296806" y="1837862"/>
-            <a:ext cx="7890467" cy="506292"/>
+            <a:off x="646172" y="1340768"/>
+            <a:ext cx="7851655" cy="2814617"/>
           </a:xfrm>
           <a:prstGeom prst="rect">
             <a:avLst/>
@@ -16798,6 +16403,43 @@
             <a:spAutoFit/>
           </a:bodyPr>
           <a:lstStyle/>
+          <a:p>
+            <a:pPr marL="342900" indent="-342900">
+              <a:lnSpc>
+                <a:spcPct val="150000"/>
+              </a:lnSpc>
+              <a:buFont typeface="Arial" panose="020B0604020202020204" pitchFamily="34" charset="0"/>
+              <a:buChar char="•"/>
+            </a:pPr>
+            <a:r>
+              <a:rPr lang="es-MX" sz="2000" b="1" dirty="0"/>
+              <a:t>[0-5]+	</a:t>
+            </a:r>
+            <a:r>
+              <a:rPr lang="es-MX" sz="2000" dirty="0"/>
+              <a:t>En los grupos </a:t>
+            </a:r>
+            <a:r>
+              <a:rPr lang="es-MX" sz="2000" b="1" dirty="0"/>
+              <a:t>no </a:t>
+            </a:r>
+            <a:r>
+              <a:rPr lang="es-MX" sz="2000" dirty="0"/>
+              <a:t>es necesario el uso del </a:t>
+            </a:r>
+            <a:r>
+              <a:rPr lang="es-MX" sz="2000" b="1" dirty="0" err="1"/>
+              <a:t>slash</a:t>
+            </a:r>
+            <a:r>
+              <a:rPr lang="es-MX" sz="2000" b="1" dirty="0"/>
+              <a:t> \  </a:t>
+            </a:r>
+            <a:r>
+              <a:rPr lang="es-MX" sz="2000" dirty="0"/>
+              <a:t>para los</a:t>
+            </a:r>
+          </a:p>
           <a:p>
             <a:pPr>
               <a:lnSpc>
@@ -16805,73 +16447,72 @@
               </a:lnSpc>
             </a:pPr>
             <a:r>
+              <a:rPr lang="es-MX" sz="2000" dirty="0"/>
+              <a:t>		</a:t>
+            </a:r>
+            <a:r>
+              <a:rPr lang="es-MX" sz="2000" dirty="0" err="1"/>
+              <a:t>metacaracteres</a:t>
+            </a:r>
+            <a:r>
+              <a:rPr lang="es-MX" sz="2000" dirty="0"/>
+              <a:t> como el punto.</a:t>
+            </a:r>
+            <a:endParaRPr lang="es-MX" sz="2000" b="1" dirty="0"/>
+          </a:p>
+          <a:p>
+            <a:pPr marL="342900" indent="-342900">
+              <a:lnSpc>
+                <a:spcPct val="150000"/>
+              </a:lnSpc>
+              <a:buFont typeface="Arial" panose="020B0604020202020204" pitchFamily="34" charset="0"/>
+              <a:buChar char="•"/>
+            </a:pPr>
+            <a:r>
               <a:rPr lang="es-MX" sz="2000" b="1" dirty="0"/>
-              <a:t>Ejemplo: </a:t>
+              <a:t>[a-</a:t>
+            </a:r>
+            <a:r>
+              <a:rPr lang="es-MX" sz="2000" b="1" dirty="0" err="1"/>
+              <a:t>zA</a:t>
+            </a:r>
+            <a:r>
+              <a:rPr lang="es-MX" sz="2000" b="1" dirty="0"/>
+              <a:t>-Z.@]</a:t>
             </a:r>
             <a:r>
               <a:rPr lang="es-MX" sz="2000" dirty="0"/>
-              <a:t>Identificar todos los caracteres que no son dígitos.</a:t>
-            </a:r>
-          </a:p>
-        </p:txBody>
-      </p:sp>
-      <p:sp>
-        <p:nvSpPr>
-          <p:cNvPr id="4" name="CuadroTexto 3">
+              <a:t>	Encuentra caracteres del abecedario en mayúsculas o 		minúsculas, puntos, arrobas.</a:t>
+            </a:r>
+          </a:p>
+          <a:p>
+            <a:pPr marL="342900" indent="-342900">
+              <a:lnSpc>
+                <a:spcPct val="150000"/>
+              </a:lnSpc>
+              <a:buFont typeface="Arial" panose="020B0604020202020204" pitchFamily="34" charset="0"/>
+              <a:buChar char="•"/>
+            </a:pPr>
+            <a:endParaRPr lang="es-MX" sz="2000" b="1" dirty="0"/>
+          </a:p>
+          <a:p>
+            <a:pPr marL="342900" indent="-342900">
+              <a:lnSpc>
+                <a:spcPct val="150000"/>
+              </a:lnSpc>
+              <a:buFont typeface="Arial" panose="020B0604020202020204" pitchFamily="34" charset="0"/>
+              <a:buChar char="•"/>
+            </a:pPr>
+            <a:endParaRPr lang="es-MX" sz="2000" dirty="0"/>
+          </a:p>
+        </p:txBody>
+      </p:sp>
+      <p:pic>
+        <p:nvPicPr>
+          <p:cNvPr id="8" name="Imagen 7">
             <a:extLst>
               <a:ext uri="{FF2B5EF4-FFF2-40B4-BE49-F238E27FC236}">
-                <a16:creationId xmlns:a16="http://schemas.microsoft.com/office/drawing/2014/main" id="{B8F537AB-6E7D-42EE-B6D8-7CF10886F935}"/>
-              </a:ext>
-            </a:extLst>
-          </p:cNvPr>
-          <p:cNvSpPr txBox="1"/>
-          <p:nvPr/>
-        </p:nvSpPr>
-        <p:spPr>
-          <a:xfrm>
-            <a:off x="1063153" y="1134649"/>
-            <a:ext cx="7017694" cy="393698"/>
-          </a:xfrm>
-          <a:prstGeom prst="rect">
-            <a:avLst/>
-          </a:prstGeom>
-          <a:noFill/>
-        </p:spPr>
-        <p:txBody>
-          <a:bodyPr wrap="square">
-            <a:spAutoFit/>
-          </a:bodyPr>
-          <a:lstStyle/>
-          <a:p>
-            <a:pPr algn="ctr" fontAlgn="base">
-              <a:lnSpc>
-                <a:spcPts val="2500"/>
-              </a:lnSpc>
-              <a:spcAft>
-                <a:spcPts val="600"/>
-              </a:spcAft>
-            </a:pPr>
-            <a:r>
-              <a:rPr lang="es-ES" b="1" i="0" dirty="0">
-                <a:solidFill>
-                  <a:schemeClr val="accent6">
-                    <a:lumMod val="75000"/>
-                  </a:schemeClr>
-                </a:solidFill>
-                <a:effectLst/>
-                <a:latin typeface="inherit"/>
-              </a:rPr>
-              <a:t>[^] Encuentra caracteres que no están dentro de corchetes</a:t>
-            </a:r>
-          </a:p>
-        </p:txBody>
-      </p:sp>
-      <p:pic>
-        <p:nvPicPr>
-          <p:cNvPr id="6" name="Imagen 5">
-            <a:extLst>
-              <a:ext uri="{FF2B5EF4-FFF2-40B4-BE49-F238E27FC236}">
-                <a16:creationId xmlns:a16="http://schemas.microsoft.com/office/drawing/2014/main" id="{6A06D8D1-0041-4A5B-AB89-20F25531A6A4}"/>
+                <a16:creationId xmlns:a16="http://schemas.microsoft.com/office/drawing/2014/main" id="{3FB79202-DD0E-4565-BE9C-63EA25840081}"/>
               </a:ext>
             </a:extLst>
           </p:cNvPr>
@@ -16888,8 +16529,8 @@
         </p:blipFill>
         <p:spPr>
           <a:xfrm>
-            <a:off x="1403648" y="2653669"/>
-            <a:ext cx="6791325" cy="2981325"/>
+            <a:off x="5438936" y="3636481"/>
+            <a:ext cx="3314700" cy="2724150"/>
           </a:xfrm>
           <a:prstGeom prst="rect">
             <a:avLst/>
@@ -16899,7 +16540,7 @@
     </p:spTree>
     <p:extLst>
       <p:ext uri="{BB962C8B-B14F-4D97-AF65-F5344CB8AC3E}">
-        <p14:creationId xmlns:p14="http://schemas.microsoft.com/office/powerpoint/2010/main" val="3374492358"/>
+        <p14:creationId xmlns:p14="http://schemas.microsoft.com/office/powerpoint/2010/main" val="3183765036"/>
       </p:ext>
     </p:extLst>
   </p:cSld>
@@ -16938,7 +16579,7 @@
         </p:nvSpPr>
         <p:spPr>
           <a:xfrm>
-            <a:off x="390364" y="116632"/>
+            <a:off x="390364" y="96243"/>
             <a:ext cx="8363272" cy="1143000"/>
           </a:xfrm>
         </p:spPr>
@@ -16984,8 +16625,8 @@
         </p:nvSpPr>
         <p:spPr>
           <a:xfrm>
-            <a:off x="646172" y="1340768"/>
-            <a:ext cx="7851655" cy="2814617"/>
+            <a:off x="628866" y="1124744"/>
+            <a:ext cx="7886268" cy="967957"/>
           </a:xfrm>
           <a:prstGeom prst="rect">
             <a:avLst/>
@@ -17007,31 +16648,19 @@
             </a:pPr>
             <a:r>
               <a:rPr lang="es-MX" sz="2000" b="1" dirty="0"/>
-              <a:t>[0-5]+	</a:t>
+              <a:t>[^a-</a:t>
+            </a:r>
+            <a:r>
+              <a:rPr lang="es-MX" sz="2000" b="1" dirty="0" err="1"/>
+              <a:t>zA</a:t>
+            </a:r>
+            <a:r>
+              <a:rPr lang="es-MX" sz="2000" b="1" dirty="0"/>
+              <a:t>-Z.@]</a:t>
             </a:r>
             <a:r>
               <a:rPr lang="es-MX" sz="2000" dirty="0"/>
-              <a:t>En los grupos </a:t>
-            </a:r>
-            <a:r>
-              <a:rPr lang="es-MX" sz="2000" b="1" dirty="0"/>
-              <a:t>no </a:t>
-            </a:r>
-            <a:r>
-              <a:rPr lang="es-MX" sz="2000" dirty="0"/>
-              <a:t>es necesario el uso del </a:t>
-            </a:r>
-            <a:r>
-              <a:rPr lang="es-MX" sz="2000" b="1" dirty="0" err="1"/>
-              <a:t>slash</a:t>
-            </a:r>
-            <a:r>
-              <a:rPr lang="es-MX" sz="2000" b="1" dirty="0"/>
-              <a:t> \  </a:t>
-            </a:r>
-            <a:r>
-              <a:rPr lang="es-MX" sz="2000" dirty="0"/>
-              <a:t>para los</a:t>
+              <a:t>	No caracteres del abecedario en mayúsculas o</a:t>
             </a:r>
           </a:p>
           <a:p>
@@ -17042,71 +16671,17 @@
             </a:pPr>
             <a:r>
               <a:rPr lang="es-MX" sz="2000" dirty="0"/>
-              <a:t>		</a:t>
-            </a:r>
-            <a:r>
-              <a:rPr lang="es-MX" sz="2000" dirty="0" err="1"/>
-              <a:t>metacaracteres</a:t>
-            </a:r>
-            <a:r>
-              <a:rPr lang="es-MX" sz="2000" dirty="0"/>
-              <a:t> como el punto.</a:t>
-            </a:r>
-            <a:endParaRPr lang="es-MX" sz="2000" b="1" dirty="0"/>
-          </a:p>
-          <a:p>
-            <a:pPr marL="342900" indent="-342900">
-              <a:lnSpc>
-                <a:spcPct val="150000"/>
-              </a:lnSpc>
-              <a:buFont typeface="Arial" panose="020B0604020202020204" pitchFamily="34" charset="0"/>
-              <a:buChar char="•"/>
-            </a:pPr>
-            <a:r>
-              <a:rPr lang="es-MX" sz="2000" b="1" dirty="0"/>
-              <a:t>[a-</a:t>
-            </a:r>
-            <a:r>
-              <a:rPr lang="es-MX" sz="2000" b="1" dirty="0" err="1"/>
-              <a:t>zA</a:t>
-            </a:r>
-            <a:r>
-              <a:rPr lang="es-MX" sz="2000" b="1" dirty="0"/>
-              <a:t>-Z.@]</a:t>
-            </a:r>
-            <a:r>
-              <a:rPr lang="es-MX" sz="2000" dirty="0"/>
-              <a:t>	Encuentra caracteres del abecedario en mayúsculas o 		minúsculas, puntos, arrobas.</a:t>
-            </a:r>
-          </a:p>
-          <a:p>
-            <a:pPr marL="342900" indent="-342900">
-              <a:lnSpc>
-                <a:spcPct val="150000"/>
-              </a:lnSpc>
-              <a:buFont typeface="Arial" panose="020B0604020202020204" pitchFamily="34" charset="0"/>
-              <a:buChar char="•"/>
-            </a:pPr>
-            <a:endParaRPr lang="es-MX" sz="2000" b="1" dirty="0"/>
-          </a:p>
-          <a:p>
-            <a:pPr marL="342900" indent="-342900">
-              <a:lnSpc>
-                <a:spcPct val="150000"/>
-              </a:lnSpc>
-              <a:buFont typeface="Arial" panose="020B0604020202020204" pitchFamily="34" charset="0"/>
-              <a:buChar char="•"/>
-            </a:pPr>
-            <a:endParaRPr lang="es-MX" sz="2000" dirty="0"/>
+              <a:t> 		minúsculas, puntos, arrobas.</a:t>
+            </a:r>
           </a:p>
         </p:txBody>
       </p:sp>
       <p:pic>
         <p:nvPicPr>
-          <p:cNvPr id="8" name="Imagen 7">
+          <p:cNvPr id="10" name="Imagen 9">
             <a:extLst>
               <a:ext uri="{FF2B5EF4-FFF2-40B4-BE49-F238E27FC236}">
-                <a16:creationId xmlns:a16="http://schemas.microsoft.com/office/drawing/2014/main" id="{3FB79202-DD0E-4565-BE9C-63EA25840081}"/>
+                <a16:creationId xmlns:a16="http://schemas.microsoft.com/office/drawing/2014/main" id="{9CC91A83-4D82-4653-B180-EA64A134D8A5}"/>
               </a:ext>
             </a:extLst>
           </p:cNvPr>
@@ -17123,8 +16698,8 @@
         </p:blipFill>
         <p:spPr>
           <a:xfrm>
-            <a:off x="5438936" y="3636481"/>
-            <a:ext cx="3314700" cy="2724150"/>
+            <a:off x="2627784" y="2250667"/>
+            <a:ext cx="4257675" cy="4238625"/>
           </a:xfrm>
           <a:prstGeom prst="rect">
             <a:avLst/>
@@ -17134,7 +16709,7 @@
     </p:spTree>
     <p:extLst>
       <p:ext uri="{BB962C8B-B14F-4D97-AF65-F5344CB8AC3E}">
-        <p14:creationId xmlns:p14="http://schemas.microsoft.com/office/powerpoint/2010/main" val="3183765036"/>
+        <p14:creationId xmlns:p14="http://schemas.microsoft.com/office/powerpoint/2010/main" val="1447613152"/>
       </p:ext>
     </p:extLst>
   </p:cSld>
@@ -17173,7 +16748,7 @@
         </p:nvSpPr>
         <p:spPr>
           <a:xfrm>
-            <a:off x="390364" y="96243"/>
+            <a:off x="289721" y="4056"/>
             <a:ext cx="8363272" cy="1143000"/>
           </a:xfrm>
         </p:spPr>
@@ -17207,10 +16782,10 @@
       </p:sp>
       <p:sp>
         <p:nvSpPr>
-          <p:cNvPr id="7" name="CuadroTexto 6">
+          <p:cNvPr id="5" name="CuadroTexto 4">
             <a:extLst>
               <a:ext uri="{FF2B5EF4-FFF2-40B4-BE49-F238E27FC236}">
-                <a16:creationId xmlns:a16="http://schemas.microsoft.com/office/drawing/2014/main" id="{4E1DD8D9-5B93-44E0-8677-C81B21CCD7A2}"/>
+                <a16:creationId xmlns:a16="http://schemas.microsoft.com/office/drawing/2014/main" id="{FC189524-E564-48DD-B173-E7D162EDC50C}"/>
               </a:ext>
             </a:extLst>
           </p:cNvPr>
@@ -17219,8 +16794,8 @@
         </p:nvSpPr>
         <p:spPr>
           <a:xfrm>
-            <a:off x="628866" y="1124744"/>
-            <a:ext cx="7886268" cy="967957"/>
+            <a:off x="539552" y="1346051"/>
+            <a:ext cx="8251757" cy="506292"/>
           </a:xfrm>
           <a:prstGeom prst="rect">
             <a:avLst/>
@@ -17233,49 +16808,191 @@
           </a:bodyPr>
           <a:lstStyle/>
           <a:p>
-            <a:pPr marL="342900" indent="-342900">
-              <a:lnSpc>
-                <a:spcPct val="150000"/>
-              </a:lnSpc>
-              <a:buFont typeface="Arial" panose="020B0604020202020204" pitchFamily="34" charset="0"/>
-              <a:buChar char="•"/>
-            </a:pPr>
-            <a:r>
-              <a:rPr lang="es-MX" sz="2000" b="1" dirty="0"/>
-              <a:t>[^a-</a:t>
-            </a:r>
-            <a:r>
-              <a:rPr lang="es-MX" sz="2000" b="1" dirty="0" err="1"/>
-              <a:t>zA</a:t>
-            </a:r>
-            <a:r>
-              <a:rPr lang="es-MX" sz="2000" b="1" dirty="0"/>
-              <a:t>-Z.@]</a:t>
-            </a:r>
-            <a:r>
-              <a:rPr lang="es-MX" sz="2000" dirty="0"/>
-              <a:t>	No caracteres del abecedario en mayúsculas o</a:t>
-            </a:r>
-          </a:p>
-          <a:p>
-            <a:pPr>
+            <a:pPr algn="just">
               <a:lnSpc>
                 <a:spcPct val="150000"/>
               </a:lnSpc>
             </a:pPr>
             <a:r>
+              <a:rPr lang="es-ES" sz="2000" b="1" i="0" dirty="0">
+                <a:solidFill>
+                  <a:schemeClr val="tx1">
+                    <a:lumMod val="95000"/>
+                    <a:lumOff val="5000"/>
+                  </a:schemeClr>
+                </a:solidFill>
+                <a:effectLst/>
+              </a:rPr>
+              <a:t>Ejemplo 1: </a:t>
+            </a:r>
+            <a:r>
+              <a:rPr lang="es-ES" sz="2000" i="0" dirty="0">
+                <a:solidFill>
+                  <a:schemeClr val="tx1">
+                    <a:lumMod val="95000"/>
+                    <a:lumOff val="5000"/>
+                  </a:schemeClr>
+                </a:solidFill>
+                <a:effectLst/>
+              </a:rPr>
+              <a:t>Extraer todos los números telefónicos con espacio, punto o guion.</a:t>
+            </a:r>
+            <a:endParaRPr lang="es-ES" sz="2000" b="1" dirty="0">
+              <a:solidFill>
+                <a:schemeClr val="tx1">
+                  <a:lumMod val="95000"/>
+                  <a:lumOff val="5000"/>
+                </a:schemeClr>
+              </a:solidFill>
+            </a:endParaRPr>
+          </a:p>
+        </p:txBody>
+      </p:sp>
+      <p:sp>
+        <p:nvSpPr>
+          <p:cNvPr id="6" name="CuadroTexto 5">
+            <a:extLst>
+              <a:ext uri="{FF2B5EF4-FFF2-40B4-BE49-F238E27FC236}">
+                <a16:creationId xmlns:a16="http://schemas.microsoft.com/office/drawing/2014/main" id="{7B04CF3A-CFE2-489B-A399-BF52B6C4C715}"/>
+              </a:ext>
+            </a:extLst>
+          </p:cNvPr>
+          <p:cNvSpPr txBox="1"/>
+          <p:nvPr/>
+        </p:nvSpPr>
+        <p:spPr>
+          <a:xfrm>
+            <a:off x="549968" y="1852343"/>
+            <a:ext cx="7920880" cy="967957"/>
+          </a:xfrm>
+          <a:prstGeom prst="rect">
+            <a:avLst/>
+          </a:prstGeom>
+          <a:noFill/>
+        </p:spPr>
+        <p:txBody>
+          <a:bodyPr wrap="square">
+            <a:spAutoFit/>
+          </a:bodyPr>
+          <a:lstStyle/>
+          <a:p>
+            <a:pPr algn="just">
+              <a:lnSpc>
+                <a:spcPct val="150000"/>
+              </a:lnSpc>
+            </a:pPr>
+            <a:r>
+              <a:rPr lang="es-ES" sz="2000" i="0" dirty="0">
+                <a:solidFill>
+                  <a:schemeClr val="tx1">
+                    <a:lumMod val="95000"/>
+                    <a:lumOff val="5000"/>
+                  </a:schemeClr>
+                </a:solidFill>
+                <a:effectLst/>
+              </a:rPr>
+              <a:t>Primero tres dígitos juntos, luego espacio, punto o guion, otros tres dígitos, espacio, punt</a:t>
+            </a:r>
+            <a:r>
+              <a:rPr lang="es-ES" sz="2000" dirty="0">
+                <a:solidFill>
+                  <a:schemeClr val="tx1">
+                    <a:lumMod val="95000"/>
+                    <a:lumOff val="5000"/>
+                  </a:schemeClr>
+                </a:solidFill>
+              </a:rPr>
+              <a:t>o o </a:t>
+            </a:r>
+            <a:r>
+              <a:rPr lang="es-ES" sz="2000" i="0" dirty="0">
+                <a:solidFill>
+                  <a:schemeClr val="tx1">
+                    <a:lumMod val="95000"/>
+                    <a:lumOff val="5000"/>
+                  </a:schemeClr>
+                </a:solidFill>
+                <a:effectLst/>
+              </a:rPr>
+              <a:t>guion, luego dos y dos. </a:t>
+            </a:r>
+            <a:endParaRPr lang="es-ES" sz="2000" b="1" dirty="0">
+              <a:solidFill>
+                <a:schemeClr val="tx1">
+                  <a:lumMod val="95000"/>
+                  <a:lumOff val="5000"/>
+                </a:schemeClr>
+              </a:solidFill>
+            </a:endParaRPr>
+          </a:p>
+        </p:txBody>
+      </p:sp>
+      <p:sp>
+        <p:nvSpPr>
+          <p:cNvPr id="7" name="CuadroTexto 6">
+            <a:extLst>
+              <a:ext uri="{FF2B5EF4-FFF2-40B4-BE49-F238E27FC236}">
+                <a16:creationId xmlns:a16="http://schemas.microsoft.com/office/drawing/2014/main" id="{D442F124-35ED-4AE6-AEB6-DC1CB4FBEC4A}"/>
+              </a:ext>
+            </a:extLst>
+          </p:cNvPr>
+          <p:cNvSpPr txBox="1"/>
+          <p:nvPr/>
+        </p:nvSpPr>
+        <p:spPr>
+          <a:xfrm>
+            <a:off x="2116379" y="748792"/>
+            <a:ext cx="7027621" cy="506292"/>
+          </a:xfrm>
+          <a:prstGeom prst="rect">
+            <a:avLst/>
+          </a:prstGeom>
+          <a:noFill/>
+        </p:spPr>
+        <p:txBody>
+          <a:bodyPr wrap="square">
+            <a:spAutoFit/>
+          </a:bodyPr>
+          <a:lstStyle/>
+          <a:p>
+            <a:pPr algn="just">
+              <a:lnSpc>
+                <a:spcPct val="150000"/>
+              </a:lnSpc>
+            </a:pPr>
+            <a:r>
+              <a:rPr lang="es-MX" sz="2000" b="1" dirty="0">
+                <a:solidFill>
+                  <a:schemeClr val="accent6">
+                    <a:lumMod val="75000"/>
+                  </a:schemeClr>
+                </a:solidFill>
+              </a:rPr>
+              <a:t>()</a:t>
+            </a:r>
+            <a:r>
               <a:rPr lang="es-MX" sz="2000" dirty="0"/>
-              <a:t> 		minúsculas, puntos, arrobas.</a:t>
+              <a:t> </a:t>
+            </a:r>
+            <a:r>
+              <a:rPr lang="es-MX" sz="2000" dirty="0">
+                <a:solidFill>
+                  <a:schemeClr val="accent6">
+                    <a:lumMod val="75000"/>
+                  </a:schemeClr>
+                </a:solidFill>
+              </a:rPr>
+              <a:t>Nos permiten comparar entre algunos valores</a:t>
             </a:r>
           </a:p>
         </p:txBody>
       </p:sp>
       <p:pic>
         <p:nvPicPr>
-          <p:cNvPr id="10" name="Imagen 9">
+          <p:cNvPr id="11" name="Imagen 10">
             <a:extLst>
               <a:ext uri="{FF2B5EF4-FFF2-40B4-BE49-F238E27FC236}">
-                <a16:creationId xmlns:a16="http://schemas.microsoft.com/office/drawing/2014/main" id="{9CC91A83-4D82-4653-B180-EA64A134D8A5}"/>
+                <a16:creationId xmlns:a16="http://schemas.microsoft.com/office/drawing/2014/main" id="{40FAFC4F-C677-08E6-65FA-6C0A7E64CA35}"/>
               </a:ext>
             </a:extLst>
           </p:cNvPr>
@@ -17292,8 +17009,8 @@
         </p:blipFill>
         <p:spPr>
           <a:xfrm>
-            <a:off x="2627784" y="2250667"/>
-            <a:ext cx="4257675" cy="4238625"/>
+            <a:off x="2245742" y="2924944"/>
+            <a:ext cx="4839375" cy="3696216"/>
           </a:xfrm>
           <a:prstGeom prst="rect">
             <a:avLst/>
@@ -17303,7 +17020,7 @@
     </p:spTree>
     <p:extLst>
       <p:ext uri="{BB962C8B-B14F-4D97-AF65-F5344CB8AC3E}">
-        <p14:creationId xmlns:p14="http://schemas.microsoft.com/office/powerpoint/2010/main" val="1447613152"/>
+        <p14:creationId xmlns:p14="http://schemas.microsoft.com/office/powerpoint/2010/main" val="3850094616"/>
       </p:ext>
     </p:extLst>
   </p:cSld>
@@ -17388,8 +17105,8 @@
         </p:nvSpPr>
         <p:spPr>
           <a:xfrm>
-            <a:off x="539552" y="1346051"/>
-            <a:ext cx="8251757" cy="506292"/>
+            <a:off x="640291" y="1147056"/>
+            <a:ext cx="7920880" cy="967957"/>
           </a:xfrm>
           <a:prstGeom prst="rect">
             <a:avLst/>
@@ -17417,7 +17134,7 @@
                 </a:solidFill>
                 <a:effectLst/>
               </a:rPr>
-              <a:t>Ejemplo 1: </a:t>
+              <a:t>Ejemplo 2: </a:t>
             </a:r>
             <a:r>
               <a:rPr lang="es-ES" sz="2000" i="0" dirty="0">
@@ -17429,7 +17146,30 @@
                 </a:solidFill>
                 <a:effectLst/>
               </a:rPr>
-              <a:t>Extraer todos los números telefónicos con espacio, punto o guion.</a:t>
+              <a:t>Extraer todos los números telefónicos </a:t>
+            </a:r>
+            <a:r>
+              <a:rPr lang="es-ES" sz="2000" dirty="0">
+                <a:solidFill>
+                  <a:schemeClr val="tx1">
+                    <a:lumMod val="95000"/>
+                    <a:lumOff val="5000"/>
+                  </a:schemeClr>
+                </a:solidFill>
+              </a:rPr>
+              <a:t>haciendo uso de </a:t>
+            </a:r>
+            <a:r>
+              <a:rPr lang="es-ES" sz="2000" i="0" dirty="0">
+                <a:solidFill>
+                  <a:schemeClr val="tx1">
+                    <a:lumMod val="95000"/>
+                    <a:lumOff val="5000"/>
+                  </a:schemeClr>
+                </a:solidFill>
+                <a:effectLst/>
+              </a:rPr>
+              <a:t>grupos y cuantificadores. </a:t>
             </a:r>
             <a:endParaRPr lang="es-ES" sz="2000" b="1" dirty="0">
               <a:solidFill>
@@ -17456,8 +17196,8 @@
         </p:nvSpPr>
         <p:spPr>
           <a:xfrm>
-            <a:off x="549968" y="1852343"/>
-            <a:ext cx="7920880" cy="967957"/>
+            <a:off x="640291" y="2611441"/>
+            <a:ext cx="2995174" cy="3276282"/>
           </a:xfrm>
           <a:prstGeom prst="rect">
             <a:avLst/>
@@ -17470,10 +17210,12 @@
           </a:bodyPr>
           <a:lstStyle/>
           <a:p>
-            <a:pPr algn="just">
+            <a:pPr marL="342900" indent="-342900" algn="just">
               <a:lnSpc>
                 <a:spcPct val="150000"/>
               </a:lnSpc>
+              <a:buFont typeface="Arial" panose="020B0604020202020204" pitchFamily="34" charset="0"/>
+              <a:buChar char="•"/>
             </a:pPr>
             <a:r>
               <a:rPr lang="es-ES" sz="2000" i="0" dirty="0">
@@ -17485,8 +17227,17 @@
                 </a:solidFill>
                 <a:effectLst/>
               </a:rPr>
-              <a:t>Primero tres dígitos juntos, luego espacio, punto o guion, otros tres dígitos, espacio, punt</a:t>
-            </a:r>
+              <a:t>Tres dígitos</a:t>
+            </a:r>
+          </a:p>
+          <a:p>
+            <a:pPr marL="342900" indent="-342900" algn="just">
+              <a:lnSpc>
+                <a:spcPct val="150000"/>
+              </a:lnSpc>
+              <a:buFont typeface="Arial" panose="020B0604020202020204" pitchFamily="34" charset="0"/>
+              <a:buChar char="•"/>
+            </a:pPr>
             <a:r>
               <a:rPr lang="es-ES" sz="2000" dirty="0">
                 <a:solidFill>
@@ -17496,7 +17247,7 @@
                   </a:schemeClr>
                 </a:solidFill>
               </a:rPr>
-              <a:t>o o </a:t>
+              <a:t>E</a:t>
             </a:r>
             <a:r>
               <a:rPr lang="es-ES" sz="2000" i="0" dirty="0">
@@ -17508,7 +17259,143 @@
                 </a:solidFill>
                 <a:effectLst/>
               </a:rPr>
-              <a:t>guion, luego dos y dos. </a:t>
+              <a:t>spacio, punto o guion</a:t>
+            </a:r>
+          </a:p>
+          <a:p>
+            <a:pPr marL="342900" indent="-342900" algn="just">
+              <a:lnSpc>
+                <a:spcPct val="150000"/>
+              </a:lnSpc>
+              <a:buFont typeface="Arial" panose="020B0604020202020204" pitchFamily="34" charset="0"/>
+              <a:buChar char="•"/>
+            </a:pPr>
+            <a:r>
+              <a:rPr lang="es-ES" sz="2000" dirty="0">
+                <a:solidFill>
+                  <a:schemeClr val="tx1">
+                    <a:lumMod val="95000"/>
+                    <a:lumOff val="5000"/>
+                  </a:schemeClr>
+                </a:solidFill>
+              </a:rPr>
+              <a:t>Tres</a:t>
+            </a:r>
+            <a:r>
+              <a:rPr lang="es-ES" sz="2000" i="0" dirty="0">
+                <a:solidFill>
+                  <a:schemeClr val="tx1">
+                    <a:lumMod val="95000"/>
+                    <a:lumOff val="5000"/>
+                  </a:schemeClr>
+                </a:solidFill>
+                <a:effectLst/>
+              </a:rPr>
+              <a:t> dígitos</a:t>
+            </a:r>
+          </a:p>
+          <a:p>
+            <a:pPr marL="342900" indent="-342900" algn="just">
+              <a:lnSpc>
+                <a:spcPct val="150000"/>
+              </a:lnSpc>
+              <a:buFont typeface="Arial" panose="020B0604020202020204" pitchFamily="34" charset="0"/>
+              <a:buChar char="•"/>
+            </a:pPr>
+            <a:r>
+              <a:rPr lang="es-ES" sz="2000" dirty="0">
+                <a:solidFill>
+                  <a:schemeClr val="tx1">
+                    <a:lumMod val="95000"/>
+                    <a:lumOff val="5000"/>
+                  </a:schemeClr>
+                </a:solidFill>
+              </a:rPr>
+              <a:t>Espacio, punto o guion</a:t>
+            </a:r>
+          </a:p>
+          <a:p>
+            <a:pPr marL="342900" indent="-342900" algn="just">
+              <a:lnSpc>
+                <a:spcPct val="150000"/>
+              </a:lnSpc>
+              <a:buFont typeface="Arial" panose="020B0604020202020204" pitchFamily="34" charset="0"/>
+              <a:buChar char="•"/>
+            </a:pPr>
+            <a:r>
+              <a:rPr lang="es-ES" sz="2000" dirty="0">
+                <a:solidFill>
+                  <a:schemeClr val="tx1">
+                    <a:lumMod val="95000"/>
+                    <a:lumOff val="5000"/>
+                  </a:schemeClr>
+                </a:solidFill>
+              </a:rPr>
+              <a:t>D</a:t>
+            </a:r>
+            <a:r>
+              <a:rPr lang="es-ES" sz="2000" i="0" dirty="0">
+                <a:solidFill>
+                  <a:schemeClr val="tx1">
+                    <a:lumMod val="95000"/>
+                    <a:lumOff val="5000"/>
+                  </a:schemeClr>
+                </a:solidFill>
+                <a:effectLst/>
+              </a:rPr>
+              <a:t>os dígitos</a:t>
+            </a:r>
+          </a:p>
+          <a:p>
+            <a:pPr marL="342900" indent="-342900" algn="just">
+              <a:lnSpc>
+                <a:spcPct val="150000"/>
+              </a:lnSpc>
+              <a:buFont typeface="Arial" panose="020B0604020202020204" pitchFamily="34" charset="0"/>
+              <a:buChar char="•"/>
+            </a:pPr>
+            <a:r>
+              <a:rPr lang="es-ES" sz="2000" dirty="0">
+                <a:solidFill>
+                  <a:schemeClr val="tx1">
+                    <a:lumMod val="95000"/>
+                    <a:lumOff val="5000"/>
+                  </a:schemeClr>
+                </a:solidFill>
+              </a:rPr>
+              <a:t>Espacio, punto o guion</a:t>
+            </a:r>
+          </a:p>
+          <a:p>
+            <a:pPr marL="342900" indent="-342900" algn="just">
+              <a:lnSpc>
+                <a:spcPct val="150000"/>
+              </a:lnSpc>
+              <a:buFont typeface="Arial" panose="020B0604020202020204" pitchFamily="34" charset="0"/>
+              <a:buChar char="•"/>
+            </a:pPr>
+            <a:r>
+              <a:rPr lang="es-ES" sz="2000" dirty="0">
+                <a:solidFill>
+                  <a:schemeClr val="tx1">
+                    <a:lumMod val="95000"/>
+                    <a:lumOff val="5000"/>
+                  </a:schemeClr>
+                </a:solidFill>
+              </a:rPr>
+              <a:t>D</a:t>
+            </a:r>
+            <a:r>
+              <a:rPr lang="es-ES" sz="2000" i="0" dirty="0">
+                <a:solidFill>
+                  <a:schemeClr val="tx1">
+                    <a:lumMod val="95000"/>
+                    <a:lumOff val="5000"/>
+                  </a:schemeClr>
+                </a:solidFill>
+                <a:effectLst/>
+              </a:rPr>
+              <a:t>os dígitos.</a:t>
             </a:r>
             <a:endParaRPr lang="es-ES" sz="2000" b="1" dirty="0">
               <a:solidFill>
@@ -17521,72 +17408,12 @@
           </a:p>
         </p:txBody>
       </p:sp>
-      <p:sp>
-        <p:nvSpPr>
-          <p:cNvPr id="7" name="CuadroTexto 6">
+      <p:pic>
+        <p:nvPicPr>
+          <p:cNvPr id="9" name="Imagen 8">
             <a:extLst>
               <a:ext uri="{FF2B5EF4-FFF2-40B4-BE49-F238E27FC236}">
-                <a16:creationId xmlns:a16="http://schemas.microsoft.com/office/drawing/2014/main" id="{D442F124-35ED-4AE6-AEB6-DC1CB4FBEC4A}"/>
-              </a:ext>
-            </a:extLst>
-          </p:cNvPr>
-          <p:cNvSpPr txBox="1"/>
-          <p:nvPr/>
-        </p:nvSpPr>
-        <p:spPr>
-          <a:xfrm>
-            <a:off x="2116379" y="748792"/>
-            <a:ext cx="7027621" cy="506292"/>
-          </a:xfrm>
-          <a:prstGeom prst="rect">
-            <a:avLst/>
-          </a:prstGeom>
-          <a:noFill/>
-        </p:spPr>
-        <p:txBody>
-          <a:bodyPr wrap="square">
-            <a:spAutoFit/>
-          </a:bodyPr>
-          <a:lstStyle/>
-          <a:p>
-            <a:pPr algn="just">
-              <a:lnSpc>
-                <a:spcPct val="150000"/>
-              </a:lnSpc>
-            </a:pPr>
-            <a:r>
-              <a:rPr lang="es-MX" sz="2000" b="1" dirty="0">
-                <a:solidFill>
-                  <a:schemeClr val="accent6">
-                    <a:lumMod val="75000"/>
-                  </a:schemeClr>
-                </a:solidFill>
-              </a:rPr>
-              <a:t>()</a:t>
-            </a:r>
-            <a:r>
-              <a:rPr lang="es-MX" sz="2000" dirty="0"/>
-              <a:t> </a:t>
-            </a:r>
-            <a:r>
-              <a:rPr lang="es-MX" sz="2000" dirty="0">
-                <a:solidFill>
-                  <a:schemeClr val="accent6">
-                    <a:lumMod val="75000"/>
-                  </a:schemeClr>
-                </a:solidFill>
-              </a:rPr>
-              <a:t>Nos permiten comparar entre algunos valores</a:t>
-            </a:r>
-          </a:p>
-        </p:txBody>
-      </p:sp>
-      <p:pic>
-        <p:nvPicPr>
-          <p:cNvPr id="11" name="Imagen 10">
-            <a:extLst>
-              <a:ext uri="{FF2B5EF4-FFF2-40B4-BE49-F238E27FC236}">
-                <a16:creationId xmlns:a16="http://schemas.microsoft.com/office/drawing/2014/main" id="{40FAFC4F-C677-08E6-65FA-6C0A7E64CA35}"/>
+                <a16:creationId xmlns:a16="http://schemas.microsoft.com/office/drawing/2014/main" id="{CB066C06-55B5-2780-069C-E34F3460A7AD}"/>
               </a:ext>
             </a:extLst>
           </p:cNvPr>
@@ -17603,8 +17430,8 @@
         </p:blipFill>
         <p:spPr>
           <a:xfrm>
-            <a:off x="2245742" y="2924944"/>
-            <a:ext cx="4839375" cy="3696216"/>
+            <a:off x="4625063" y="2195736"/>
+            <a:ext cx="3781953" cy="3762900"/>
           </a:xfrm>
           <a:prstGeom prst="rect">
             <a:avLst/>
@@ -17614,7 +17441,7 @@
     </p:spTree>
     <p:extLst>
       <p:ext uri="{BB962C8B-B14F-4D97-AF65-F5344CB8AC3E}">
-        <p14:creationId xmlns:p14="http://schemas.microsoft.com/office/powerpoint/2010/main" val="3850094616"/>
+        <p14:creationId xmlns:p14="http://schemas.microsoft.com/office/powerpoint/2010/main" val="589800836"/>
       </p:ext>
     </p:extLst>
   </p:cSld>
@@ -17653,7 +17480,7 @@
         </p:nvSpPr>
         <p:spPr>
           <a:xfrm>
-            <a:off x="289721" y="4056"/>
+            <a:off x="388809" y="34415"/>
             <a:ext cx="8363272" cy="1143000"/>
           </a:xfrm>
         </p:spPr>
@@ -17687,10 +17514,10 @@
       </p:sp>
       <p:sp>
         <p:nvSpPr>
-          <p:cNvPr id="5" name="CuadroTexto 4">
+          <p:cNvPr id="7" name="CuadroTexto 6">
             <a:extLst>
               <a:ext uri="{FF2B5EF4-FFF2-40B4-BE49-F238E27FC236}">
-                <a16:creationId xmlns:a16="http://schemas.microsoft.com/office/drawing/2014/main" id="{FC189524-E564-48DD-B173-E7D162EDC50C}"/>
+                <a16:creationId xmlns:a16="http://schemas.microsoft.com/office/drawing/2014/main" id="{4E1DD8D9-5B93-44E0-8677-C81B21CCD7A2}"/>
               </a:ext>
             </a:extLst>
           </p:cNvPr>
@@ -17699,8 +17526,8 @@
         </p:nvSpPr>
         <p:spPr>
           <a:xfrm>
-            <a:off x="640291" y="1147056"/>
-            <a:ext cx="7920880" cy="967957"/>
+            <a:off x="2051720" y="930724"/>
+            <a:ext cx="8363271" cy="506292"/>
           </a:xfrm>
           <a:prstGeom prst="rect">
             <a:avLst/>
@@ -17719,69 +17546,38 @@
               </a:lnSpc>
             </a:pPr>
             <a:r>
-              <a:rPr lang="es-ES" sz="2000" b="1" i="0" dirty="0">
-                <a:solidFill>
-                  <a:schemeClr val="tx1">
-                    <a:lumMod val="95000"/>
-                    <a:lumOff val="5000"/>
-                  </a:schemeClr>
-                </a:solidFill>
-                <a:effectLst/>
-              </a:rPr>
-              <a:t>Ejemplo 2: </a:t>
-            </a:r>
-            <a:r>
-              <a:rPr lang="es-ES" sz="2000" i="0" dirty="0">
-                <a:solidFill>
-                  <a:schemeClr val="tx1">
-                    <a:lumMod val="95000"/>
-                    <a:lumOff val="5000"/>
-                  </a:schemeClr>
-                </a:solidFill>
-                <a:effectLst/>
-              </a:rPr>
-              <a:t>Extraer todos los números telefónicos </a:t>
-            </a:r>
-            <a:r>
-              <a:rPr lang="es-ES" sz="2000" dirty="0">
-                <a:solidFill>
-                  <a:schemeClr val="tx1">
-                    <a:lumMod val="95000"/>
-                    <a:lumOff val="5000"/>
-                  </a:schemeClr>
-                </a:solidFill>
-              </a:rPr>
-              <a:t>haciendo uso de </a:t>
-            </a:r>
-            <a:r>
-              <a:rPr lang="es-ES" sz="2000" i="0" dirty="0">
-                <a:solidFill>
-                  <a:schemeClr val="tx1">
-                    <a:lumMod val="95000"/>
-                    <a:lumOff val="5000"/>
-                  </a:schemeClr>
-                </a:solidFill>
-                <a:effectLst/>
-              </a:rPr>
-              <a:t>grupos y cuantificadores. </a:t>
-            </a:r>
-            <a:endParaRPr lang="es-ES" sz="2000" b="1" dirty="0">
-              <a:solidFill>
-                <a:schemeClr val="tx1">
-                  <a:lumMod val="95000"/>
-                  <a:lumOff val="5000"/>
-                </a:schemeClr>
-              </a:solidFill>
-            </a:endParaRPr>
-          </a:p>
-        </p:txBody>
-      </p:sp>
-      <p:sp>
-        <p:nvSpPr>
-          <p:cNvPr id="6" name="CuadroTexto 5">
+              <a:rPr lang="es-MX" sz="2000" b="1" dirty="0">
+                <a:solidFill>
+                  <a:schemeClr val="accent6">
+                    <a:lumMod val="75000"/>
+                  </a:schemeClr>
+                </a:solidFill>
+              </a:rPr>
+              <a:t>()</a:t>
+            </a:r>
+            <a:r>
+              <a:rPr lang="es-MX" sz="2000" dirty="0"/>
+              <a:t> </a:t>
+            </a:r>
+            <a:r>
+              <a:rPr lang="es-MX" sz="2000" dirty="0">
+                <a:solidFill>
+                  <a:schemeClr val="accent6">
+                    <a:lumMod val="75000"/>
+                  </a:schemeClr>
+                </a:solidFill>
+              </a:rPr>
+              <a:t>Nos permiten comparar entre algunos valores</a:t>
+            </a:r>
+          </a:p>
+        </p:txBody>
+      </p:sp>
+      <p:sp>
+        <p:nvSpPr>
+          <p:cNvPr id="5" name="CuadroTexto 4">
             <a:extLst>
               <a:ext uri="{FF2B5EF4-FFF2-40B4-BE49-F238E27FC236}">
-                <a16:creationId xmlns:a16="http://schemas.microsoft.com/office/drawing/2014/main" id="{7B04CF3A-CFE2-489B-A399-BF52B6C4C715}"/>
+                <a16:creationId xmlns:a16="http://schemas.microsoft.com/office/drawing/2014/main" id="{CD51C6FC-C7B4-4F3A-BEE8-8127DCEAF665}"/>
               </a:ext>
             </a:extLst>
           </p:cNvPr>
@@ -17790,8 +17586,8 @@
         </p:nvSpPr>
         <p:spPr>
           <a:xfrm>
-            <a:off x="640291" y="2611441"/>
-            <a:ext cx="2995174" cy="3276282"/>
+            <a:off x="388809" y="1582957"/>
+            <a:ext cx="8363271" cy="506292"/>
           </a:xfrm>
           <a:prstGeom prst="rect">
             <a:avLst/>
@@ -17804,210 +17600,79 @@
           </a:bodyPr>
           <a:lstStyle/>
           <a:p>
-            <a:pPr marL="342900" indent="-342900" algn="just">
+            <a:pPr algn="just">
               <a:lnSpc>
                 <a:spcPct val="150000"/>
               </a:lnSpc>
-              <a:buFont typeface="Arial" panose="020B0604020202020204" pitchFamily="34" charset="0"/>
-              <a:buChar char="•"/>
             </a:pPr>
             <a:r>
-              <a:rPr lang="es-ES" sz="2000" i="0" dirty="0">
-                <a:solidFill>
-                  <a:schemeClr val="tx1">
-                    <a:lumMod val="95000"/>
-                    <a:lumOff val="5000"/>
-                  </a:schemeClr>
-                </a:solidFill>
-                <a:effectLst/>
-              </a:rPr>
-              <a:t>Tres dígitos</a:t>
-            </a:r>
-          </a:p>
-          <a:p>
-            <a:pPr marL="342900" indent="-342900" algn="just">
+              <a:rPr lang="es-MX" sz="2000" b="1" dirty="0"/>
+              <a:t>Ejemplo 3: </a:t>
+            </a:r>
+            <a:r>
+              <a:rPr lang="es-MX" sz="2000" dirty="0"/>
+              <a:t>Encuentre los número de teléfono con ladas 442 y 443 solamente.</a:t>
+            </a:r>
+          </a:p>
+        </p:txBody>
+      </p:sp>
+      <p:sp>
+        <p:nvSpPr>
+          <p:cNvPr id="13" name="CuadroTexto 12">
+            <a:extLst>
+              <a:ext uri="{FF2B5EF4-FFF2-40B4-BE49-F238E27FC236}">
+                <a16:creationId xmlns:a16="http://schemas.microsoft.com/office/drawing/2014/main" id="{D8614476-5746-4910-AE97-837BDC1DE82C}"/>
+              </a:ext>
+            </a:extLst>
+          </p:cNvPr>
+          <p:cNvSpPr txBox="1"/>
+          <p:nvPr/>
+        </p:nvSpPr>
+        <p:spPr>
+          <a:xfrm>
+            <a:off x="388809" y="2140899"/>
+            <a:ext cx="3562351" cy="506292"/>
+          </a:xfrm>
+          <a:prstGeom prst="rect">
+            <a:avLst/>
+          </a:prstGeom>
+          <a:noFill/>
+        </p:spPr>
+        <p:txBody>
+          <a:bodyPr wrap="square">
+            <a:spAutoFit/>
+          </a:bodyPr>
+          <a:lstStyle/>
+          <a:p>
+            <a:pPr algn="just">
               <a:lnSpc>
                 <a:spcPct val="150000"/>
               </a:lnSpc>
-              <a:buFont typeface="Arial" panose="020B0604020202020204" pitchFamily="34" charset="0"/>
-              <a:buChar char="•"/>
             </a:pPr>
             <a:r>
-              <a:rPr lang="es-ES" sz="2000" dirty="0">
-                <a:solidFill>
-                  <a:schemeClr val="tx1">
-                    <a:lumMod val="95000"/>
-                    <a:lumOff val="5000"/>
-                  </a:schemeClr>
-                </a:solidFill>
-              </a:rPr>
-              <a:t>E</a:t>
-            </a:r>
-            <a:r>
-              <a:rPr lang="es-ES" sz="2000" i="0" dirty="0">
-                <a:solidFill>
-                  <a:schemeClr val="tx1">
-                    <a:lumMod val="95000"/>
-                    <a:lumOff val="5000"/>
-                  </a:schemeClr>
-                </a:solidFill>
-                <a:effectLst/>
-              </a:rPr>
-              <a:t>spacio, punto o guion</a:t>
-            </a:r>
-          </a:p>
-          <a:p>
-            <a:pPr marL="342900" indent="-342900" algn="just">
-              <a:lnSpc>
-                <a:spcPct val="150000"/>
-              </a:lnSpc>
-              <a:buFont typeface="Arial" panose="020B0604020202020204" pitchFamily="34" charset="0"/>
-              <a:buChar char="•"/>
-            </a:pPr>
-            <a:r>
-              <a:rPr lang="es-ES" sz="2000" dirty="0">
-                <a:solidFill>
-                  <a:schemeClr val="tx1">
-                    <a:lumMod val="95000"/>
-                    <a:lumOff val="5000"/>
-                  </a:schemeClr>
-                </a:solidFill>
-              </a:rPr>
-              <a:t>Tres</a:t>
-            </a:r>
-            <a:r>
-              <a:rPr lang="es-ES" sz="2000" i="0" dirty="0">
-                <a:solidFill>
-                  <a:schemeClr val="tx1">
-                    <a:lumMod val="95000"/>
-                    <a:lumOff val="5000"/>
-                  </a:schemeClr>
-                </a:solidFill>
-                <a:effectLst/>
-              </a:rPr>
-              <a:t> dígitos</a:t>
-            </a:r>
-          </a:p>
-          <a:p>
-            <a:pPr marL="342900" indent="-342900" algn="just">
-              <a:lnSpc>
-                <a:spcPct val="150000"/>
-              </a:lnSpc>
-              <a:buFont typeface="Arial" panose="020B0604020202020204" pitchFamily="34" charset="0"/>
-              <a:buChar char="•"/>
-            </a:pPr>
-            <a:r>
-              <a:rPr lang="es-ES" sz="2000" dirty="0">
-                <a:solidFill>
-                  <a:schemeClr val="tx1">
-                    <a:lumMod val="95000"/>
-                    <a:lumOff val="5000"/>
-                  </a:schemeClr>
-                </a:solidFill>
-              </a:rPr>
-              <a:t>Espacio, punto o guion</a:t>
-            </a:r>
-          </a:p>
-          <a:p>
-            <a:pPr marL="342900" indent="-342900" algn="just">
-              <a:lnSpc>
-                <a:spcPct val="150000"/>
-              </a:lnSpc>
-              <a:buFont typeface="Arial" panose="020B0604020202020204" pitchFamily="34" charset="0"/>
-              <a:buChar char="•"/>
-            </a:pPr>
-            <a:r>
-              <a:rPr lang="es-ES" sz="2000" dirty="0">
-                <a:solidFill>
-                  <a:schemeClr val="tx1">
-                    <a:lumMod val="95000"/>
-                    <a:lumOff val="5000"/>
-                  </a:schemeClr>
-                </a:solidFill>
-              </a:rPr>
-              <a:t>D</a:t>
-            </a:r>
-            <a:r>
-              <a:rPr lang="es-ES" sz="2000" i="0" dirty="0">
-                <a:solidFill>
-                  <a:schemeClr val="tx1">
-                    <a:lumMod val="95000"/>
-                    <a:lumOff val="5000"/>
-                  </a:schemeClr>
-                </a:solidFill>
-                <a:effectLst/>
-              </a:rPr>
-              <a:t>os dígitos</a:t>
-            </a:r>
-          </a:p>
-          <a:p>
-            <a:pPr marL="342900" indent="-342900" algn="just">
-              <a:lnSpc>
-                <a:spcPct val="150000"/>
-              </a:lnSpc>
-              <a:buFont typeface="Arial" panose="020B0604020202020204" pitchFamily="34" charset="0"/>
-              <a:buChar char="•"/>
-            </a:pPr>
-            <a:r>
-              <a:rPr lang="es-ES" sz="2000" dirty="0">
-                <a:solidFill>
-                  <a:schemeClr val="tx1">
-                    <a:lumMod val="95000"/>
-                    <a:lumOff val="5000"/>
-                  </a:schemeClr>
-                </a:solidFill>
-              </a:rPr>
-              <a:t>Espacio, punto o guion</a:t>
-            </a:r>
-          </a:p>
-          <a:p>
-            <a:pPr marL="342900" indent="-342900" algn="just">
-              <a:lnSpc>
-                <a:spcPct val="150000"/>
-              </a:lnSpc>
-              <a:buFont typeface="Arial" panose="020B0604020202020204" pitchFamily="34" charset="0"/>
-              <a:buChar char="•"/>
-            </a:pPr>
-            <a:r>
-              <a:rPr lang="es-ES" sz="2000" dirty="0">
-                <a:solidFill>
-                  <a:schemeClr val="tx1">
-                    <a:lumMod val="95000"/>
-                    <a:lumOff val="5000"/>
-                  </a:schemeClr>
-                </a:solidFill>
-              </a:rPr>
-              <a:t>D</a:t>
-            </a:r>
-            <a:r>
-              <a:rPr lang="es-ES" sz="2000" i="0" dirty="0">
-                <a:solidFill>
-                  <a:schemeClr val="tx1">
-                    <a:lumMod val="95000"/>
-                    <a:lumOff val="5000"/>
-                  </a:schemeClr>
-                </a:solidFill>
-                <a:effectLst/>
-              </a:rPr>
-              <a:t>os dígitos.</a:t>
-            </a:r>
-            <a:endParaRPr lang="es-ES" sz="2000" b="1" dirty="0">
-              <a:solidFill>
-                <a:schemeClr val="tx1">
-                  <a:lumMod val="95000"/>
-                  <a:lumOff val="5000"/>
-                </a:schemeClr>
-              </a:solidFill>
-            </a:endParaRPr>
+              <a:rPr lang="es-MX" sz="2000" dirty="0"/>
+              <a:t>Conjunto de caracteres </a:t>
+            </a:r>
+            <a:r>
+              <a:rPr lang="es-MX" sz="2000" b="1" dirty="0">
+                <a:solidFill>
+                  <a:schemeClr val="accent6">
+                    <a:lumMod val="75000"/>
+                  </a:schemeClr>
+                </a:solidFill>
+              </a:rPr>
+              <a:t>2 y 3</a:t>
+            </a:r>
+            <a:endParaRPr lang="es-MX" sz="2000" dirty="0"/>
           </a:p>
         </p:txBody>
       </p:sp>
       <p:pic>
         <p:nvPicPr>
-          <p:cNvPr id="9" name="Imagen 8">
+          <p:cNvPr id="3" name="Imagen 2">
             <a:extLst>
               <a:ext uri="{FF2B5EF4-FFF2-40B4-BE49-F238E27FC236}">
-                <a16:creationId xmlns:a16="http://schemas.microsoft.com/office/drawing/2014/main" id="{CB066C06-55B5-2780-069C-E34F3460A7AD}"/>
+                <a16:creationId xmlns:a16="http://schemas.microsoft.com/office/drawing/2014/main" id="{CC56C17C-52EF-DEF6-AFA2-44D926EB428F}"/>
               </a:ext>
             </a:extLst>
           </p:cNvPr>
@@ -18024,8 +17689,8 @@
         </p:blipFill>
         <p:spPr>
           <a:xfrm>
-            <a:off x="4625063" y="2195736"/>
-            <a:ext cx="3781953" cy="3762900"/>
+            <a:off x="3964226" y="2235190"/>
+            <a:ext cx="4320480" cy="4222287"/>
           </a:xfrm>
           <a:prstGeom prst="rect">
             <a:avLst/>
@@ -18035,7 +17700,7 @@
     </p:spTree>
     <p:extLst>
       <p:ext uri="{BB962C8B-B14F-4D97-AF65-F5344CB8AC3E}">
-        <p14:creationId xmlns:p14="http://schemas.microsoft.com/office/powerpoint/2010/main" val="589800836"/>
+        <p14:creationId xmlns:p14="http://schemas.microsoft.com/office/powerpoint/2010/main" val="3789720049"/>
       </p:ext>
     </p:extLst>
   </p:cSld>
@@ -18074,265 +17739,6 @@
         </p:nvSpPr>
         <p:spPr>
           <a:xfrm>
-            <a:off x="388809" y="34415"/>
-            <a:ext cx="8363272" cy="1143000"/>
-          </a:xfrm>
-        </p:spPr>
-        <p:txBody>
-          <a:bodyPr>
-            <a:normAutofit/>
-          </a:bodyPr>
-          <a:lstStyle/>
-          <a:p>
-            <a:pPr eaLnBrk="1" hangingPunct="1">
-              <a:defRPr/>
-            </a:pPr>
-            <a:r>
-              <a:rPr lang="es-MX" b="1" dirty="0">
-                <a:solidFill>
-                  <a:schemeClr val="accent4">
-                    <a:lumMod val="50000"/>
-                  </a:schemeClr>
-                </a:solidFill>
-                <a:effectLst>
-                  <a:outerShdw blurRad="38100" dist="38100" dir="2700000" algn="tl">
-                    <a:srgbClr val="C0C0C0"/>
-                  </a:outerShdw>
-                </a:effectLst>
-                <a:latin typeface="Dom Casual" charset="0"/>
-              </a:rPr>
-              <a:t>Grupos</a:t>
-            </a:r>
-          </a:p>
-        </p:txBody>
-      </p:sp>
-      <p:sp>
-        <p:nvSpPr>
-          <p:cNvPr id="7" name="CuadroTexto 6">
-            <a:extLst>
-              <a:ext uri="{FF2B5EF4-FFF2-40B4-BE49-F238E27FC236}">
-                <a16:creationId xmlns:a16="http://schemas.microsoft.com/office/drawing/2014/main" id="{4E1DD8D9-5B93-44E0-8677-C81B21CCD7A2}"/>
-              </a:ext>
-            </a:extLst>
-          </p:cNvPr>
-          <p:cNvSpPr txBox="1"/>
-          <p:nvPr/>
-        </p:nvSpPr>
-        <p:spPr>
-          <a:xfrm>
-            <a:off x="2051720" y="930724"/>
-            <a:ext cx="8363271" cy="506292"/>
-          </a:xfrm>
-          <a:prstGeom prst="rect">
-            <a:avLst/>
-          </a:prstGeom>
-          <a:noFill/>
-        </p:spPr>
-        <p:txBody>
-          <a:bodyPr wrap="square">
-            <a:spAutoFit/>
-          </a:bodyPr>
-          <a:lstStyle/>
-          <a:p>
-            <a:pPr algn="just">
-              <a:lnSpc>
-                <a:spcPct val="150000"/>
-              </a:lnSpc>
-            </a:pPr>
-            <a:r>
-              <a:rPr lang="es-MX" sz="2000" b="1" dirty="0">
-                <a:solidFill>
-                  <a:schemeClr val="accent6">
-                    <a:lumMod val="75000"/>
-                  </a:schemeClr>
-                </a:solidFill>
-              </a:rPr>
-              <a:t>()</a:t>
-            </a:r>
-            <a:r>
-              <a:rPr lang="es-MX" sz="2000" dirty="0"/>
-              <a:t> </a:t>
-            </a:r>
-            <a:r>
-              <a:rPr lang="es-MX" sz="2000" dirty="0">
-                <a:solidFill>
-                  <a:schemeClr val="accent6">
-                    <a:lumMod val="75000"/>
-                  </a:schemeClr>
-                </a:solidFill>
-              </a:rPr>
-              <a:t>Nos permiten comparar entre algunos valores</a:t>
-            </a:r>
-          </a:p>
-        </p:txBody>
-      </p:sp>
-      <p:sp>
-        <p:nvSpPr>
-          <p:cNvPr id="5" name="CuadroTexto 4">
-            <a:extLst>
-              <a:ext uri="{FF2B5EF4-FFF2-40B4-BE49-F238E27FC236}">
-                <a16:creationId xmlns:a16="http://schemas.microsoft.com/office/drawing/2014/main" id="{CD51C6FC-C7B4-4F3A-BEE8-8127DCEAF665}"/>
-              </a:ext>
-            </a:extLst>
-          </p:cNvPr>
-          <p:cNvSpPr txBox="1"/>
-          <p:nvPr/>
-        </p:nvSpPr>
-        <p:spPr>
-          <a:xfrm>
-            <a:off x="388809" y="1582957"/>
-            <a:ext cx="8363271" cy="506292"/>
-          </a:xfrm>
-          <a:prstGeom prst="rect">
-            <a:avLst/>
-          </a:prstGeom>
-          <a:noFill/>
-        </p:spPr>
-        <p:txBody>
-          <a:bodyPr wrap="square">
-            <a:spAutoFit/>
-          </a:bodyPr>
-          <a:lstStyle/>
-          <a:p>
-            <a:pPr algn="just">
-              <a:lnSpc>
-                <a:spcPct val="150000"/>
-              </a:lnSpc>
-            </a:pPr>
-            <a:r>
-              <a:rPr lang="es-MX" sz="2000" b="1" dirty="0"/>
-              <a:t>Ejemplo 3: </a:t>
-            </a:r>
-            <a:r>
-              <a:rPr lang="es-MX" sz="2000" dirty="0"/>
-              <a:t>Encuentre los número de teléfono con ladas 442 y 443 solamente.</a:t>
-            </a:r>
-          </a:p>
-        </p:txBody>
-      </p:sp>
-      <p:sp>
-        <p:nvSpPr>
-          <p:cNvPr id="13" name="CuadroTexto 12">
-            <a:extLst>
-              <a:ext uri="{FF2B5EF4-FFF2-40B4-BE49-F238E27FC236}">
-                <a16:creationId xmlns:a16="http://schemas.microsoft.com/office/drawing/2014/main" id="{D8614476-5746-4910-AE97-837BDC1DE82C}"/>
-              </a:ext>
-            </a:extLst>
-          </p:cNvPr>
-          <p:cNvSpPr txBox="1"/>
-          <p:nvPr/>
-        </p:nvSpPr>
-        <p:spPr>
-          <a:xfrm>
-            <a:off x="388809" y="2140899"/>
-            <a:ext cx="3562351" cy="506292"/>
-          </a:xfrm>
-          <a:prstGeom prst="rect">
-            <a:avLst/>
-          </a:prstGeom>
-          <a:noFill/>
-        </p:spPr>
-        <p:txBody>
-          <a:bodyPr wrap="square">
-            <a:spAutoFit/>
-          </a:bodyPr>
-          <a:lstStyle/>
-          <a:p>
-            <a:pPr algn="just">
-              <a:lnSpc>
-                <a:spcPct val="150000"/>
-              </a:lnSpc>
-            </a:pPr>
-            <a:r>
-              <a:rPr lang="es-MX" sz="2000" dirty="0"/>
-              <a:t>Conjunto de caracteres </a:t>
-            </a:r>
-            <a:r>
-              <a:rPr lang="es-MX" sz="2000" b="1" dirty="0">
-                <a:solidFill>
-                  <a:schemeClr val="accent6">
-                    <a:lumMod val="75000"/>
-                  </a:schemeClr>
-                </a:solidFill>
-              </a:rPr>
-              <a:t>2 y 3</a:t>
-            </a:r>
-            <a:endParaRPr lang="es-MX" sz="2000" dirty="0"/>
-          </a:p>
-        </p:txBody>
-      </p:sp>
-      <p:pic>
-        <p:nvPicPr>
-          <p:cNvPr id="3" name="Imagen 2">
-            <a:extLst>
-              <a:ext uri="{FF2B5EF4-FFF2-40B4-BE49-F238E27FC236}">
-                <a16:creationId xmlns:a16="http://schemas.microsoft.com/office/drawing/2014/main" id="{CC56C17C-52EF-DEF6-AFA2-44D926EB428F}"/>
-              </a:ext>
-            </a:extLst>
-          </p:cNvPr>
-          <p:cNvPicPr>
-            <a:picLocks noChangeAspect="1"/>
-          </p:cNvPicPr>
-          <p:nvPr/>
-        </p:nvPicPr>
-        <p:blipFill>
-          <a:blip r:embed="rId3"/>
-          <a:stretch>
-            <a:fillRect/>
-          </a:stretch>
-        </p:blipFill>
-        <p:spPr>
-          <a:xfrm>
-            <a:off x="3964226" y="2235190"/>
-            <a:ext cx="4320480" cy="4222287"/>
-          </a:xfrm>
-          <a:prstGeom prst="rect">
-            <a:avLst/>
-          </a:prstGeom>
-        </p:spPr>
-      </p:pic>
-    </p:spTree>
-    <p:extLst>
-      <p:ext uri="{BB962C8B-B14F-4D97-AF65-F5344CB8AC3E}">
-        <p14:creationId xmlns:p14="http://schemas.microsoft.com/office/powerpoint/2010/main" val="3789720049"/>
-      </p:ext>
-    </p:extLst>
-  </p:cSld>
-  <p:clrMapOvr>
-    <a:masterClrMapping/>
-  </p:clrMapOvr>
-</p:sld>
-</file>
-
-<file path=ppt/slides/slide46.xml><?xml version="1.0" encoding="utf-8"?>
-<p:sld xmlns:a="http://schemas.openxmlformats.org/drawingml/2006/main" xmlns:r="http://schemas.openxmlformats.org/officeDocument/2006/relationships" xmlns:p="http://schemas.openxmlformats.org/presentationml/2006/main">
-  <p:cSld>
-    <p:spTree>
-      <p:nvGrpSpPr>
-        <p:cNvPr id="1" name=""/>
-        <p:cNvGrpSpPr/>
-        <p:nvPr/>
-      </p:nvGrpSpPr>
-      <p:grpSpPr>
-        <a:xfrm>
-          <a:off x="0" y="0"/>
-          <a:ext cx="0" cy="0"/>
-          <a:chOff x="0" y="0"/>
-          <a:chExt cx="0" cy="0"/>
-        </a:xfrm>
-      </p:grpSpPr>
-      <p:sp>
-        <p:nvSpPr>
-          <p:cNvPr id="184324" name="Rectangle 4"/>
-          <p:cNvSpPr>
-            <a:spLocks noGrp="1" noChangeArrowheads="1"/>
-          </p:cNvSpPr>
-          <p:nvPr>
-            <p:ph type="title"/>
-          </p:nvPr>
-        </p:nvSpPr>
-        <p:spPr>
-          <a:xfrm>
             <a:off x="289721" y="4056"/>
             <a:ext cx="8363272" cy="1143000"/>
           </a:xfrm>
@@ -18476,7 +17882,7 @@
 </p:sld>
 </file>
 
-<file path=ppt/slides/slide47.xml><?xml version="1.0" encoding="utf-8"?>
+<file path=ppt/slides/slide46.xml><?xml version="1.0" encoding="utf-8"?>
 <p:sld xmlns:a="http://schemas.openxmlformats.org/drawingml/2006/main" xmlns:r="http://schemas.openxmlformats.org/officeDocument/2006/relationships" xmlns:p="http://schemas.openxmlformats.org/presentationml/2006/main">
   <p:cSld>
     <p:spTree>
@@ -18740,7 +18146,7 @@
 </p:sld>
 </file>
 
-<file path=ppt/slides/slide48.xml><?xml version="1.0" encoding="utf-8"?>
+<file path=ppt/slides/slide47.xml><?xml version="1.0" encoding="utf-8"?>
 <p:sld xmlns:a="http://schemas.openxmlformats.org/drawingml/2006/main" xmlns:r="http://schemas.openxmlformats.org/officeDocument/2006/relationships" xmlns:p="http://schemas.openxmlformats.org/presentationml/2006/main">
   <p:cSld>
     <p:spTree>
@@ -18866,7 +18272,7 @@
                   </a:schemeClr>
                 </a:solidFill>
               </a:rPr>
-              <a:t> Extraer los nombres del directorio con dos textos con acentos y que termine con 0 o un espacio</a:t>
+              <a:t> Extraer los nombres del directorio con dos textos con acentos y que termine con cero o un espacio</a:t>
             </a:r>
           </a:p>
         </p:txBody>
@@ -19277,7 +18683,7 @@
 </p:sld>
 </file>
 
-<file path=ppt/slides/slide49.xml><?xml version="1.0" encoding="utf-8"?>
+<file path=ppt/slides/slide48.xml><?xml version="1.0" encoding="utf-8"?>
 <p:sld xmlns:a="http://schemas.openxmlformats.org/drawingml/2006/main" xmlns:r="http://schemas.openxmlformats.org/officeDocument/2006/relationships" xmlns:p="http://schemas.openxmlformats.org/presentationml/2006/main">
   <p:cSld>
     <p:spTree>
@@ -19622,6 +19028,361 @@
     <p:extLst>
       <p:ext uri="{BB962C8B-B14F-4D97-AF65-F5344CB8AC3E}">
         <p14:creationId xmlns:p14="http://schemas.microsoft.com/office/powerpoint/2010/main" val="2777994466"/>
+      </p:ext>
+    </p:extLst>
+  </p:cSld>
+  <p:clrMapOvr>
+    <a:masterClrMapping/>
+  </p:clrMapOvr>
+</p:sld>
+</file>
+
+<file path=ppt/slides/slide49.xml><?xml version="1.0" encoding="utf-8"?>
+<p:sld xmlns:a="http://schemas.openxmlformats.org/drawingml/2006/main" xmlns:r="http://schemas.openxmlformats.org/officeDocument/2006/relationships" xmlns:p="http://schemas.openxmlformats.org/presentationml/2006/main">
+  <p:cSld>
+    <p:spTree>
+      <p:nvGrpSpPr>
+        <p:cNvPr id="1" name="">
+          <a:extLst>
+            <a:ext uri="{FF2B5EF4-FFF2-40B4-BE49-F238E27FC236}">
+              <a16:creationId xmlns:a16="http://schemas.microsoft.com/office/drawing/2014/main" id="{8D2170A6-9C97-7E89-6B43-A931DB89E4AD}"/>
+            </a:ext>
+          </a:extLst>
+        </p:cNvPr>
+        <p:cNvGrpSpPr/>
+        <p:nvPr/>
+      </p:nvGrpSpPr>
+      <p:grpSpPr>
+        <a:xfrm>
+          <a:off x="0" y="0"/>
+          <a:ext cx="0" cy="0"/>
+          <a:chOff x="0" y="0"/>
+          <a:chExt cx="0" cy="0"/>
+        </a:xfrm>
+      </p:grpSpPr>
+      <p:sp>
+        <p:nvSpPr>
+          <p:cNvPr id="184324" name="Rectangle 4">
+            <a:extLst>
+              <a:ext uri="{FF2B5EF4-FFF2-40B4-BE49-F238E27FC236}">
+                <a16:creationId xmlns:a16="http://schemas.microsoft.com/office/drawing/2014/main" id="{7BE957BD-1108-6677-0161-6A5B83B6547D}"/>
+              </a:ext>
+            </a:extLst>
+          </p:cNvPr>
+          <p:cNvSpPr>
+            <a:spLocks noGrp="1" noChangeArrowheads="1"/>
+          </p:cNvSpPr>
+          <p:nvPr>
+            <p:ph type="title"/>
+          </p:nvPr>
+        </p:nvSpPr>
+        <p:spPr>
+          <a:xfrm>
+            <a:off x="107504" y="116632"/>
+            <a:ext cx="8579296" cy="1143000"/>
+          </a:xfrm>
+        </p:spPr>
+        <p:txBody>
+          <a:bodyPr>
+            <a:normAutofit/>
+          </a:bodyPr>
+          <a:lstStyle/>
+          <a:p>
+            <a:pPr eaLnBrk="1" hangingPunct="1">
+              <a:defRPr/>
+            </a:pPr>
+            <a:r>
+              <a:rPr lang="es-MX" b="1" dirty="0">
+                <a:solidFill>
+                  <a:schemeClr val="accent4">
+                    <a:lumMod val="50000"/>
+                  </a:schemeClr>
+                </a:solidFill>
+                <a:effectLst>
+                  <a:outerShdw blurRad="38100" dist="38100" dir="2700000" algn="tl">
+                    <a:srgbClr val="C0C0C0"/>
+                  </a:outerShdw>
+                </a:effectLst>
+                <a:latin typeface="Dom Casual" charset="0"/>
+              </a:rPr>
+              <a:t>Módulo </a:t>
+            </a:r>
+            <a:r>
+              <a:rPr lang="es-MX" b="1" dirty="0" err="1">
+                <a:solidFill>
+                  <a:schemeClr val="accent4">
+                    <a:lumMod val="50000"/>
+                  </a:schemeClr>
+                </a:solidFill>
+                <a:effectLst>
+                  <a:outerShdw blurRad="38100" dist="38100" dir="2700000" algn="tl">
+                    <a:srgbClr val="C0C0C0"/>
+                  </a:outerShdw>
+                </a:effectLst>
+                <a:latin typeface="Dom Casual" charset="0"/>
+              </a:rPr>
+              <a:t>regex</a:t>
+            </a:r>
+            <a:endParaRPr lang="es-MX" b="1" dirty="0">
+              <a:solidFill>
+                <a:schemeClr val="accent4">
+                  <a:lumMod val="50000"/>
+                </a:schemeClr>
+              </a:solidFill>
+              <a:effectLst>
+                <a:outerShdw blurRad="38100" dist="38100" dir="2700000" algn="tl">
+                  <a:srgbClr val="C0C0C0"/>
+                </a:outerShdw>
+              </a:effectLst>
+              <a:latin typeface="Dom Casual" charset="0"/>
+            </a:endParaRPr>
+          </a:p>
+        </p:txBody>
+      </p:sp>
+      <p:sp>
+        <p:nvSpPr>
+          <p:cNvPr id="3" name="CuadroTexto 2">
+            <a:extLst>
+              <a:ext uri="{FF2B5EF4-FFF2-40B4-BE49-F238E27FC236}">
+                <a16:creationId xmlns:a16="http://schemas.microsoft.com/office/drawing/2014/main" id="{731A6801-6C8C-D007-4366-6A294226C510}"/>
+              </a:ext>
+            </a:extLst>
+          </p:cNvPr>
+          <p:cNvSpPr txBox="1"/>
+          <p:nvPr/>
+        </p:nvSpPr>
+        <p:spPr>
+          <a:xfrm>
+            <a:off x="827584" y="1484784"/>
+            <a:ext cx="7624844" cy="1292662"/>
+          </a:xfrm>
+          <a:prstGeom prst="rect">
+            <a:avLst/>
+          </a:prstGeom>
+          <a:noFill/>
+        </p:spPr>
+        <p:txBody>
+          <a:bodyPr wrap="square">
+            <a:spAutoFit/>
+          </a:bodyPr>
+          <a:lstStyle>
+            <a:defPPr>
+              <a:defRPr lang="es-MX"/>
+            </a:defPPr>
+            <a:lvl1pPr>
+              <a:defRPr b="1" i="0">
+                <a:solidFill>
+                  <a:srgbClr val="000000"/>
+                </a:solidFill>
+                <a:effectLst/>
+                <a:latin typeface="Poppins-Regular"/>
+              </a:defRPr>
+            </a:lvl1pPr>
+          </a:lstStyle>
+          <a:p>
+            <a:r>
+              <a:rPr lang="es-MX" dirty="0">
+                <a:solidFill>
+                  <a:schemeClr val="tx1">
+                    <a:lumMod val="95000"/>
+                    <a:lumOff val="5000"/>
+                  </a:schemeClr>
+                </a:solidFill>
+                <a:latin typeface="+mn-lt"/>
+              </a:rPr>
+              <a:t>Raw </a:t>
+            </a:r>
+            <a:r>
+              <a:rPr lang="es-MX" dirty="0" err="1">
+                <a:solidFill>
+                  <a:schemeClr val="tx1">
+                    <a:lumMod val="95000"/>
+                    <a:lumOff val="5000"/>
+                  </a:schemeClr>
+                </a:solidFill>
+                <a:latin typeface="+mn-lt"/>
+              </a:rPr>
+              <a:t>string</a:t>
+            </a:r>
+            <a:r>
+              <a:rPr lang="es-MX" dirty="0">
+                <a:solidFill>
+                  <a:schemeClr val="tx1">
+                    <a:lumMod val="95000"/>
+                    <a:lumOff val="5000"/>
+                  </a:schemeClr>
+                </a:solidFill>
+                <a:latin typeface="+mn-lt"/>
+              </a:rPr>
+              <a:t>: </a:t>
+            </a:r>
+            <a:r>
+              <a:rPr lang="es-MX" b="0" dirty="0">
+                <a:solidFill>
+                  <a:schemeClr val="tx1">
+                    <a:lumMod val="95000"/>
+                    <a:lumOff val="5000"/>
+                  </a:schemeClr>
+                </a:solidFill>
+                <a:latin typeface="+mn-lt"/>
+              </a:rPr>
+              <a:t>Utilizamos una cadena "raw" (</a:t>
+            </a:r>
+            <a:r>
+              <a:rPr lang="es-MX" dirty="0" err="1">
+                <a:solidFill>
+                  <a:schemeClr val="tx1">
+                    <a:lumMod val="95000"/>
+                    <a:lumOff val="5000"/>
+                  </a:schemeClr>
+                </a:solidFill>
+                <a:latin typeface="+mn-lt"/>
+              </a:rPr>
+              <a:t>r"cadena</a:t>
+            </a:r>
+            <a:r>
+              <a:rPr lang="es-MX" dirty="0">
+                <a:solidFill>
+                  <a:schemeClr val="tx1">
+                    <a:lumMod val="95000"/>
+                    <a:lumOff val="5000"/>
+                  </a:schemeClr>
+                </a:solidFill>
+                <a:latin typeface="+mn-lt"/>
+              </a:rPr>
+              <a:t>"</a:t>
+            </a:r>
+            <a:r>
+              <a:rPr lang="es-MX" b="0" dirty="0">
+                <a:solidFill>
+                  <a:schemeClr val="tx1">
+                    <a:lumMod val="95000"/>
+                    <a:lumOff val="5000"/>
+                  </a:schemeClr>
+                </a:solidFill>
+                <a:latin typeface="+mn-lt"/>
+              </a:rPr>
+              <a:t>) para evitar problemas con los caracteres de escape </a:t>
+            </a:r>
+            <a:r>
+              <a:rPr lang="es-MX" sz="2000" dirty="0">
+                <a:solidFill>
+                  <a:schemeClr val="tx1">
+                    <a:lumMod val="95000"/>
+                    <a:lumOff val="5000"/>
+                  </a:schemeClr>
+                </a:solidFill>
+                <a:latin typeface="+mn-lt"/>
+              </a:rPr>
+              <a:t>(</a:t>
+            </a:r>
+            <a:r>
+              <a:rPr lang="es-MX" dirty="0">
+                <a:solidFill>
+                  <a:schemeClr val="tx1">
+                    <a:lumMod val="95000"/>
+                    <a:lumOff val="5000"/>
+                  </a:schemeClr>
+                </a:solidFill>
+                <a:latin typeface="+mn-lt"/>
+              </a:rPr>
+              <a:t>\) </a:t>
+            </a:r>
+            <a:r>
+              <a:rPr lang="es-MX" b="0" dirty="0">
+                <a:solidFill>
+                  <a:schemeClr val="tx1">
+                    <a:lumMod val="95000"/>
+                    <a:lumOff val="5000"/>
+                  </a:schemeClr>
+                </a:solidFill>
+                <a:latin typeface="+mn-lt"/>
+              </a:rPr>
+              <a:t>en las expresiones regulares </a:t>
+            </a:r>
+            <a:r>
+              <a:rPr lang="es-MX" sz="2400" b="0" dirty="0">
+                <a:solidFill>
+                  <a:schemeClr val="tx1">
+                    <a:lumMod val="95000"/>
+                    <a:lumOff val="5000"/>
+                  </a:schemeClr>
+                </a:solidFill>
+                <a:latin typeface="+mn-lt"/>
+              </a:rPr>
+              <a:t>.</a:t>
+            </a:r>
+            <a:endParaRPr lang="es-MX" b="0" dirty="0">
+              <a:solidFill>
+                <a:schemeClr val="tx1">
+                  <a:lumMod val="95000"/>
+                  <a:lumOff val="5000"/>
+                </a:schemeClr>
+              </a:solidFill>
+              <a:latin typeface="+mn-lt"/>
+            </a:endParaRPr>
+          </a:p>
+          <a:p>
+            <a:endParaRPr lang="es-MX" b="0" dirty="0">
+              <a:solidFill>
+                <a:schemeClr val="tx1">
+                  <a:lumMod val="95000"/>
+                  <a:lumOff val="5000"/>
+                </a:schemeClr>
+              </a:solidFill>
+              <a:latin typeface="+mn-lt"/>
+            </a:endParaRPr>
+          </a:p>
+          <a:p>
+            <a:r>
+              <a:rPr lang="es-MX" dirty="0">
+                <a:solidFill>
+                  <a:schemeClr val="tx1">
+                    <a:lumMod val="95000"/>
+                    <a:lumOff val="5000"/>
+                  </a:schemeClr>
+                </a:solidFill>
+                <a:latin typeface="+mn-lt"/>
+              </a:rPr>
+              <a:t>Ejemplo: </a:t>
+            </a:r>
+          </a:p>
+        </p:txBody>
+      </p:sp>
+      <p:pic>
+        <p:nvPicPr>
+          <p:cNvPr id="5" name="Imagen 4">
+            <a:extLst>
+              <a:ext uri="{FF2B5EF4-FFF2-40B4-BE49-F238E27FC236}">
+                <a16:creationId xmlns:a16="http://schemas.microsoft.com/office/drawing/2014/main" id="{A49844EA-464A-B92D-FFF7-A3303FD25631}"/>
+              </a:ext>
+            </a:extLst>
+          </p:cNvPr>
+          <p:cNvPicPr>
+            <a:picLocks noChangeAspect="1"/>
+          </p:cNvPicPr>
+          <p:nvPr/>
+        </p:nvPicPr>
+        <p:blipFill>
+          <a:blip r:embed="rId3"/>
+          <a:stretch>
+            <a:fillRect/>
+          </a:stretch>
+        </p:blipFill>
+        <p:spPr>
+          <a:xfrm>
+            <a:off x="1475656" y="2886844"/>
+            <a:ext cx="6030167" cy="2486372"/>
+          </a:xfrm>
+          <a:prstGeom prst="rect">
+            <a:avLst/>
+          </a:prstGeom>
+        </p:spPr>
+      </p:pic>
+    </p:spTree>
+    <p:extLst>
+      <p:ext uri="{BB962C8B-B14F-4D97-AF65-F5344CB8AC3E}">
+        <p14:creationId xmlns:p14="http://schemas.microsoft.com/office/powerpoint/2010/main" val="1919744961"/>
       </p:ext>
     </p:extLst>
   </p:cSld>
@@ -19884,304 +19645,6 @@
 </file>
 
 <file path=ppt/slides/slide50.xml><?xml version="1.0" encoding="utf-8"?>
-<p:sld xmlns:a="http://schemas.openxmlformats.org/drawingml/2006/main" xmlns:r="http://schemas.openxmlformats.org/officeDocument/2006/relationships" xmlns:p="http://schemas.openxmlformats.org/presentationml/2006/main">
-  <p:cSld>
-    <p:spTree>
-      <p:nvGrpSpPr>
-        <p:cNvPr id="1" name="">
-          <a:extLst>
-            <a:ext uri="{FF2B5EF4-FFF2-40B4-BE49-F238E27FC236}">
-              <a16:creationId xmlns:a16="http://schemas.microsoft.com/office/drawing/2014/main" id="{8D2170A6-9C97-7E89-6B43-A931DB89E4AD}"/>
-            </a:ext>
-          </a:extLst>
-        </p:cNvPr>
-        <p:cNvGrpSpPr/>
-        <p:nvPr/>
-      </p:nvGrpSpPr>
-      <p:grpSpPr>
-        <a:xfrm>
-          <a:off x="0" y="0"/>
-          <a:ext cx="0" cy="0"/>
-          <a:chOff x="0" y="0"/>
-          <a:chExt cx="0" cy="0"/>
-        </a:xfrm>
-      </p:grpSpPr>
-      <p:sp>
-        <p:nvSpPr>
-          <p:cNvPr id="184324" name="Rectangle 4">
-            <a:extLst>
-              <a:ext uri="{FF2B5EF4-FFF2-40B4-BE49-F238E27FC236}">
-                <a16:creationId xmlns:a16="http://schemas.microsoft.com/office/drawing/2014/main" id="{7BE957BD-1108-6677-0161-6A5B83B6547D}"/>
-              </a:ext>
-            </a:extLst>
-          </p:cNvPr>
-          <p:cNvSpPr>
-            <a:spLocks noGrp="1" noChangeArrowheads="1"/>
-          </p:cNvSpPr>
-          <p:nvPr>
-            <p:ph type="title"/>
-          </p:nvPr>
-        </p:nvSpPr>
-        <p:spPr>
-          <a:xfrm>
-            <a:off x="107504" y="116632"/>
-            <a:ext cx="8579296" cy="1143000"/>
-          </a:xfrm>
-        </p:spPr>
-        <p:txBody>
-          <a:bodyPr>
-            <a:normAutofit/>
-          </a:bodyPr>
-          <a:lstStyle/>
-          <a:p>
-            <a:pPr eaLnBrk="1" hangingPunct="1">
-              <a:defRPr/>
-            </a:pPr>
-            <a:r>
-              <a:rPr lang="es-MX" b="1" dirty="0">
-                <a:solidFill>
-                  <a:schemeClr val="accent4">
-                    <a:lumMod val="50000"/>
-                  </a:schemeClr>
-                </a:solidFill>
-                <a:effectLst>
-                  <a:outerShdw blurRad="38100" dist="38100" dir="2700000" algn="tl">
-                    <a:srgbClr val="C0C0C0"/>
-                  </a:outerShdw>
-                </a:effectLst>
-                <a:latin typeface="Dom Casual" charset="0"/>
-              </a:rPr>
-              <a:t>Módulo </a:t>
-            </a:r>
-            <a:r>
-              <a:rPr lang="es-MX" b="1" dirty="0" err="1">
-                <a:solidFill>
-                  <a:schemeClr val="accent4">
-                    <a:lumMod val="50000"/>
-                  </a:schemeClr>
-                </a:solidFill>
-                <a:effectLst>
-                  <a:outerShdw blurRad="38100" dist="38100" dir="2700000" algn="tl">
-                    <a:srgbClr val="C0C0C0"/>
-                  </a:outerShdw>
-                </a:effectLst>
-                <a:latin typeface="Dom Casual" charset="0"/>
-              </a:rPr>
-              <a:t>regex</a:t>
-            </a:r>
-            <a:endParaRPr lang="es-MX" b="1" dirty="0">
-              <a:solidFill>
-                <a:schemeClr val="accent4">
-                  <a:lumMod val="50000"/>
-                </a:schemeClr>
-              </a:solidFill>
-              <a:effectLst>
-                <a:outerShdw blurRad="38100" dist="38100" dir="2700000" algn="tl">
-                  <a:srgbClr val="C0C0C0"/>
-                </a:outerShdw>
-              </a:effectLst>
-              <a:latin typeface="Dom Casual" charset="0"/>
-            </a:endParaRPr>
-          </a:p>
-        </p:txBody>
-      </p:sp>
-      <p:sp>
-        <p:nvSpPr>
-          <p:cNvPr id="3" name="CuadroTexto 2">
-            <a:extLst>
-              <a:ext uri="{FF2B5EF4-FFF2-40B4-BE49-F238E27FC236}">
-                <a16:creationId xmlns:a16="http://schemas.microsoft.com/office/drawing/2014/main" id="{731A6801-6C8C-D007-4366-6A294226C510}"/>
-              </a:ext>
-            </a:extLst>
-          </p:cNvPr>
-          <p:cNvSpPr txBox="1"/>
-          <p:nvPr/>
-        </p:nvSpPr>
-        <p:spPr>
-          <a:xfrm>
-            <a:off x="827584" y="1484784"/>
-            <a:ext cx="7624844" cy="1200329"/>
-          </a:xfrm>
-          <a:prstGeom prst="rect">
-            <a:avLst/>
-          </a:prstGeom>
-          <a:noFill/>
-        </p:spPr>
-        <p:txBody>
-          <a:bodyPr wrap="square">
-            <a:spAutoFit/>
-          </a:bodyPr>
-          <a:lstStyle>
-            <a:defPPr>
-              <a:defRPr lang="es-MX"/>
-            </a:defPPr>
-            <a:lvl1pPr>
-              <a:defRPr b="1" i="0">
-                <a:solidFill>
-                  <a:srgbClr val="000000"/>
-                </a:solidFill>
-                <a:effectLst/>
-                <a:latin typeface="Poppins-Regular"/>
-              </a:defRPr>
-            </a:lvl1pPr>
-          </a:lstStyle>
-          <a:p>
-            <a:r>
-              <a:rPr lang="es-MX" dirty="0">
-                <a:solidFill>
-                  <a:schemeClr val="tx1">
-                    <a:lumMod val="95000"/>
-                    <a:lumOff val="5000"/>
-                  </a:schemeClr>
-                </a:solidFill>
-                <a:latin typeface="+mn-lt"/>
-              </a:rPr>
-              <a:t>Raw </a:t>
-            </a:r>
-            <a:r>
-              <a:rPr lang="es-MX" dirty="0" err="1">
-                <a:solidFill>
-                  <a:schemeClr val="tx1">
-                    <a:lumMod val="95000"/>
-                    <a:lumOff val="5000"/>
-                  </a:schemeClr>
-                </a:solidFill>
-                <a:latin typeface="+mn-lt"/>
-              </a:rPr>
-              <a:t>string</a:t>
-            </a:r>
-            <a:r>
-              <a:rPr lang="es-MX" dirty="0">
-                <a:solidFill>
-                  <a:schemeClr val="tx1">
-                    <a:lumMod val="95000"/>
-                    <a:lumOff val="5000"/>
-                  </a:schemeClr>
-                </a:solidFill>
-                <a:latin typeface="+mn-lt"/>
-              </a:rPr>
-              <a:t>: </a:t>
-            </a:r>
-            <a:r>
-              <a:rPr lang="es-MX" b="0" dirty="0">
-                <a:solidFill>
-                  <a:schemeClr val="tx1">
-                    <a:lumMod val="95000"/>
-                    <a:lumOff val="5000"/>
-                  </a:schemeClr>
-                </a:solidFill>
-                <a:latin typeface="+mn-lt"/>
-              </a:rPr>
-              <a:t>Utilizamos una cadena "raw" (</a:t>
-            </a:r>
-            <a:r>
-              <a:rPr lang="es-MX" dirty="0" err="1">
-                <a:solidFill>
-                  <a:schemeClr val="tx1">
-                    <a:lumMod val="95000"/>
-                    <a:lumOff val="5000"/>
-                  </a:schemeClr>
-                </a:solidFill>
-                <a:latin typeface="+mn-lt"/>
-              </a:rPr>
-              <a:t>r"cadena</a:t>
-            </a:r>
-            <a:r>
-              <a:rPr lang="es-MX" dirty="0">
-                <a:solidFill>
-                  <a:schemeClr val="tx1">
-                    <a:lumMod val="95000"/>
-                    <a:lumOff val="5000"/>
-                  </a:schemeClr>
-                </a:solidFill>
-                <a:latin typeface="+mn-lt"/>
-              </a:rPr>
-              <a:t>"</a:t>
-            </a:r>
-            <a:r>
-              <a:rPr lang="es-MX" b="0" dirty="0">
-                <a:solidFill>
-                  <a:schemeClr val="tx1">
-                    <a:lumMod val="95000"/>
-                    <a:lumOff val="5000"/>
-                  </a:schemeClr>
-                </a:solidFill>
-                <a:latin typeface="+mn-lt"/>
-              </a:rPr>
-              <a:t>) para evitar problemas con los caracteres de escape en las expresiones regulares.</a:t>
-            </a:r>
-          </a:p>
-          <a:p>
-            <a:endParaRPr lang="es-MX" b="0" dirty="0">
-              <a:solidFill>
-                <a:schemeClr val="tx1">
-                  <a:lumMod val="95000"/>
-                  <a:lumOff val="5000"/>
-                </a:schemeClr>
-              </a:solidFill>
-              <a:latin typeface="+mn-lt"/>
-            </a:endParaRPr>
-          </a:p>
-          <a:p>
-            <a:r>
-              <a:rPr lang="es-MX" dirty="0">
-                <a:solidFill>
-                  <a:schemeClr val="tx1">
-                    <a:lumMod val="95000"/>
-                    <a:lumOff val="5000"/>
-                  </a:schemeClr>
-                </a:solidFill>
-                <a:latin typeface="+mn-lt"/>
-              </a:rPr>
-              <a:t>Ejemplo: </a:t>
-            </a:r>
-          </a:p>
-        </p:txBody>
-      </p:sp>
-      <p:pic>
-        <p:nvPicPr>
-          <p:cNvPr id="5" name="Imagen 4">
-            <a:extLst>
-              <a:ext uri="{FF2B5EF4-FFF2-40B4-BE49-F238E27FC236}">
-                <a16:creationId xmlns:a16="http://schemas.microsoft.com/office/drawing/2014/main" id="{A49844EA-464A-B92D-FFF7-A3303FD25631}"/>
-              </a:ext>
-            </a:extLst>
-          </p:cNvPr>
-          <p:cNvPicPr>
-            <a:picLocks noChangeAspect="1"/>
-          </p:cNvPicPr>
-          <p:nvPr/>
-        </p:nvPicPr>
-        <p:blipFill>
-          <a:blip r:embed="rId3"/>
-          <a:stretch>
-            <a:fillRect/>
-          </a:stretch>
-        </p:blipFill>
-        <p:spPr>
-          <a:xfrm>
-            <a:off x="1475656" y="2886844"/>
-            <a:ext cx="6030167" cy="2486372"/>
-          </a:xfrm>
-          <a:prstGeom prst="rect">
-            <a:avLst/>
-          </a:prstGeom>
-        </p:spPr>
-      </p:pic>
-    </p:spTree>
-    <p:extLst>
-      <p:ext uri="{BB962C8B-B14F-4D97-AF65-F5344CB8AC3E}">
-        <p14:creationId xmlns:p14="http://schemas.microsoft.com/office/powerpoint/2010/main" val="1919744961"/>
-      </p:ext>
-    </p:extLst>
-  </p:cSld>
-  <p:clrMapOvr>
-    <a:masterClrMapping/>
-  </p:clrMapOvr>
-</p:sld>
-</file>
-
-<file path=ppt/slides/slide51.xml><?xml version="1.0" encoding="utf-8"?>
 <p:sld xmlns:a="http://schemas.openxmlformats.org/drawingml/2006/main" xmlns:r="http://schemas.openxmlformats.org/officeDocument/2006/relationships" xmlns:p="http://schemas.openxmlformats.org/presentationml/2006/main">
   <p:cSld>
     <p:spTree>
@@ -21405,7 +20868,7 @@
                 <a:cs typeface="Calibri"/>
               </a:rPr>
               <a:pPr marL="25400"/>
-              <a:t>51</a:t>
+              <a:t>50</a:t>
             </a:fld>
             <a:endParaRPr dirty="0">
               <a:latin typeface="Calibri"/>
